--- a/GTM/Accounts/phov/deck/phov-deck-bewerkbaar.pptx
+++ b/GTM/Accounts/phov/deck/phov-deck-bewerkbaar.pptx
@@ -3090,20 +3090,22 @@
       <p:grpSpPr/>
       <p:sp>
         <p:nvSpPr>
-          <p:cNvPr id="2" name="Rectangle 1"/>
+          <p:cNvPr id="2" name="Rounded Rectangle 1"/>
           <p:cNvSpPr/>
           <p:nvPr/>
         </p:nvSpPr>
         <p:spPr>
           <a:xfrm>
-            <a:off x="0" y="0"/>
-            <a:ext cx="12192000" cy="139700"/>
+            <a:off x="762000" y="952500"/>
+            <a:ext cx="3937000" cy="3937000"/>
           </a:xfrm>
-          <a:prstGeom prst="rect">
-            <a:avLst/>
+          <a:prstGeom prst="roundRect">
+            <a:avLst>
+              <a:gd name="adj" fmla="val 3225"/>
+            </a:avLst>
           </a:prstGeom>
           <a:solidFill>
-            <a:srgbClr val="8CC63F"/>
+            <a:srgbClr val="002333"/>
           </a:solidFill>
           <a:ln>
             <a:noFill/>
@@ -3134,20 +3136,61 @@
       </p:sp>
       <p:sp>
         <p:nvSpPr>
-          <p:cNvPr id="3" name="Rectangle 2"/>
-          <p:cNvSpPr/>
+          <p:cNvPr id="3" name="TextBox 2"/>
+          <p:cNvSpPr txBox="1"/>
           <p:nvPr/>
         </p:nvSpPr>
         <p:spPr>
           <a:xfrm>
-            <a:off x="0" y="139700"/>
-            <a:ext cx="12192000" cy="63500"/>
+            <a:off x="1168400" y="1358900"/>
+            <a:ext cx="3175000" cy="406400"/>
           </a:xfrm>
           <a:prstGeom prst="rect">
             <a:avLst/>
           </a:prstGeom>
+          <a:noFill/>
+        </p:spPr>
+        <p:txBody>
+          <a:bodyPr wrap="square" lIns="0" rIns="0" tIns="0" bIns="0">
+            <a:spAutoFit/>
+          </a:bodyPr>
+          <a:lstStyle/>
+          <a:p>
+            <a:pPr algn="l">
+              <a:lnSpc>
+                <a:spcPct val="100000"/>
+              </a:lnSpc>
+            </a:pPr>
+            <a:r>
+              <a:rPr sz="2600" b="1">
+                <a:solidFill>
+                  <a:srgbClr val="00E075"/>
+                </a:solidFill>
+                <a:latin typeface="League Spartan"/>
+              </a:rPr>
+              <a:t>Geld</a:t>
+            </a:r>
+          </a:p>
+        </p:txBody>
+      </p:sp>
+      <p:sp>
+        <p:nvSpPr>
+          <p:cNvPr id="4" name="Rounded Rectangle 3"/>
+          <p:cNvSpPr/>
+          <p:nvPr/>
+        </p:nvSpPr>
+        <p:spPr>
+          <a:xfrm>
+            <a:off x="1168400" y="2101532"/>
+            <a:ext cx="76200" cy="76200"/>
+          </a:xfrm>
+          <a:prstGeom prst="roundRect">
+            <a:avLst>
+              <a:gd name="adj" fmla="val 25000"/>
+            </a:avLst>
+          </a:prstGeom>
           <a:solidFill>
-            <a:srgbClr val="D4E9C2"/>
+            <a:srgbClr val="00E075"/>
           </a:solidFill>
           <a:ln>
             <a:noFill/>
@@ -3178,20 +3221,61 @@
       </p:sp>
       <p:sp>
         <p:nvSpPr>
-          <p:cNvPr id="4" name="Rectangle 3"/>
-          <p:cNvSpPr/>
+          <p:cNvPr id="5" name="TextBox 4"/>
+          <p:cNvSpPr txBox="1"/>
           <p:nvPr/>
         </p:nvSpPr>
         <p:spPr>
           <a:xfrm>
-            <a:off x="762000" y="5715000"/>
-            <a:ext cx="10668000" cy="19050"/>
+            <a:off x="1397000" y="1993900"/>
+            <a:ext cx="2946400" cy="582930"/>
           </a:xfrm>
           <a:prstGeom prst="rect">
             <a:avLst/>
           </a:prstGeom>
+          <a:noFill/>
+        </p:spPr>
+        <p:txBody>
+          <a:bodyPr wrap="square" lIns="0" rIns="0" tIns="0" bIns="0">
+            <a:spAutoFit/>
+          </a:bodyPr>
+          <a:lstStyle/>
+          <a:p>
+            <a:pPr algn="l">
+              <a:lnSpc>
+                <a:spcPct val="135000"/>
+              </a:lnSpc>
+            </a:pPr>
+            <a:r>
+              <a:rPr sz="1700" b="0">
+                <a:solidFill>
+                  <a:srgbClr val="FFFFFF"/>
+                </a:solidFill>
+                <a:latin typeface="Inter"/>
+              </a:rPr>
+              <a:t>PHOV betaalt docenten voor elk uur dat ze beoordelen</a:t>
+            </a:r>
+          </a:p>
+        </p:txBody>
+      </p:sp>
+      <p:sp>
+        <p:nvSpPr>
+          <p:cNvPr id="6" name="Rounded Rectangle 5"/>
+          <p:cNvSpPr/>
+          <p:nvPr/>
+        </p:nvSpPr>
+        <p:spPr>
+          <a:xfrm>
+            <a:off x="1168400" y="2938462"/>
+            <a:ext cx="76200" cy="76200"/>
+          </a:xfrm>
+          <a:prstGeom prst="roundRect">
+            <a:avLst>
+              <a:gd name="adj" fmla="val 25000"/>
+            </a:avLst>
+          </a:prstGeom>
           <a:solidFill>
-            <a:srgbClr val="91B5D4"/>
+            <a:srgbClr val="00E075"/>
           </a:solidFill>
           <a:ln>
             <a:noFill/>
@@ -3220,54 +3304,6 @@
           </a:p>
         </p:txBody>
       </p:sp>
-      <p:pic>
-        <p:nvPicPr>
-          <p:cNvPr id="5" name="Picture 4" descr="klant.png"/>
-          <p:cNvPicPr>
-            <a:picLocks noChangeAspect="1"/>
-          </p:cNvPicPr>
-          <p:nvPr/>
-        </p:nvPicPr>
-        <p:blipFill>
-          <a:blip r:embed="rId2"/>
-          <a:stretch>
-            <a:fillRect/>
-          </a:stretch>
-        </p:blipFill>
-        <p:spPr>
-          <a:xfrm>
-            <a:off x="762000" y="5905500"/>
-            <a:ext cx="571500" cy="571500"/>
-          </a:xfrm>
-          <a:prstGeom prst="rect">
-            <a:avLst/>
-          </a:prstGeom>
-        </p:spPr>
-      </p:pic>
-      <p:pic>
-        <p:nvPicPr>
-          <p:cNvPr id="6" name="Picture 5" descr="logo_navy.png"/>
-          <p:cNvPicPr>
-            <a:picLocks noChangeAspect="1"/>
-          </p:cNvPicPr>
-          <p:nvPr/>
-        </p:nvPicPr>
-        <p:blipFill>
-          <a:blip r:embed="rId3"/>
-          <a:stretch>
-            <a:fillRect/>
-          </a:stretch>
-        </p:blipFill>
-        <p:spPr>
-          <a:xfrm>
-            <a:off x="9906000" y="6083300"/>
-            <a:ext cx="825500" cy="222250"/>
-          </a:xfrm>
-          <a:prstGeom prst="rect">
-            <a:avLst/>
-          </a:prstGeom>
-        </p:spPr>
-      </p:pic>
       <p:sp>
         <p:nvSpPr>
           <p:cNvPr id="7" name="TextBox 6"/>
@@ -3276,8 +3312,8 @@
         </p:nvSpPr>
         <p:spPr>
           <a:xfrm>
-            <a:off x="10922000" y="6096000"/>
-            <a:ext cx="508000" cy="228600"/>
+            <a:off x="1397000" y="2830830"/>
+            <a:ext cx="2946400" cy="582930"/>
           </a:xfrm>
           <a:prstGeom prst="rect">
             <a:avLst/>
@@ -3290,39 +3326,80 @@
           </a:bodyPr>
           <a:lstStyle/>
           <a:p>
-            <a:pPr algn="r">
+            <a:pPr algn="l">
               <a:lnSpc>
-                <a:spcPct val="130000"/>
+                <a:spcPct val="135000"/>
               </a:lnSpc>
             </a:pPr>
             <a:r>
-              <a:rPr sz="1300" b="0">
+              <a:rPr sz="1700" b="0">
                 <a:solidFill>
-                  <a:srgbClr val="6B7A90"/>
+                  <a:srgbClr val="FFFFFF"/>
                 </a:solidFill>
-                <a:latin typeface="Fira Sans"/>
+                <a:latin typeface="Inter"/>
               </a:rPr>
-              <a:t>3</a:t>
-            </a:r>
-          </a:p>
-        </p:txBody>
-      </p:sp>
-      <p:sp>
-        <p:nvSpPr>
-          <p:cNvPr id="8" name="Rectangle 7"/>
-          <p:cNvSpPr/>
+              <a:t>En PHOV eist dat ze feedback geven</a:t>
+            </a:r>
+          </a:p>
+        </p:txBody>
+      </p:sp>
+      <p:sp>
+        <p:nvSpPr>
+          <p:cNvPr id="8" name="TextBox 7"/>
+          <p:cNvSpPr txBox="1"/>
           <p:nvPr/>
         </p:nvSpPr>
         <p:spPr>
           <a:xfrm>
-            <a:off x="762000" y="952500"/>
-            <a:ext cx="3937000" cy="3937000"/>
+            <a:off x="5308600" y="1358900"/>
+            <a:ext cx="5080000" cy="406400"/>
           </a:xfrm>
           <a:prstGeom prst="rect">
             <a:avLst/>
           </a:prstGeom>
+          <a:noFill/>
+        </p:spPr>
+        <p:txBody>
+          <a:bodyPr wrap="square" lIns="0" rIns="0" tIns="0" bIns="0">
+            <a:spAutoFit/>
+          </a:bodyPr>
+          <a:lstStyle/>
+          <a:p>
+            <a:pPr algn="l">
+              <a:lnSpc>
+                <a:spcPct val="100000"/>
+              </a:lnSpc>
+            </a:pPr>
+            <a:r>
+              <a:rPr sz="2600" b="1">
+                <a:solidFill>
+                  <a:srgbClr val="002333"/>
+                </a:solidFill>
+                <a:latin typeface="League Spartan"/>
+              </a:rPr>
+              <a:t>Consistentie</a:t>
+            </a:r>
+          </a:p>
+        </p:txBody>
+      </p:sp>
+      <p:sp>
+        <p:nvSpPr>
+          <p:cNvPr id="9" name="Rounded Rectangle 8"/>
+          <p:cNvSpPr/>
+          <p:nvPr/>
+        </p:nvSpPr>
+        <p:spPr>
+          <a:xfrm>
+            <a:off x="5308600" y="2101532"/>
+            <a:ext cx="76200" cy="76200"/>
+          </a:xfrm>
+          <a:prstGeom prst="roundRect">
+            <a:avLst>
+              <a:gd name="adj" fmla="val 25000"/>
+            </a:avLst>
+          </a:prstGeom>
           <a:solidFill>
-            <a:srgbClr val="112E65"/>
+            <a:srgbClr val="007B54"/>
           </a:solidFill>
           <a:ln>
             <a:noFill/>
@@ -3353,14 +3430,14 @@
       </p:sp>
       <p:sp>
         <p:nvSpPr>
-          <p:cNvPr id="9" name="TextBox 8"/>
+          <p:cNvPr id="10" name="TextBox 9"/>
           <p:cNvSpPr txBox="1"/>
           <p:nvPr/>
         </p:nvSpPr>
         <p:spPr>
           <a:xfrm>
-            <a:off x="1117600" y="1308100"/>
-            <a:ext cx="3302000" cy="381000"/>
+            <a:off x="5537200" y="1993900"/>
+            <a:ext cx="5892800" cy="582930"/>
           </a:xfrm>
           <a:prstGeom prst="rect">
             <a:avLst/>
@@ -3375,39 +3452,39 @@
           <a:p>
             <a:pPr algn="l">
               <a:lnSpc>
-                <a:spcPct val="100000"/>
+                <a:spcPct val="135000"/>
               </a:lnSpc>
             </a:pPr>
             <a:r>
-              <a:rPr sz="2400" b="1">
+              <a:rPr sz="1700" b="0">
                 <a:solidFill>
-                  <a:srgbClr val="8CC63F"/>
+                  <a:srgbClr val="002333"/>
                 </a:solidFill>
-                <a:latin typeface="Barlow Condensed"/>
+                <a:latin typeface="Inter"/>
               </a:rPr>
-              <a:t>GELD</a:t>
-            </a:r>
-          </a:p>
-        </p:txBody>
-      </p:sp>
-      <p:sp>
-        <p:nvSpPr>
-          <p:cNvPr id="10" name="Rounded Rectangle 9"/>
+              <a:t>Vooraf liggen de oordelen van beoordelaars ver uit elkaar, pas na overleg komen ze dichter bij elkaar</a:t>
+            </a:r>
+          </a:p>
+        </p:txBody>
+      </p:sp>
+      <p:sp>
+        <p:nvSpPr>
+          <p:cNvPr id="11" name="Rounded Rectangle 10"/>
           <p:cNvSpPr/>
           <p:nvPr/>
         </p:nvSpPr>
         <p:spPr>
           <a:xfrm>
-            <a:off x="1117600" y="2000885"/>
-            <a:ext cx="88900" cy="88900"/>
+            <a:off x="5308600" y="2887662"/>
+            <a:ext cx="76200" cy="76200"/>
           </a:xfrm>
           <a:prstGeom prst="roundRect">
             <a:avLst>
-              <a:gd name="adj" fmla="val 21428"/>
+              <a:gd name="adj" fmla="val 25000"/>
             </a:avLst>
           </a:prstGeom>
           <a:solidFill>
-            <a:srgbClr val="8CC63F"/>
+            <a:srgbClr val="007B54"/>
           </a:solidFill>
           <a:ln>
             <a:noFill/>
@@ -3438,14 +3515,14 @@
       </p:sp>
       <p:sp>
         <p:nvSpPr>
-          <p:cNvPr id="11" name="TextBox 10"/>
+          <p:cNvPr id="12" name="TextBox 11"/>
           <p:cNvSpPr txBox="1"/>
           <p:nvPr/>
         </p:nvSpPr>
         <p:spPr>
           <a:xfrm>
-            <a:off x="1371600" y="1905000"/>
-            <a:ext cx="3048000" cy="561340"/>
+            <a:off x="5537200" y="2780030"/>
+            <a:ext cx="5892800" cy="582930"/>
           </a:xfrm>
           <a:prstGeom prst="rect">
             <a:avLst/>
@@ -3460,39 +3537,39 @@
           <a:p>
             <a:pPr algn="l">
               <a:lnSpc>
-                <a:spcPct val="130000"/>
+                <a:spcPct val="135000"/>
               </a:lnSpc>
             </a:pPr>
             <a:r>
               <a:rPr sz="1700" b="0">
                 <a:solidFill>
-                  <a:srgbClr val="FFFFFF"/>
+                  <a:srgbClr val="002333"/>
                 </a:solidFill>
-                <a:latin typeface="Fira Sans"/>
+                <a:latin typeface="Inter"/>
               </a:rPr>
-              <a:t>PHOV betaalt docenten voor elk uur dat ze beoordelen</a:t>
-            </a:r>
-          </a:p>
-        </p:txBody>
-      </p:sp>
-      <p:sp>
-        <p:nvSpPr>
-          <p:cNvPr id="12" name="Rounded Rectangle 11"/>
+              <a:t>Daarom kalibreren jullie scripties minstens één keer per twee jaar. De nieuwe rubric is nog niet getest.</a:t>
+            </a:r>
+          </a:p>
+        </p:txBody>
+      </p:sp>
+      <p:sp>
+        <p:nvSpPr>
+          <p:cNvPr id="13" name="Rounded Rectangle 12"/>
           <p:cNvSpPr/>
           <p:nvPr/>
         </p:nvSpPr>
         <p:spPr>
           <a:xfrm>
-            <a:off x="1117600" y="2816225"/>
-            <a:ext cx="88900" cy="88900"/>
+            <a:off x="5308600" y="3673793"/>
+            <a:ext cx="76200" cy="76200"/>
           </a:xfrm>
           <a:prstGeom prst="roundRect">
             <a:avLst>
-              <a:gd name="adj" fmla="val 21428"/>
+              <a:gd name="adj" fmla="val 25000"/>
             </a:avLst>
           </a:prstGeom>
           <a:solidFill>
-            <a:srgbClr val="8CC63F"/>
+            <a:srgbClr val="007B54"/>
           </a:solidFill>
           <a:ln>
             <a:noFill/>
@@ -3523,14 +3600,14 @@
       </p:sp>
       <p:sp>
         <p:nvSpPr>
-          <p:cNvPr id="13" name="TextBox 12"/>
+          <p:cNvPr id="14" name="TextBox 13"/>
           <p:cNvSpPr txBox="1"/>
           <p:nvPr/>
         </p:nvSpPr>
         <p:spPr>
           <a:xfrm>
-            <a:off x="1371600" y="2720340"/>
-            <a:ext cx="3048000" cy="561340"/>
+            <a:off x="5537200" y="3566160"/>
+            <a:ext cx="5892800" cy="582930"/>
           </a:xfrm>
           <a:prstGeom prst="rect">
             <a:avLst/>
@@ -3545,56 +3622,17 @@
           <a:p>
             <a:pPr algn="l">
               <a:lnSpc>
-                <a:spcPct val="130000"/>
+                <a:spcPct val="135000"/>
               </a:lnSpc>
             </a:pPr>
             <a:r>
               <a:rPr sz="1700" b="0">
                 <a:solidFill>
-                  <a:srgbClr val="FFFFFF"/>
+                  <a:srgbClr val="002333"/>
                 </a:solidFill>
-                <a:latin typeface="Fira Sans"/>
+                <a:latin typeface="Inter"/>
               </a:rPr>
-              <a:t>En PHOV eist dat ze feedback geven</a:t>
-            </a:r>
-          </a:p>
-        </p:txBody>
-      </p:sp>
-      <p:sp>
-        <p:nvSpPr>
-          <p:cNvPr id="14" name="TextBox 13"/>
-          <p:cNvSpPr txBox="1"/>
-          <p:nvPr/>
-        </p:nvSpPr>
-        <p:spPr>
-          <a:xfrm>
-            <a:off x="5308600" y="1308100"/>
-            <a:ext cx="5080000" cy="381000"/>
-          </a:xfrm>
-          <a:prstGeom prst="rect">
-            <a:avLst/>
-          </a:prstGeom>
-          <a:noFill/>
-        </p:spPr>
-        <p:txBody>
-          <a:bodyPr wrap="square" lIns="0" rIns="0" tIns="0" bIns="0">
-            <a:spAutoFit/>
-          </a:bodyPr>
-          <a:lstStyle/>
-          <a:p>
-            <a:pPr algn="l">
-              <a:lnSpc>
-                <a:spcPct val="100000"/>
-              </a:lnSpc>
-            </a:pPr>
-            <a:r>
-              <a:rPr sz="2400" b="1">
-                <a:solidFill>
-                  <a:srgbClr val="69AA13"/>
-                </a:solidFill>
-                <a:latin typeface="Barlow Condensed"/>
-              </a:rPr>
-              <a:t>CONSISTENTIE</a:t>
+              <a:t>Kalibratie hoort over de inhoud te gaan, maar gaat soms over handtekeningen op een formulier</a:t>
             </a:r>
           </a:p>
         </p:txBody>
@@ -3607,16 +3645,16 @@
         </p:nvSpPr>
         <p:spPr>
           <a:xfrm>
-            <a:off x="5308600" y="2000885"/>
-            <a:ext cx="88900" cy="88900"/>
+            <a:off x="5308600" y="4459923"/>
+            <a:ext cx="76200" cy="76200"/>
           </a:xfrm>
           <a:prstGeom prst="roundRect">
             <a:avLst>
-              <a:gd name="adj" fmla="val 21428"/>
+              <a:gd name="adj" fmla="val 25000"/>
             </a:avLst>
           </a:prstGeom>
           <a:solidFill>
-            <a:srgbClr val="8CC63F"/>
+            <a:srgbClr val="007B54"/>
           </a:solidFill>
           <a:ln>
             <a:noFill/>
@@ -3653,8 +3691,8 @@
         </p:nvSpPr>
         <p:spPr>
           <a:xfrm>
-            <a:off x="5562600" y="1905000"/>
-            <a:ext cx="5867400" cy="561340"/>
+            <a:off x="5537200" y="4352290"/>
+            <a:ext cx="5892800" cy="291465"/>
           </a:xfrm>
           <a:prstGeom prst="rect">
             <a:avLst/>
@@ -3669,39 +3707,37 @@
           <a:p>
             <a:pPr algn="l">
               <a:lnSpc>
-                <a:spcPct val="130000"/>
+                <a:spcPct val="135000"/>
               </a:lnSpc>
             </a:pPr>
             <a:r>
               <a:rPr sz="1700" b="0">
                 <a:solidFill>
-                  <a:srgbClr val="112E65"/>
+                  <a:srgbClr val="002333"/>
                 </a:solidFill>
-                <a:latin typeface="Fira Sans"/>
+                <a:latin typeface="Inter"/>
               </a:rPr>
-              <a:t>Vooraf liggen de oordelen van beoordelaars ver uit elkaar, pas na overleg komen ze dichter bij elkaar</a:t>
-            </a:r>
-          </a:p>
-        </p:txBody>
-      </p:sp>
-      <p:sp>
-        <p:nvSpPr>
-          <p:cNvPr id="17" name="Rounded Rectangle 16"/>
+              <a:t>De directie schuift zelf aan om mensen scherp te houden</a:t>
+            </a:r>
+          </a:p>
+        </p:txBody>
+      </p:sp>
+      <p:sp>
+        <p:nvSpPr>
+          <p:cNvPr id="17" name="Rectangle 16"/>
           <p:cNvSpPr/>
           <p:nvPr/>
         </p:nvSpPr>
         <p:spPr>
           <a:xfrm>
-            <a:off x="5308600" y="2752725"/>
-            <a:ext cx="88900" cy="88900"/>
+            <a:off x="762000" y="5511800"/>
+            <a:ext cx="10668000" cy="6350"/>
           </a:xfrm>
-          <a:prstGeom prst="roundRect">
-            <a:avLst>
-              <a:gd name="adj" fmla="val 21428"/>
-            </a:avLst>
+          <a:prstGeom prst="rect">
+            <a:avLst/>
           </a:prstGeom>
           <a:solidFill>
-            <a:srgbClr val="8CC63F"/>
+            <a:srgbClr val="E7EEF0"/>
           </a:solidFill>
           <a:ln>
             <a:noFill/>
@@ -3730,63 +3766,46 @@
           </a:p>
         </p:txBody>
       </p:sp>
-      <p:sp>
-        <p:nvSpPr>
-          <p:cNvPr id="18" name="TextBox 17"/>
-          <p:cNvSpPr txBox="1"/>
+      <p:pic>
+        <p:nvPicPr>
+          <p:cNvPr id="18" name="Picture 17" descr="logo_navy.png"/>
+          <p:cNvPicPr>
+            <a:picLocks noChangeAspect="1"/>
+          </p:cNvPicPr>
           <p:nvPr/>
-        </p:nvSpPr>
+        </p:nvPicPr>
+        <p:blipFill>
+          <a:blip r:embed="rId2"/>
+          <a:stretch>
+            <a:fillRect/>
+          </a:stretch>
+        </p:blipFill>
         <p:spPr>
           <a:xfrm>
-            <a:off x="5562600" y="2656840"/>
-            <a:ext cx="5867400" cy="561340"/>
+            <a:off x="9010650" y="5759450"/>
+            <a:ext cx="1079500" cy="292100"/>
           </a:xfrm>
           <a:prstGeom prst="rect">
             <a:avLst/>
           </a:prstGeom>
-          <a:noFill/>
         </p:spPr>
-        <p:txBody>
-          <a:bodyPr wrap="square" lIns="0" rIns="0" tIns="0" bIns="0">
-            <a:spAutoFit/>
-          </a:bodyPr>
-          <a:lstStyle/>
-          <a:p>
-            <a:pPr algn="l">
-              <a:lnSpc>
-                <a:spcPct val="130000"/>
-              </a:lnSpc>
-            </a:pPr>
-            <a:r>
-              <a:rPr sz="1700" b="0">
-                <a:solidFill>
-                  <a:srgbClr val="112E65"/>
-                </a:solidFill>
-                <a:latin typeface="Fira Sans"/>
-              </a:rPr>
-              <a:t>Daarom kalibreren jullie scripties minstens één keer per twee jaar. De nieuwe rubric is nog niet getest.</a:t>
-            </a:r>
-          </a:p>
-        </p:txBody>
-      </p:sp>
-      <p:sp>
-        <p:nvSpPr>
-          <p:cNvPr id="19" name="Rounded Rectangle 18"/>
+      </p:pic>
+      <p:sp>
+        <p:nvSpPr>
+          <p:cNvPr id="19" name="Rectangle 18"/>
           <p:cNvSpPr/>
           <p:nvPr/>
         </p:nvSpPr>
         <p:spPr>
           <a:xfrm>
-            <a:off x="5308600" y="3504565"/>
-            <a:ext cx="88900" cy="88900"/>
+            <a:off x="10344150" y="5740400"/>
+            <a:ext cx="6350" cy="330200"/>
           </a:xfrm>
-          <a:prstGeom prst="roundRect">
-            <a:avLst>
-              <a:gd name="adj" fmla="val 21428"/>
-            </a:avLst>
+          <a:prstGeom prst="rect">
+            <a:avLst/>
           </a:prstGeom>
           <a:solidFill>
-            <a:srgbClr val="8CC63F"/>
+            <a:srgbClr val="CDD9DE"/>
           </a:solidFill>
           <a:ln>
             <a:noFill/>
@@ -3815,16 +3834,40 @@
           </a:p>
         </p:txBody>
       </p:sp>
-      <p:sp>
-        <p:nvSpPr>
-          <p:cNvPr id="20" name="TextBox 19"/>
+      <p:pic>
+        <p:nvPicPr>
+          <p:cNvPr id="20" name="Picture 19" descr="klant.png"/>
+          <p:cNvPicPr>
+            <a:picLocks noChangeAspect="1"/>
+          </p:cNvPicPr>
+          <p:nvPr/>
+        </p:nvPicPr>
+        <p:blipFill>
+          <a:blip r:embed="rId3"/>
+          <a:stretch>
+            <a:fillRect/>
+          </a:stretch>
+        </p:blipFill>
+        <p:spPr>
+          <a:xfrm>
+            <a:off x="10604500" y="5715000"/>
+            <a:ext cx="381000" cy="381000"/>
+          </a:xfrm>
+          <a:prstGeom prst="rect">
+            <a:avLst/>
+          </a:prstGeom>
+        </p:spPr>
+      </p:pic>
+      <p:sp>
+        <p:nvSpPr>
+          <p:cNvPr id="21" name="TextBox 20"/>
           <p:cNvSpPr txBox="1"/>
           <p:nvPr/>
         </p:nvSpPr>
         <p:spPr>
           <a:xfrm>
-            <a:off x="5562600" y="3408680"/>
-            <a:ext cx="5867400" cy="561340"/>
+            <a:off x="10795000" y="6375400"/>
+            <a:ext cx="635000" cy="228600"/>
           </a:xfrm>
           <a:prstGeom prst="rect">
             <a:avLst/>
@@ -3837,104 +3880,19 @@
           </a:bodyPr>
           <a:lstStyle/>
           <a:p>
-            <a:pPr algn="l">
+            <a:pPr algn="r">
               <a:lnSpc>
-                <a:spcPct val="130000"/>
+                <a:spcPct val="115000"/>
               </a:lnSpc>
             </a:pPr>
             <a:r>
-              <a:rPr sz="1700" b="0">
+              <a:rPr sz="1150" b="0">
                 <a:solidFill>
-                  <a:srgbClr val="112E65"/>
+                  <a:srgbClr val="9AAFB8"/>
                 </a:solidFill>
-                <a:latin typeface="Fira Sans"/>
+                <a:latin typeface="Inter"/>
               </a:rPr>
-              <a:t>Kalibratie hoort over de inhoud te gaan, maar gaat soms over handtekeningen op een formulier</a:t>
-            </a:r>
-          </a:p>
-        </p:txBody>
-      </p:sp>
-      <p:sp>
-        <p:nvSpPr>
-          <p:cNvPr id="21" name="Rounded Rectangle 20"/>
-          <p:cNvSpPr/>
-          <p:nvPr/>
-        </p:nvSpPr>
-        <p:spPr>
-          <a:xfrm>
-            <a:off x="5308600" y="4256405"/>
-            <a:ext cx="88900" cy="88900"/>
-          </a:xfrm>
-          <a:prstGeom prst="roundRect">
-            <a:avLst>
-              <a:gd name="adj" fmla="val 21428"/>
-            </a:avLst>
-          </a:prstGeom>
-          <a:solidFill>
-            <a:srgbClr val="8CC63F"/>
-          </a:solidFill>
-          <a:ln>
-            <a:noFill/>
-          </a:ln>
-          <a:effectLst/>
-        </p:spPr>
-        <p:style>
-          <a:lnRef idx="1">
-            <a:schemeClr val="accent1"/>
-          </a:lnRef>
-          <a:fillRef idx="3">
-            <a:schemeClr val="accent1"/>
-          </a:fillRef>
-          <a:effectRef idx="2">
-            <a:schemeClr val="accent1"/>
-          </a:effectRef>
-          <a:fontRef idx="minor">
-            <a:schemeClr val="lt1"/>
-          </a:fontRef>
-        </p:style>
-        <p:txBody>
-          <a:bodyPr rtlCol="0" anchor="ctr"/>
-          <a:lstStyle/>
-          <a:p>
-            <a:pPr algn="ctr"/>
-          </a:p>
-        </p:txBody>
-      </p:sp>
-      <p:sp>
-        <p:nvSpPr>
-          <p:cNvPr id="22" name="TextBox 21"/>
-          <p:cNvSpPr txBox="1"/>
-          <p:nvPr/>
-        </p:nvSpPr>
-        <p:spPr>
-          <a:xfrm>
-            <a:off x="5562600" y="4160520"/>
-            <a:ext cx="5867400" cy="280670"/>
-          </a:xfrm>
-          <a:prstGeom prst="rect">
-            <a:avLst/>
-          </a:prstGeom>
-          <a:noFill/>
-        </p:spPr>
-        <p:txBody>
-          <a:bodyPr wrap="square" lIns="0" rIns="0" tIns="0" bIns="0">
-            <a:spAutoFit/>
-          </a:bodyPr>
-          <a:lstStyle/>
-          <a:p>
-            <a:pPr algn="l">
-              <a:lnSpc>
-                <a:spcPct val="130000"/>
-              </a:lnSpc>
-            </a:pPr>
-            <a:r>
-              <a:rPr sz="1700" b="0">
-                <a:solidFill>
-                  <a:srgbClr val="112E65"/>
-                </a:solidFill>
-                <a:latin typeface="Fira Sans"/>
-              </a:rPr>
-              <a:t>De directie schuift zelf aan om mensen scherp te houden</a:t>
+              <a:t>3</a:t>
             </a:r>
           </a:p>
         </p:txBody>

--- a/GTM/Accounts/phov/deck/phov-deck-bewerkbaar.pptx
+++ b/GTM/Accounts/phov/deck/phov-deck-bewerkbaar.pptx
@@ -1008,6 +1008,12 @@
           <a:p>
             <a:r>
               <a:t>- Minimaal 1.500 euro voor het reserveren van AI-capaciteit</a:t>
+            </a:r>
+          </a:p>
+          <a:p/>
+          <a:p>
+            <a:r>
+              <a:t>Wat het dekt: AI Paper Grader (schrijfopdrachten) en AI Exam Grader (tentamens), allebei live. Rubric-scoring met uitlegbare cijferopbouw. De docent keurt elke opmerking en elk cijfer goed voordat de student iets ziet.</a:t>
             </a:r>
           </a:p>
         </p:txBody>
@@ -4015,7 +4021,51 @@
       <p:grpSpPr/>
       <p:sp>
         <p:nvSpPr>
-          <p:cNvPr id="2" name="TextBox 1"/>
+          <p:cNvPr id="2" name="Rectangle 1"/>
+          <p:cNvSpPr/>
+          <p:nvPr/>
+        </p:nvSpPr>
+        <p:spPr>
+          <a:xfrm>
+            <a:off x="0" y="0"/>
+            <a:ext cx="12192000" cy="6858000"/>
+          </a:xfrm>
+          <a:prstGeom prst="rect">
+            <a:avLst/>
+          </a:prstGeom>
+          <a:solidFill>
+            <a:srgbClr val="002333"/>
+          </a:solidFill>
+          <a:ln>
+            <a:noFill/>
+          </a:ln>
+          <a:effectLst/>
+        </p:spPr>
+        <p:style>
+          <a:lnRef idx="1">
+            <a:schemeClr val="accent1"/>
+          </a:lnRef>
+          <a:fillRef idx="3">
+            <a:schemeClr val="accent1"/>
+          </a:fillRef>
+          <a:effectRef idx="2">
+            <a:schemeClr val="accent1"/>
+          </a:effectRef>
+          <a:fontRef idx="minor">
+            <a:schemeClr val="lt1"/>
+          </a:fontRef>
+        </p:style>
+        <p:txBody>
+          <a:bodyPr rtlCol="0" anchor="ctr"/>
+          <a:lstStyle/>
+          <a:p>
+            <a:pPr algn="ctr"/>
+          </a:p>
+        </p:txBody>
+      </p:sp>
+      <p:sp>
+        <p:nvSpPr>
+          <p:cNvPr id="3" name="TextBox 2"/>
           <p:cNvSpPr txBox="1"/>
           <p:nvPr/>
         </p:nvSpPr>
@@ -4043,7 +4093,7 @@
             <a:r>
               <a:rPr sz="4800" b="1">
                 <a:solidFill>
-                  <a:srgbClr val="002333"/>
+                  <a:srgbClr val="FFFFFF"/>
                 </a:solidFill>
                 <a:latin typeface="League Spartan"/>
               </a:rPr>
@@ -4054,7 +4104,7 @@
       </p:sp>
       <p:sp>
         <p:nvSpPr>
-          <p:cNvPr id="3" name="TextBox 2"/>
+          <p:cNvPr id="4" name="TextBox 3"/>
           <p:cNvSpPr txBox="1"/>
           <p:nvPr/>
         </p:nvSpPr>
@@ -4082,7 +4132,7 @@
             <a:r>
               <a:rPr sz="2800" b="1">
                 <a:solidFill>
-                  <a:srgbClr val="002333"/>
+                  <a:srgbClr val="FFFFFF"/>
                 </a:solidFill>
                 <a:latin typeface="League Spartan"/>
               </a:rPr>
@@ -4098,7 +4148,7 @@
             <a:r>
               <a:rPr sz="2800" b="1">
                 <a:solidFill>
-                  <a:srgbClr val="002333"/>
+                  <a:srgbClr val="FFFFFF"/>
                 </a:solidFill>
                 <a:latin typeface="League Spartan"/>
               </a:rPr>
@@ -4109,7 +4159,7 @@
       </p:sp>
       <p:sp>
         <p:nvSpPr>
-          <p:cNvPr id="4" name="Rounded Rectangle 3"/>
+          <p:cNvPr id="5" name="Rounded Rectangle 4"/>
           <p:cNvSpPr/>
           <p:nvPr/>
         </p:nvSpPr>
@@ -4124,7 +4174,7 @@
             </a:avLst>
           </a:prstGeom>
           <a:solidFill>
-            <a:srgbClr val="F3F7F8"/>
+            <a:srgbClr val="0E3546"/>
           </a:solidFill>
           <a:ln>
             <a:noFill/>
@@ -4155,7 +4205,7 @@
       </p:sp>
       <p:sp>
         <p:nvSpPr>
-          <p:cNvPr id="5" name="TextBox 4"/>
+          <p:cNvPr id="6" name="TextBox 5"/>
           <p:cNvSpPr txBox="1"/>
           <p:nvPr/>
         </p:nvSpPr>
@@ -4183,7 +4233,7 @@
             <a:r>
               <a:rPr sz="1700" b="0">
                 <a:solidFill>
-                  <a:srgbClr val="002333"/>
+                  <a:srgbClr val="FFFFFF"/>
                 </a:solidFill>
                 <a:latin typeface="Inter"/>
               </a:rPr>
@@ -4194,7 +4244,7 @@
       </p:sp>
       <p:sp>
         <p:nvSpPr>
-          <p:cNvPr id="6" name="Rounded Rectangle 5"/>
+          <p:cNvPr id="7" name="Rounded Rectangle 6"/>
           <p:cNvSpPr/>
           <p:nvPr/>
         </p:nvSpPr>
@@ -4209,7 +4259,7 @@
             </a:avLst>
           </a:prstGeom>
           <a:solidFill>
-            <a:srgbClr val="F3F7F8"/>
+            <a:srgbClr val="0E3546"/>
           </a:solidFill>
           <a:ln>
             <a:noFill/>
@@ -4240,7 +4290,7 @@
       </p:sp>
       <p:sp>
         <p:nvSpPr>
-          <p:cNvPr id="7" name="TextBox 6"/>
+          <p:cNvPr id="8" name="TextBox 7"/>
           <p:cNvSpPr txBox="1"/>
           <p:nvPr/>
         </p:nvSpPr>
@@ -4268,7 +4318,7 @@
             <a:r>
               <a:rPr sz="1700" b="0">
                 <a:solidFill>
-                  <a:srgbClr val="002333"/>
+                  <a:srgbClr val="FFFFFF"/>
                 </a:solidFill>
                 <a:latin typeface="Inter"/>
               </a:rPr>
@@ -4279,7 +4329,7 @@
       </p:sp>
       <p:sp>
         <p:nvSpPr>
-          <p:cNvPr id="8" name="TextBox 7"/>
+          <p:cNvPr id="9" name="TextBox 8"/>
           <p:cNvSpPr txBox="1"/>
           <p:nvPr/>
         </p:nvSpPr>
@@ -4307,7 +4357,7 @@
             <a:r>
               <a:rPr sz="1700" b="1">
                 <a:solidFill>
-                  <a:srgbClr val="002333"/>
+                  <a:srgbClr val="00E075"/>
                 </a:solidFill>
                 <a:latin typeface="Inter"/>
               </a:rPr>
@@ -4318,7 +4368,7 @@
       </p:sp>
       <p:sp>
         <p:nvSpPr>
-          <p:cNvPr id="9" name="Rectangle 8"/>
+          <p:cNvPr id="10" name="Rectangle 9"/>
           <p:cNvSpPr/>
           <p:nvPr/>
         </p:nvSpPr>
@@ -4331,7 +4381,7 @@
             <a:avLst/>
           </a:prstGeom>
           <a:solidFill>
-            <a:srgbClr val="E7EEF0"/>
+            <a:srgbClr val="FFFFFF"/>
           </a:solidFill>
           <a:ln>
             <a:noFill/>
@@ -4360,9 +4410,55 @@
           </a:p>
         </p:txBody>
       </p:sp>
+      <p:sp>
+        <p:nvSpPr>
+          <p:cNvPr id="11" name="Rounded Rectangle 10"/>
+          <p:cNvSpPr/>
+          <p:nvPr/>
+        </p:nvSpPr>
+        <p:spPr>
+          <a:xfrm>
+            <a:off x="8890000" y="5626100"/>
+            <a:ext cx="2540000" cy="558800"/>
+          </a:xfrm>
+          <a:prstGeom prst="roundRect">
+            <a:avLst>
+              <a:gd name="adj" fmla="val 25000"/>
+            </a:avLst>
+          </a:prstGeom>
+          <a:solidFill>
+            <a:srgbClr val="FFFFFF"/>
+          </a:solidFill>
+          <a:ln>
+            <a:noFill/>
+          </a:ln>
+          <a:effectLst/>
+        </p:spPr>
+        <p:style>
+          <a:lnRef idx="1">
+            <a:schemeClr val="accent1"/>
+          </a:lnRef>
+          <a:fillRef idx="3">
+            <a:schemeClr val="accent1"/>
+          </a:fillRef>
+          <a:effectRef idx="2">
+            <a:schemeClr val="accent1"/>
+          </a:effectRef>
+          <a:fontRef idx="minor">
+            <a:schemeClr val="lt1"/>
+          </a:fontRef>
+        </p:style>
+        <p:txBody>
+          <a:bodyPr rtlCol="0" anchor="ctr"/>
+          <a:lstStyle/>
+          <a:p>
+            <a:pPr algn="ctr"/>
+          </a:p>
+        </p:txBody>
+      </p:sp>
       <p:pic>
         <p:nvPicPr>
-          <p:cNvPr id="10" name="Picture 9" descr="logo_navy.png"/>
+          <p:cNvPr id="12" name="Picture 11" descr="logo_navy.png"/>
           <p:cNvPicPr>
             <a:picLocks noChangeAspect="1"/>
           </p:cNvPicPr>
@@ -4376,7 +4472,7 @@
         </p:blipFill>
         <p:spPr>
           <a:xfrm>
-            <a:off x="9010650" y="5759450"/>
+            <a:off x="8947150" y="5759450"/>
             <a:ext cx="1079500" cy="292100"/>
           </a:xfrm>
           <a:prstGeom prst="rect">
@@ -4386,13 +4482,13 @@
       </p:pic>
       <p:sp>
         <p:nvSpPr>
-          <p:cNvPr id="11" name="Rectangle 10"/>
+          <p:cNvPr id="13" name="Rectangle 12"/>
           <p:cNvSpPr/>
           <p:nvPr/>
         </p:nvSpPr>
         <p:spPr>
           <a:xfrm>
-            <a:off x="10344150" y="5740400"/>
+            <a:off x="10280650" y="5740400"/>
             <a:ext cx="6350" cy="330200"/>
           </a:xfrm>
           <a:prstGeom prst="rect">
@@ -4430,7 +4526,7 @@
       </p:sp>
       <p:pic>
         <p:nvPicPr>
-          <p:cNvPr id="12" name="Picture 11" descr="klant.png"/>
+          <p:cNvPr id="14" name="Picture 13" descr="klant.png"/>
           <p:cNvPicPr>
             <a:picLocks noChangeAspect="1"/>
           </p:cNvPicPr>
@@ -4444,7 +4540,7 @@
         </p:blipFill>
         <p:spPr>
           <a:xfrm>
-            <a:off x="10604500" y="5702300"/>
+            <a:off x="10541000" y="5702300"/>
             <a:ext cx="406400" cy="406400"/>
           </a:xfrm>
           <a:prstGeom prst="rect">
@@ -4454,7 +4550,7 @@
       </p:pic>
       <p:sp>
         <p:nvSpPr>
-          <p:cNvPr id="13" name="TextBox 12"/>
+          <p:cNvPr id="15" name="TextBox 14"/>
           <p:cNvSpPr txBox="1"/>
           <p:nvPr/>
         </p:nvSpPr>
@@ -4482,7 +4578,7 @@
             <a:r>
               <a:rPr sz="1150" b="0">
                 <a:solidFill>
-                  <a:srgbClr val="9AAFB8"/>
+                  <a:srgbClr val="FFFFFF"/>
                 </a:solidFill>
                 <a:latin typeface="Inter"/>
               </a:rPr>
@@ -5070,7 +5166,51 @@
       <p:grpSpPr/>
       <p:sp>
         <p:nvSpPr>
-          <p:cNvPr id="2" name="TextBox 1"/>
+          <p:cNvPr id="2" name="Rectangle 1"/>
+          <p:cNvSpPr/>
+          <p:nvPr/>
+        </p:nvSpPr>
+        <p:spPr>
+          <a:xfrm>
+            <a:off x="0" y="0"/>
+            <a:ext cx="12192000" cy="6858000"/>
+          </a:xfrm>
+          <a:prstGeom prst="rect">
+            <a:avLst/>
+          </a:prstGeom>
+          <a:solidFill>
+            <a:srgbClr val="002333"/>
+          </a:solidFill>
+          <a:ln>
+            <a:noFill/>
+          </a:ln>
+          <a:effectLst/>
+        </p:spPr>
+        <p:style>
+          <a:lnRef idx="1">
+            <a:schemeClr val="accent1"/>
+          </a:lnRef>
+          <a:fillRef idx="3">
+            <a:schemeClr val="accent1"/>
+          </a:fillRef>
+          <a:effectRef idx="2">
+            <a:schemeClr val="accent1"/>
+          </a:effectRef>
+          <a:fontRef idx="minor">
+            <a:schemeClr val="lt1"/>
+          </a:fontRef>
+        </p:style>
+        <p:txBody>
+          <a:bodyPr rtlCol="0" anchor="ctr"/>
+          <a:lstStyle/>
+          <a:p>
+            <a:pPr algn="ctr"/>
+          </a:p>
+        </p:txBody>
+      </p:sp>
+      <p:sp>
+        <p:nvSpPr>
+          <p:cNvPr id="3" name="TextBox 2"/>
           <p:cNvSpPr txBox="1"/>
           <p:nvPr/>
         </p:nvSpPr>
@@ -5098,7 +5238,7 @@
             <a:r>
               <a:rPr sz="4800" b="1">
                 <a:solidFill>
-                  <a:srgbClr val="002333"/>
+                  <a:srgbClr val="FFFFFF"/>
                 </a:solidFill>
                 <a:latin typeface="League Spartan"/>
               </a:rPr>
@@ -5109,7 +5249,7 @@
       </p:sp>
       <p:sp>
         <p:nvSpPr>
-          <p:cNvPr id="3" name="TextBox 2"/>
+          <p:cNvPr id="4" name="TextBox 3"/>
           <p:cNvSpPr txBox="1"/>
           <p:nvPr/>
         </p:nvSpPr>
@@ -5137,7 +5277,7 @@
             <a:r>
               <a:rPr sz="1800" b="1">
                 <a:solidFill>
-                  <a:srgbClr val="5B7480"/>
+                  <a:srgbClr val="8FA9B4"/>
                 </a:solidFill>
                 <a:latin typeface="League Spartan"/>
               </a:rPr>
@@ -5148,7 +5288,7 @@
       </p:sp>
       <p:sp>
         <p:nvSpPr>
-          <p:cNvPr id="4" name="Rectangle 3"/>
+          <p:cNvPr id="5" name="Rectangle 4"/>
           <p:cNvSpPr/>
           <p:nvPr/>
         </p:nvSpPr>
@@ -5161,7 +5301,7 @@
             <a:avLst/>
           </a:prstGeom>
           <a:solidFill>
-            <a:srgbClr val="E7EEF0"/>
+            <a:srgbClr val="1E4656"/>
           </a:solidFill>
           <a:ln>
             <a:noFill/>
@@ -5192,7 +5332,7 @@
       </p:sp>
       <p:sp>
         <p:nvSpPr>
-          <p:cNvPr id="5" name="Rectangle 4"/>
+          <p:cNvPr id="6" name="Rectangle 5"/>
           <p:cNvSpPr/>
           <p:nvPr/>
         </p:nvSpPr>
@@ -5200,6 +5340,2009 @@
           <a:xfrm>
             <a:off x="1016000" y="1828800"/>
             <a:ext cx="889000" cy="685800"/>
+          </a:xfrm>
+          <a:prstGeom prst="rect">
+            <a:avLst/>
+          </a:prstGeom>
+          <a:solidFill>
+            <a:srgbClr val="002333"/>
+          </a:solidFill>
+          <a:ln>
+            <a:noFill/>
+          </a:ln>
+          <a:effectLst/>
+        </p:spPr>
+        <p:style>
+          <a:lnRef idx="1">
+            <a:schemeClr val="accent1"/>
+          </a:lnRef>
+          <a:fillRef idx="3">
+            <a:schemeClr val="accent1"/>
+          </a:fillRef>
+          <a:effectRef idx="2">
+            <a:schemeClr val="accent1"/>
+          </a:effectRef>
+          <a:fontRef idx="minor">
+            <a:schemeClr val="lt1"/>
+          </a:fontRef>
+        </p:style>
+        <p:txBody>
+          <a:bodyPr rtlCol="0" anchor="ctr"/>
+          <a:lstStyle/>
+          <a:p>
+            <a:pPr algn="ctr"/>
+          </a:p>
+        </p:txBody>
+      </p:sp>
+      <p:sp>
+        <p:nvSpPr>
+          <p:cNvPr id="7" name="Rounded Rectangle 6"/>
+          <p:cNvSpPr/>
+          <p:nvPr/>
+        </p:nvSpPr>
+        <p:spPr>
+          <a:xfrm>
+            <a:off x="1155700" y="1866900"/>
+            <a:ext cx="609600" cy="609600"/>
+          </a:xfrm>
+          <a:prstGeom prst="roundRect">
+            <a:avLst>
+              <a:gd name="adj" fmla="val 24300"/>
+            </a:avLst>
+          </a:prstGeom>
+          <a:solidFill>
+            <a:srgbClr val="F3F7F8"/>
+          </a:solidFill>
+          <a:ln>
+            <a:noFill/>
+          </a:ln>
+          <a:effectLst/>
+        </p:spPr>
+        <p:style>
+          <a:lnRef idx="1">
+            <a:schemeClr val="accent1"/>
+          </a:lnRef>
+          <a:fillRef idx="3">
+            <a:schemeClr val="accent1"/>
+          </a:fillRef>
+          <a:effectRef idx="2">
+            <a:schemeClr val="accent1"/>
+          </a:effectRef>
+          <a:fontRef idx="minor">
+            <a:schemeClr val="lt1"/>
+          </a:fontRef>
+        </p:style>
+        <p:txBody>
+          <a:bodyPr rtlCol="0" anchor="ctr"/>
+          <a:lstStyle/>
+          <a:p>
+            <a:pPr algn="ctr"/>
+          </a:p>
+        </p:txBody>
+      </p:sp>
+      <p:pic>
+        <p:nvPicPr>
+          <p:cNvPr id="8" name="Picture 7" descr="icon-pen-navy.png"/>
+          <p:cNvPicPr>
+            <a:picLocks noChangeAspect="1"/>
+          </p:cNvPicPr>
+          <p:nvPr/>
+        </p:nvPicPr>
+        <p:blipFill>
+          <a:blip r:embed="rId2"/>
+          <a:stretch>
+            <a:fillRect/>
+          </a:stretch>
+        </p:blipFill>
+        <p:spPr>
+          <a:xfrm>
+            <a:off x="1308100" y="2019300"/>
+            <a:ext cx="304800" cy="304800"/>
+          </a:xfrm>
+          <a:prstGeom prst="rect">
+            <a:avLst/>
+          </a:prstGeom>
+        </p:spPr>
+      </p:pic>
+      <p:sp>
+        <p:nvSpPr>
+          <p:cNvPr id="9" name="TextBox 8"/>
+          <p:cNvSpPr txBox="1"/>
+          <p:nvPr/>
+        </p:nvSpPr>
+        <p:spPr>
+          <a:xfrm>
+            <a:off x="533400" y="2565400"/>
+            <a:ext cx="1854200" cy="254000"/>
+          </a:xfrm>
+          <a:prstGeom prst="rect">
+            <a:avLst/>
+          </a:prstGeom>
+          <a:noFill/>
+        </p:spPr>
+        <p:txBody>
+          <a:bodyPr wrap="square" lIns="0" rIns="0" tIns="0" bIns="0">
+            <a:spAutoFit/>
+          </a:bodyPr>
+          <a:lstStyle/>
+          <a:p>
+            <a:pPr algn="ctr">
+              <a:lnSpc>
+                <a:spcPct val="100000"/>
+              </a:lnSpc>
+            </a:pPr>
+            <a:r>
+              <a:rPr sz="1700" b="1">
+                <a:solidFill>
+                  <a:srgbClr val="FFFFFF"/>
+                </a:solidFill>
+                <a:latin typeface="League Spartan"/>
+              </a:rPr>
+              <a:t>Student</a:t>
+            </a:r>
+          </a:p>
+        </p:txBody>
+      </p:sp>
+      <p:sp>
+        <p:nvSpPr>
+          <p:cNvPr id="10" name="TextBox 9"/>
+          <p:cNvSpPr txBox="1"/>
+          <p:nvPr/>
+        </p:nvSpPr>
+        <p:spPr>
+          <a:xfrm>
+            <a:off x="381000" y="2832100"/>
+            <a:ext cx="2159000" cy="571500"/>
+          </a:xfrm>
+          <a:prstGeom prst="rect">
+            <a:avLst/>
+          </a:prstGeom>
+          <a:noFill/>
+        </p:spPr>
+        <p:txBody>
+          <a:bodyPr wrap="square" lIns="0" rIns="0" tIns="0" bIns="0">
+            <a:spAutoFit/>
+          </a:bodyPr>
+          <a:lstStyle/>
+          <a:p>
+            <a:pPr algn="ctr">
+              <a:lnSpc>
+                <a:spcPct val="120000"/>
+              </a:lnSpc>
+            </a:pPr>
+            <a:r>
+              <a:rPr sz="1600" b="0">
+                <a:solidFill>
+                  <a:srgbClr val="8FA9B4"/>
+                </a:solidFill>
+                <a:latin typeface="Inter"/>
+              </a:rPr>
+              <a:t>maakt toets</a:t>
+            </a:r>
+          </a:p>
+        </p:txBody>
+      </p:sp>
+      <p:sp>
+        <p:nvSpPr>
+          <p:cNvPr id="11" name="Rectangle 10"/>
+          <p:cNvSpPr/>
+          <p:nvPr/>
+        </p:nvSpPr>
+        <p:spPr>
+          <a:xfrm>
+            <a:off x="2870200" y="1828800"/>
+            <a:ext cx="889000" cy="685800"/>
+          </a:xfrm>
+          <a:prstGeom prst="rect">
+            <a:avLst/>
+          </a:prstGeom>
+          <a:solidFill>
+            <a:srgbClr val="002333"/>
+          </a:solidFill>
+          <a:ln>
+            <a:noFill/>
+          </a:ln>
+          <a:effectLst/>
+        </p:spPr>
+        <p:style>
+          <a:lnRef idx="1">
+            <a:schemeClr val="accent1"/>
+          </a:lnRef>
+          <a:fillRef idx="3">
+            <a:schemeClr val="accent1"/>
+          </a:fillRef>
+          <a:effectRef idx="2">
+            <a:schemeClr val="accent1"/>
+          </a:effectRef>
+          <a:fontRef idx="minor">
+            <a:schemeClr val="lt1"/>
+          </a:fontRef>
+        </p:style>
+        <p:txBody>
+          <a:bodyPr rtlCol="0" anchor="ctr"/>
+          <a:lstStyle/>
+          <a:p>
+            <a:pPr algn="ctr"/>
+          </a:p>
+        </p:txBody>
+      </p:sp>
+      <p:sp>
+        <p:nvSpPr>
+          <p:cNvPr id="12" name="Rounded Rectangle 11"/>
+          <p:cNvSpPr/>
+          <p:nvPr/>
+        </p:nvSpPr>
+        <p:spPr>
+          <a:xfrm>
+            <a:off x="3009900" y="1866900"/>
+            <a:ext cx="609600" cy="609600"/>
+          </a:xfrm>
+          <a:prstGeom prst="roundRect">
+            <a:avLst>
+              <a:gd name="adj" fmla="val 24300"/>
+            </a:avLst>
+          </a:prstGeom>
+          <a:solidFill>
+            <a:srgbClr val="F3F7F8"/>
+          </a:solidFill>
+          <a:ln>
+            <a:noFill/>
+          </a:ln>
+          <a:effectLst/>
+        </p:spPr>
+        <p:style>
+          <a:lnRef idx="1">
+            <a:schemeClr val="accent1"/>
+          </a:lnRef>
+          <a:fillRef idx="3">
+            <a:schemeClr val="accent1"/>
+          </a:fillRef>
+          <a:effectRef idx="2">
+            <a:schemeClr val="accent1"/>
+          </a:effectRef>
+          <a:fontRef idx="minor">
+            <a:schemeClr val="lt1"/>
+          </a:fontRef>
+        </p:style>
+        <p:txBody>
+          <a:bodyPr rtlCol="0" anchor="ctr"/>
+          <a:lstStyle/>
+          <a:p>
+            <a:pPr algn="ctr"/>
+          </a:p>
+        </p:txBody>
+      </p:sp>
+      <p:pic>
+        <p:nvPicPr>
+          <p:cNvPr id="13" name="Picture 12" descr="icon-cijfers-navy.png"/>
+          <p:cNvPicPr>
+            <a:picLocks noChangeAspect="1"/>
+          </p:cNvPicPr>
+          <p:nvPr/>
+        </p:nvPicPr>
+        <p:blipFill>
+          <a:blip r:embed="rId3"/>
+          <a:stretch>
+            <a:fillRect/>
+          </a:stretch>
+        </p:blipFill>
+        <p:spPr>
+          <a:xfrm>
+            <a:off x="3162300" y="2019300"/>
+            <a:ext cx="304800" cy="304800"/>
+          </a:xfrm>
+          <a:prstGeom prst="rect">
+            <a:avLst/>
+          </a:prstGeom>
+        </p:spPr>
+      </p:pic>
+      <p:sp>
+        <p:nvSpPr>
+          <p:cNvPr id="14" name="TextBox 13"/>
+          <p:cNvSpPr txBox="1"/>
+          <p:nvPr/>
+        </p:nvSpPr>
+        <p:spPr>
+          <a:xfrm>
+            <a:off x="2387600" y="2565400"/>
+            <a:ext cx="1854200" cy="254000"/>
+          </a:xfrm>
+          <a:prstGeom prst="rect">
+            <a:avLst/>
+          </a:prstGeom>
+          <a:noFill/>
+        </p:spPr>
+        <p:txBody>
+          <a:bodyPr wrap="square" lIns="0" rIns="0" tIns="0" bIns="0">
+            <a:spAutoFit/>
+          </a:bodyPr>
+          <a:lstStyle/>
+          <a:p>
+            <a:pPr algn="ctr">
+              <a:lnSpc>
+                <a:spcPct val="100000"/>
+              </a:lnSpc>
+            </a:pPr>
+            <a:r>
+              <a:rPr sz="1700" b="1">
+                <a:solidFill>
+                  <a:srgbClr val="FFFFFF"/>
+                </a:solidFill>
+                <a:latin typeface="League Spartan"/>
+              </a:rPr>
+              <a:t>Docent</a:t>
+            </a:r>
+          </a:p>
+        </p:txBody>
+      </p:sp>
+      <p:sp>
+        <p:nvSpPr>
+          <p:cNvPr id="15" name="TextBox 14"/>
+          <p:cNvSpPr txBox="1"/>
+          <p:nvPr/>
+        </p:nvSpPr>
+        <p:spPr>
+          <a:xfrm>
+            <a:off x="2235200" y="2832100"/>
+            <a:ext cx="2159000" cy="571500"/>
+          </a:xfrm>
+          <a:prstGeom prst="rect">
+            <a:avLst/>
+          </a:prstGeom>
+          <a:noFill/>
+        </p:spPr>
+        <p:txBody>
+          <a:bodyPr wrap="square" lIns="0" rIns="0" tIns="0" bIns="0">
+            <a:spAutoFit/>
+          </a:bodyPr>
+          <a:lstStyle/>
+          <a:p>
+            <a:pPr algn="ctr">
+              <a:lnSpc>
+                <a:spcPct val="120000"/>
+              </a:lnSpc>
+            </a:pPr>
+            <a:r>
+              <a:rPr sz="1600" b="0">
+                <a:solidFill>
+                  <a:srgbClr val="8FA9B4"/>
+                </a:solidFill>
+                <a:latin typeface="Inter"/>
+              </a:rPr>
+              <a:t>punten, feedback</a:t>
+            </a:r>
+          </a:p>
+        </p:txBody>
+      </p:sp>
+      <p:sp>
+        <p:nvSpPr>
+          <p:cNvPr id="16" name="Rectangle 15"/>
+          <p:cNvSpPr/>
+          <p:nvPr/>
+        </p:nvSpPr>
+        <p:spPr>
+          <a:xfrm>
+            <a:off x="4724400" y="1828800"/>
+            <a:ext cx="889000" cy="685800"/>
+          </a:xfrm>
+          <a:prstGeom prst="rect">
+            <a:avLst/>
+          </a:prstGeom>
+          <a:solidFill>
+            <a:srgbClr val="002333"/>
+          </a:solidFill>
+          <a:ln>
+            <a:noFill/>
+          </a:ln>
+          <a:effectLst/>
+        </p:spPr>
+        <p:style>
+          <a:lnRef idx="1">
+            <a:schemeClr val="accent1"/>
+          </a:lnRef>
+          <a:fillRef idx="3">
+            <a:schemeClr val="accent1"/>
+          </a:fillRef>
+          <a:effectRef idx="2">
+            <a:schemeClr val="accent1"/>
+          </a:effectRef>
+          <a:fontRef idx="minor">
+            <a:schemeClr val="lt1"/>
+          </a:fontRef>
+        </p:style>
+        <p:txBody>
+          <a:bodyPr rtlCol="0" anchor="ctr"/>
+          <a:lstStyle/>
+          <a:p>
+            <a:pPr algn="ctr"/>
+          </a:p>
+        </p:txBody>
+      </p:sp>
+      <p:sp>
+        <p:nvSpPr>
+          <p:cNvPr id="17" name="Rounded Rectangle 16"/>
+          <p:cNvSpPr/>
+          <p:nvPr/>
+        </p:nvSpPr>
+        <p:spPr>
+          <a:xfrm>
+            <a:off x="4864100" y="1866900"/>
+            <a:ext cx="609600" cy="609600"/>
+          </a:xfrm>
+          <a:prstGeom prst="roundRect">
+            <a:avLst>
+              <a:gd name="adj" fmla="val 24300"/>
+            </a:avLst>
+          </a:prstGeom>
+          <a:solidFill>
+            <a:srgbClr val="F3F7F8"/>
+          </a:solidFill>
+          <a:ln>
+            <a:noFill/>
+          </a:ln>
+          <a:effectLst/>
+        </p:spPr>
+        <p:style>
+          <a:lnRef idx="1">
+            <a:schemeClr val="accent1"/>
+          </a:lnRef>
+          <a:fillRef idx="3">
+            <a:schemeClr val="accent1"/>
+          </a:fillRef>
+          <a:effectRef idx="2">
+            <a:schemeClr val="accent1"/>
+          </a:effectRef>
+          <a:fontRef idx="minor">
+            <a:schemeClr val="lt1"/>
+          </a:fontRef>
+        </p:style>
+        <p:txBody>
+          <a:bodyPr rtlCol="0" anchor="ctr"/>
+          <a:lstStyle/>
+          <a:p>
+            <a:pPr algn="ctr"/>
+          </a:p>
+        </p:txBody>
+      </p:sp>
+      <p:pic>
+        <p:nvPicPr>
+          <p:cNvPr id="18" name="Picture 17" descr="icon-usercheck-navy.png"/>
+          <p:cNvPicPr>
+            <a:picLocks noChangeAspect="1"/>
+          </p:cNvPicPr>
+          <p:nvPr/>
+        </p:nvPicPr>
+        <p:blipFill>
+          <a:blip r:embed="rId4"/>
+          <a:stretch>
+            <a:fillRect/>
+          </a:stretch>
+        </p:blipFill>
+        <p:spPr>
+          <a:xfrm>
+            <a:off x="5016500" y="2019300"/>
+            <a:ext cx="304800" cy="304800"/>
+          </a:xfrm>
+          <a:prstGeom prst="rect">
+            <a:avLst/>
+          </a:prstGeom>
+        </p:spPr>
+      </p:pic>
+      <p:sp>
+        <p:nvSpPr>
+          <p:cNvPr id="19" name="TextBox 18"/>
+          <p:cNvSpPr txBox="1"/>
+          <p:nvPr/>
+        </p:nvSpPr>
+        <p:spPr>
+          <a:xfrm>
+            <a:off x="4241800" y="2565400"/>
+            <a:ext cx="1854200" cy="254000"/>
+          </a:xfrm>
+          <a:prstGeom prst="rect">
+            <a:avLst/>
+          </a:prstGeom>
+          <a:noFill/>
+        </p:spPr>
+        <p:txBody>
+          <a:bodyPr wrap="square" lIns="0" rIns="0" tIns="0" bIns="0">
+            <a:spAutoFit/>
+          </a:bodyPr>
+          <a:lstStyle/>
+          <a:p>
+            <a:pPr algn="ctr">
+              <a:lnSpc>
+                <a:spcPct val="100000"/>
+              </a:lnSpc>
+            </a:pPr>
+            <a:r>
+              <a:rPr sz="1700" b="1">
+                <a:solidFill>
+                  <a:srgbClr val="FFFFFF"/>
+                </a:solidFill>
+                <a:latin typeface="League Spartan"/>
+              </a:rPr>
+              <a:t>Moduleleider</a:t>
+            </a:r>
+          </a:p>
+        </p:txBody>
+      </p:sp>
+      <p:sp>
+        <p:nvSpPr>
+          <p:cNvPr id="20" name="TextBox 19"/>
+          <p:cNvSpPr txBox="1"/>
+          <p:nvPr/>
+        </p:nvSpPr>
+        <p:spPr>
+          <a:xfrm>
+            <a:off x="4089400" y="2832100"/>
+            <a:ext cx="2159000" cy="571500"/>
+          </a:xfrm>
+          <a:prstGeom prst="rect">
+            <a:avLst/>
+          </a:prstGeom>
+          <a:noFill/>
+        </p:spPr>
+        <p:txBody>
+          <a:bodyPr wrap="square" lIns="0" rIns="0" tIns="0" bIns="0">
+            <a:spAutoFit/>
+          </a:bodyPr>
+          <a:lstStyle/>
+          <a:p>
+            <a:pPr algn="ctr">
+              <a:lnSpc>
+                <a:spcPct val="120000"/>
+              </a:lnSpc>
+            </a:pPr>
+            <a:r>
+              <a:rPr sz="1600" b="0">
+                <a:solidFill>
+                  <a:srgbClr val="8FA9B4"/>
+                </a:solidFill>
+                <a:latin typeface="Inter"/>
+              </a:rPr>
+              <a:t>stelt cijfer vast</a:t>
+            </a:r>
+          </a:p>
+        </p:txBody>
+      </p:sp>
+      <p:sp>
+        <p:nvSpPr>
+          <p:cNvPr id="21" name="Rectangle 20"/>
+          <p:cNvSpPr/>
+          <p:nvPr/>
+        </p:nvSpPr>
+        <p:spPr>
+          <a:xfrm>
+            <a:off x="6578600" y="1828800"/>
+            <a:ext cx="889000" cy="685800"/>
+          </a:xfrm>
+          <a:prstGeom prst="rect">
+            <a:avLst/>
+          </a:prstGeom>
+          <a:solidFill>
+            <a:srgbClr val="002333"/>
+          </a:solidFill>
+          <a:ln>
+            <a:noFill/>
+          </a:ln>
+          <a:effectLst/>
+        </p:spPr>
+        <p:style>
+          <a:lnRef idx="1">
+            <a:schemeClr val="accent1"/>
+          </a:lnRef>
+          <a:fillRef idx="3">
+            <a:schemeClr val="accent1"/>
+          </a:fillRef>
+          <a:effectRef idx="2">
+            <a:schemeClr val="accent1"/>
+          </a:effectRef>
+          <a:fontRef idx="minor">
+            <a:schemeClr val="lt1"/>
+          </a:fontRef>
+        </p:style>
+        <p:txBody>
+          <a:bodyPr rtlCol="0" anchor="ctr"/>
+          <a:lstStyle/>
+          <a:p>
+            <a:pPr algn="ctr"/>
+          </a:p>
+        </p:txBody>
+      </p:sp>
+      <p:sp>
+        <p:nvSpPr>
+          <p:cNvPr id="22" name="Rounded Rectangle 21"/>
+          <p:cNvSpPr/>
+          <p:nvPr/>
+        </p:nvSpPr>
+        <p:spPr>
+          <a:xfrm>
+            <a:off x="6718300" y="1866900"/>
+            <a:ext cx="609600" cy="609600"/>
+          </a:xfrm>
+          <a:prstGeom prst="roundRect">
+            <a:avLst>
+              <a:gd name="adj" fmla="val 24300"/>
+            </a:avLst>
+          </a:prstGeom>
+          <a:solidFill>
+            <a:srgbClr val="F3F7F8"/>
+          </a:solidFill>
+          <a:ln>
+            <a:noFill/>
+          </a:ln>
+          <a:effectLst/>
+        </p:spPr>
+        <p:style>
+          <a:lnRef idx="1">
+            <a:schemeClr val="accent1"/>
+          </a:lnRef>
+          <a:fillRef idx="3">
+            <a:schemeClr val="accent1"/>
+          </a:fillRef>
+          <a:effectRef idx="2">
+            <a:schemeClr val="accent1"/>
+          </a:effectRef>
+          <a:fontRef idx="minor">
+            <a:schemeClr val="lt1"/>
+          </a:fontRef>
+        </p:style>
+        <p:txBody>
+          <a:bodyPr rtlCol="0" anchor="ctr"/>
+          <a:lstStyle/>
+          <a:p>
+            <a:pPr algn="ctr"/>
+          </a:p>
+        </p:txBody>
+      </p:sp>
+      <p:pic>
+        <p:nvPicPr>
+          <p:cNvPr id="23" name="Picture 22" descr="icon-data-navy.png"/>
+          <p:cNvPicPr>
+            <a:picLocks noChangeAspect="1"/>
+          </p:cNvPicPr>
+          <p:nvPr/>
+        </p:nvPicPr>
+        <p:blipFill>
+          <a:blip r:embed="rId5"/>
+          <a:stretch>
+            <a:fillRect/>
+          </a:stretch>
+        </p:blipFill>
+        <p:spPr>
+          <a:xfrm>
+            <a:off x="6870700" y="2019300"/>
+            <a:ext cx="304800" cy="304800"/>
+          </a:xfrm>
+          <a:prstGeom prst="rect">
+            <a:avLst/>
+          </a:prstGeom>
+        </p:spPr>
+      </p:pic>
+      <p:sp>
+        <p:nvSpPr>
+          <p:cNvPr id="24" name="TextBox 23"/>
+          <p:cNvSpPr txBox="1"/>
+          <p:nvPr/>
+        </p:nvSpPr>
+        <p:spPr>
+          <a:xfrm>
+            <a:off x="6096000" y="2565400"/>
+            <a:ext cx="1854200" cy="254000"/>
+          </a:xfrm>
+          <a:prstGeom prst="rect">
+            <a:avLst/>
+          </a:prstGeom>
+          <a:noFill/>
+        </p:spPr>
+        <p:txBody>
+          <a:bodyPr wrap="square" lIns="0" rIns="0" tIns="0" bIns="0">
+            <a:spAutoFit/>
+          </a:bodyPr>
+          <a:lstStyle/>
+          <a:p>
+            <a:pPr algn="ctr">
+              <a:lnSpc>
+                <a:spcPct val="100000"/>
+              </a:lnSpc>
+            </a:pPr>
+            <a:r>
+              <a:rPr sz="1700" b="1">
+                <a:solidFill>
+                  <a:srgbClr val="FFFFFF"/>
+                </a:solidFill>
+                <a:latin typeface="League Spartan"/>
+              </a:rPr>
+              <a:t>Cursusbureau</a:t>
+            </a:r>
+          </a:p>
+        </p:txBody>
+      </p:sp>
+      <p:sp>
+        <p:nvSpPr>
+          <p:cNvPr id="25" name="TextBox 24"/>
+          <p:cNvSpPr txBox="1"/>
+          <p:nvPr/>
+        </p:nvSpPr>
+        <p:spPr>
+          <a:xfrm>
+            <a:off x="5943600" y="2832100"/>
+            <a:ext cx="2159000" cy="571500"/>
+          </a:xfrm>
+          <a:prstGeom prst="rect">
+            <a:avLst/>
+          </a:prstGeom>
+          <a:noFill/>
+        </p:spPr>
+        <p:txBody>
+          <a:bodyPr wrap="square" lIns="0" rIns="0" tIns="0" bIns="0">
+            <a:spAutoFit/>
+          </a:bodyPr>
+          <a:lstStyle/>
+          <a:p>
+            <a:pPr algn="ctr">
+              <a:lnSpc>
+                <a:spcPct val="120000"/>
+              </a:lnSpc>
+            </a:pPr>
+            <a:r>
+              <a:rPr sz="1600" b="0">
+                <a:solidFill>
+                  <a:srgbClr val="8FA9B4"/>
+                </a:solidFill>
+                <a:latin typeface="Inter"/>
+              </a:rPr>
+              <a:t>krijgt eindcijfer</a:t>
+            </a:r>
+          </a:p>
+        </p:txBody>
+      </p:sp>
+      <p:sp>
+        <p:nvSpPr>
+          <p:cNvPr id="26" name="TextBox 25"/>
+          <p:cNvSpPr txBox="1"/>
+          <p:nvPr/>
+        </p:nvSpPr>
+        <p:spPr>
+          <a:xfrm>
+            <a:off x="762000" y="3619500"/>
+            <a:ext cx="3810000" cy="254000"/>
+          </a:xfrm>
+          <a:prstGeom prst="rect">
+            <a:avLst/>
+          </a:prstGeom>
+          <a:noFill/>
+        </p:spPr>
+        <p:txBody>
+          <a:bodyPr wrap="square" lIns="0" rIns="0" tIns="0" bIns="0">
+            <a:spAutoFit/>
+          </a:bodyPr>
+          <a:lstStyle/>
+          <a:p>
+            <a:pPr algn="l">
+              <a:lnSpc>
+                <a:spcPct val="100000"/>
+              </a:lnSpc>
+            </a:pPr>
+            <a:r>
+              <a:rPr sz="1800" b="1">
+                <a:solidFill>
+                  <a:srgbClr val="8FA9B4"/>
+                </a:solidFill>
+                <a:latin typeface="League Spartan"/>
+              </a:rPr>
+              <a:t>Schrijfopdrachten</a:t>
+            </a:r>
+          </a:p>
+        </p:txBody>
+      </p:sp>
+      <p:sp>
+        <p:nvSpPr>
+          <p:cNvPr id="27" name="Rectangle 26"/>
+          <p:cNvSpPr/>
+          <p:nvPr/>
+        </p:nvSpPr>
+        <p:spPr>
+          <a:xfrm>
+            <a:off x="1460500" y="4279900"/>
+            <a:ext cx="9271000" cy="25400"/>
+          </a:xfrm>
+          <a:prstGeom prst="rect">
+            <a:avLst/>
+          </a:prstGeom>
+          <a:solidFill>
+            <a:srgbClr val="1E4656"/>
+          </a:solidFill>
+          <a:ln>
+            <a:noFill/>
+          </a:ln>
+          <a:effectLst/>
+        </p:spPr>
+        <p:style>
+          <a:lnRef idx="1">
+            <a:schemeClr val="accent1"/>
+          </a:lnRef>
+          <a:fillRef idx="3">
+            <a:schemeClr val="accent1"/>
+          </a:fillRef>
+          <a:effectRef idx="2">
+            <a:schemeClr val="accent1"/>
+          </a:effectRef>
+          <a:fontRef idx="minor">
+            <a:schemeClr val="lt1"/>
+          </a:fontRef>
+        </p:style>
+        <p:txBody>
+          <a:bodyPr rtlCol="0" anchor="ctr"/>
+          <a:lstStyle/>
+          <a:p>
+            <a:pPr algn="ctr"/>
+          </a:p>
+        </p:txBody>
+      </p:sp>
+      <p:sp>
+        <p:nvSpPr>
+          <p:cNvPr id="28" name="Rectangle 27"/>
+          <p:cNvSpPr/>
+          <p:nvPr/>
+        </p:nvSpPr>
+        <p:spPr>
+          <a:xfrm>
+            <a:off x="1016000" y="3949700"/>
+            <a:ext cx="889000" cy="685800"/>
+          </a:xfrm>
+          <a:prstGeom prst="rect">
+            <a:avLst/>
+          </a:prstGeom>
+          <a:solidFill>
+            <a:srgbClr val="002333"/>
+          </a:solidFill>
+          <a:ln>
+            <a:noFill/>
+          </a:ln>
+          <a:effectLst/>
+        </p:spPr>
+        <p:style>
+          <a:lnRef idx="1">
+            <a:schemeClr val="accent1"/>
+          </a:lnRef>
+          <a:fillRef idx="3">
+            <a:schemeClr val="accent1"/>
+          </a:fillRef>
+          <a:effectRef idx="2">
+            <a:schemeClr val="accent1"/>
+          </a:effectRef>
+          <a:fontRef idx="minor">
+            <a:schemeClr val="lt1"/>
+          </a:fontRef>
+        </p:style>
+        <p:txBody>
+          <a:bodyPr rtlCol="0" anchor="ctr"/>
+          <a:lstStyle/>
+          <a:p>
+            <a:pPr algn="ctr"/>
+          </a:p>
+        </p:txBody>
+      </p:sp>
+      <p:sp>
+        <p:nvSpPr>
+          <p:cNvPr id="29" name="Rounded Rectangle 28"/>
+          <p:cNvSpPr/>
+          <p:nvPr/>
+        </p:nvSpPr>
+        <p:spPr>
+          <a:xfrm>
+            <a:off x="1155700" y="3987800"/>
+            <a:ext cx="609600" cy="609600"/>
+          </a:xfrm>
+          <a:prstGeom prst="roundRect">
+            <a:avLst>
+              <a:gd name="adj" fmla="val 24300"/>
+            </a:avLst>
+          </a:prstGeom>
+          <a:solidFill>
+            <a:srgbClr val="F3F7F8"/>
+          </a:solidFill>
+          <a:ln>
+            <a:noFill/>
+          </a:ln>
+          <a:effectLst/>
+        </p:spPr>
+        <p:style>
+          <a:lnRef idx="1">
+            <a:schemeClr val="accent1"/>
+          </a:lnRef>
+          <a:fillRef idx="3">
+            <a:schemeClr val="accent1"/>
+          </a:fillRef>
+          <a:effectRef idx="2">
+            <a:schemeClr val="accent1"/>
+          </a:effectRef>
+          <a:fontRef idx="minor">
+            <a:schemeClr val="lt1"/>
+          </a:fontRef>
+        </p:style>
+        <p:txBody>
+          <a:bodyPr rtlCol="0" anchor="ctr"/>
+          <a:lstStyle/>
+          <a:p>
+            <a:pPr algn="ctr"/>
+          </a:p>
+        </p:txBody>
+      </p:sp>
+      <p:pic>
+        <p:nvPicPr>
+          <p:cNvPr id="30" name="Picture 29" descr="icon-inleveren-navy.png"/>
+          <p:cNvPicPr>
+            <a:picLocks noChangeAspect="1"/>
+          </p:cNvPicPr>
+          <p:nvPr/>
+        </p:nvPicPr>
+        <p:blipFill>
+          <a:blip r:embed="rId6"/>
+          <a:stretch>
+            <a:fillRect/>
+          </a:stretch>
+        </p:blipFill>
+        <p:spPr>
+          <a:xfrm>
+            <a:off x="1308100" y="4140200"/>
+            <a:ext cx="304800" cy="304800"/>
+          </a:xfrm>
+          <a:prstGeom prst="rect">
+            <a:avLst/>
+          </a:prstGeom>
+        </p:spPr>
+      </p:pic>
+      <p:sp>
+        <p:nvSpPr>
+          <p:cNvPr id="31" name="TextBox 30"/>
+          <p:cNvSpPr txBox="1"/>
+          <p:nvPr/>
+        </p:nvSpPr>
+        <p:spPr>
+          <a:xfrm>
+            <a:off x="533400" y="4686300"/>
+            <a:ext cx="1854200" cy="254000"/>
+          </a:xfrm>
+          <a:prstGeom prst="rect">
+            <a:avLst/>
+          </a:prstGeom>
+          <a:noFill/>
+        </p:spPr>
+        <p:txBody>
+          <a:bodyPr wrap="square" lIns="0" rIns="0" tIns="0" bIns="0">
+            <a:spAutoFit/>
+          </a:bodyPr>
+          <a:lstStyle/>
+          <a:p>
+            <a:pPr algn="ctr">
+              <a:lnSpc>
+                <a:spcPct val="100000"/>
+              </a:lnSpc>
+            </a:pPr>
+            <a:r>
+              <a:rPr sz="1700" b="1">
+                <a:solidFill>
+                  <a:srgbClr val="FFFFFF"/>
+                </a:solidFill>
+                <a:latin typeface="League Spartan"/>
+              </a:rPr>
+              <a:t>Student</a:t>
+            </a:r>
+          </a:p>
+        </p:txBody>
+      </p:sp>
+      <p:sp>
+        <p:nvSpPr>
+          <p:cNvPr id="32" name="TextBox 31"/>
+          <p:cNvSpPr txBox="1"/>
+          <p:nvPr/>
+        </p:nvSpPr>
+        <p:spPr>
+          <a:xfrm>
+            <a:off x="381000" y="4953000"/>
+            <a:ext cx="2159000" cy="571500"/>
+          </a:xfrm>
+          <a:prstGeom prst="rect">
+            <a:avLst/>
+          </a:prstGeom>
+          <a:noFill/>
+        </p:spPr>
+        <p:txBody>
+          <a:bodyPr wrap="square" lIns="0" rIns="0" tIns="0" bIns="0">
+            <a:spAutoFit/>
+          </a:bodyPr>
+          <a:lstStyle/>
+          <a:p>
+            <a:pPr algn="ctr">
+              <a:lnSpc>
+                <a:spcPct val="120000"/>
+              </a:lnSpc>
+            </a:pPr>
+            <a:r>
+              <a:rPr sz="1600" b="0">
+                <a:solidFill>
+                  <a:srgbClr val="8FA9B4"/>
+                </a:solidFill>
+                <a:latin typeface="Inter"/>
+              </a:rPr>
+              <a:t>levert in</a:t>
+            </a:r>
+          </a:p>
+        </p:txBody>
+      </p:sp>
+      <p:sp>
+        <p:nvSpPr>
+          <p:cNvPr id="33" name="Rectangle 32"/>
+          <p:cNvSpPr/>
+          <p:nvPr/>
+        </p:nvSpPr>
+        <p:spPr>
+          <a:xfrm>
+            <a:off x="2870200" y="3949700"/>
+            <a:ext cx="889000" cy="685800"/>
+          </a:xfrm>
+          <a:prstGeom prst="rect">
+            <a:avLst/>
+          </a:prstGeom>
+          <a:solidFill>
+            <a:srgbClr val="002333"/>
+          </a:solidFill>
+          <a:ln>
+            <a:noFill/>
+          </a:ln>
+          <a:effectLst/>
+        </p:spPr>
+        <p:style>
+          <a:lnRef idx="1">
+            <a:schemeClr val="accent1"/>
+          </a:lnRef>
+          <a:fillRef idx="3">
+            <a:schemeClr val="accent1"/>
+          </a:fillRef>
+          <a:effectRef idx="2">
+            <a:schemeClr val="accent1"/>
+          </a:effectRef>
+          <a:fontRef idx="minor">
+            <a:schemeClr val="lt1"/>
+          </a:fontRef>
+        </p:style>
+        <p:txBody>
+          <a:bodyPr rtlCol="0" anchor="ctr"/>
+          <a:lstStyle/>
+          <a:p>
+            <a:pPr algn="ctr"/>
+          </a:p>
+        </p:txBody>
+      </p:sp>
+      <p:sp>
+        <p:nvSpPr>
+          <p:cNvPr id="34" name="Rounded Rectangle 33"/>
+          <p:cNvSpPr/>
+          <p:nvPr/>
+        </p:nvSpPr>
+        <p:spPr>
+          <a:xfrm>
+            <a:off x="3009900" y="3987800"/>
+            <a:ext cx="609600" cy="609600"/>
+          </a:xfrm>
+          <a:prstGeom prst="roundRect">
+            <a:avLst>
+              <a:gd name="adj" fmla="val 24300"/>
+            </a:avLst>
+          </a:prstGeom>
+          <a:solidFill>
+            <a:srgbClr val="F3F7F8"/>
+          </a:solidFill>
+          <a:ln>
+            <a:noFill/>
+          </a:ln>
+          <a:effectLst/>
+        </p:spPr>
+        <p:style>
+          <a:lnRef idx="1">
+            <a:schemeClr val="accent1"/>
+          </a:lnRef>
+          <a:fillRef idx="3">
+            <a:schemeClr val="accent1"/>
+          </a:fillRef>
+          <a:effectRef idx="2">
+            <a:schemeClr val="accent1"/>
+          </a:effectRef>
+          <a:fontRef idx="minor">
+            <a:schemeClr val="lt1"/>
+          </a:fontRef>
+        </p:style>
+        <p:txBody>
+          <a:bodyPr rtlCol="0" anchor="ctr"/>
+          <a:lstStyle/>
+          <a:p>
+            <a:pPr algn="ctr"/>
+          </a:p>
+        </p:txBody>
+      </p:sp>
+      <p:pic>
+        <p:nvPicPr>
+          <p:cNvPr id="35" name="Picture 34" descr="icon-filepen-navy.png"/>
+          <p:cNvPicPr>
+            <a:picLocks noChangeAspect="1"/>
+          </p:cNvPicPr>
+          <p:nvPr/>
+        </p:nvPicPr>
+        <p:blipFill>
+          <a:blip r:embed="rId7"/>
+          <a:stretch>
+            <a:fillRect/>
+          </a:stretch>
+        </p:blipFill>
+        <p:spPr>
+          <a:xfrm>
+            <a:off x="3162300" y="4140200"/>
+            <a:ext cx="304800" cy="304800"/>
+          </a:xfrm>
+          <a:prstGeom prst="rect">
+            <a:avLst/>
+          </a:prstGeom>
+        </p:spPr>
+      </p:pic>
+      <p:sp>
+        <p:nvSpPr>
+          <p:cNvPr id="36" name="TextBox 35"/>
+          <p:cNvSpPr txBox="1"/>
+          <p:nvPr/>
+        </p:nvSpPr>
+        <p:spPr>
+          <a:xfrm>
+            <a:off x="2387600" y="4686300"/>
+            <a:ext cx="1854200" cy="254000"/>
+          </a:xfrm>
+          <a:prstGeom prst="rect">
+            <a:avLst/>
+          </a:prstGeom>
+          <a:noFill/>
+        </p:spPr>
+        <p:txBody>
+          <a:bodyPr wrap="square" lIns="0" rIns="0" tIns="0" bIns="0">
+            <a:spAutoFit/>
+          </a:bodyPr>
+          <a:lstStyle/>
+          <a:p>
+            <a:pPr algn="ctr">
+              <a:lnSpc>
+                <a:spcPct val="100000"/>
+              </a:lnSpc>
+            </a:pPr>
+            <a:r>
+              <a:rPr sz="1700" b="1">
+                <a:solidFill>
+                  <a:srgbClr val="FFFFFF"/>
+                </a:solidFill>
+                <a:latin typeface="League Spartan"/>
+              </a:rPr>
+              <a:t>Docent</a:t>
+            </a:r>
+          </a:p>
+        </p:txBody>
+      </p:sp>
+      <p:sp>
+        <p:nvSpPr>
+          <p:cNvPr id="37" name="TextBox 36"/>
+          <p:cNvSpPr txBox="1"/>
+          <p:nvPr/>
+        </p:nvSpPr>
+        <p:spPr>
+          <a:xfrm>
+            <a:off x="2235200" y="4953000"/>
+            <a:ext cx="2159000" cy="571500"/>
+          </a:xfrm>
+          <a:prstGeom prst="rect">
+            <a:avLst/>
+          </a:prstGeom>
+          <a:noFill/>
+        </p:spPr>
+        <p:txBody>
+          <a:bodyPr wrap="square" lIns="0" rIns="0" tIns="0" bIns="0">
+            <a:spAutoFit/>
+          </a:bodyPr>
+          <a:lstStyle/>
+          <a:p>
+            <a:pPr algn="ctr">
+              <a:lnSpc>
+                <a:spcPct val="120000"/>
+              </a:lnSpc>
+            </a:pPr>
+            <a:r>
+              <a:rPr sz="1600" b="0">
+                <a:solidFill>
+                  <a:srgbClr val="8FA9B4"/>
+                </a:solidFill>
+                <a:latin typeface="Inter"/>
+              </a:rPr>
+              <a:t>wisselend format</a:t>
+            </a:r>
+          </a:p>
+        </p:txBody>
+      </p:sp>
+      <p:sp>
+        <p:nvSpPr>
+          <p:cNvPr id="38" name="Rectangle 37"/>
+          <p:cNvSpPr/>
+          <p:nvPr/>
+        </p:nvSpPr>
+        <p:spPr>
+          <a:xfrm>
+            <a:off x="4724400" y="3949700"/>
+            <a:ext cx="889000" cy="685800"/>
+          </a:xfrm>
+          <a:prstGeom prst="rect">
+            <a:avLst/>
+          </a:prstGeom>
+          <a:solidFill>
+            <a:srgbClr val="002333"/>
+          </a:solidFill>
+          <a:ln>
+            <a:noFill/>
+          </a:ln>
+          <a:effectLst/>
+        </p:spPr>
+        <p:style>
+          <a:lnRef idx="1">
+            <a:schemeClr val="accent1"/>
+          </a:lnRef>
+          <a:fillRef idx="3">
+            <a:schemeClr val="accent1"/>
+          </a:fillRef>
+          <a:effectRef idx="2">
+            <a:schemeClr val="accent1"/>
+          </a:effectRef>
+          <a:fontRef idx="minor">
+            <a:schemeClr val="lt1"/>
+          </a:fontRef>
+        </p:style>
+        <p:txBody>
+          <a:bodyPr rtlCol="0" anchor="ctr"/>
+          <a:lstStyle/>
+          <a:p>
+            <a:pPr algn="ctr"/>
+          </a:p>
+        </p:txBody>
+      </p:sp>
+      <p:sp>
+        <p:nvSpPr>
+          <p:cNvPr id="39" name="Rounded Rectangle 38"/>
+          <p:cNvSpPr/>
+          <p:nvPr/>
+        </p:nvSpPr>
+        <p:spPr>
+          <a:xfrm>
+            <a:off x="4864100" y="3987800"/>
+            <a:ext cx="609600" cy="609600"/>
+          </a:xfrm>
+          <a:prstGeom prst="roundRect">
+            <a:avLst>
+              <a:gd name="adj" fmla="val 24300"/>
+            </a:avLst>
+          </a:prstGeom>
+          <a:solidFill>
+            <a:srgbClr val="F3F7F8"/>
+          </a:solidFill>
+          <a:ln>
+            <a:noFill/>
+          </a:ln>
+          <a:effectLst/>
+        </p:spPr>
+        <p:style>
+          <a:lnRef idx="1">
+            <a:schemeClr val="accent1"/>
+          </a:lnRef>
+          <a:fillRef idx="3">
+            <a:schemeClr val="accent1"/>
+          </a:fillRef>
+          <a:effectRef idx="2">
+            <a:schemeClr val="accent1"/>
+          </a:effectRef>
+          <a:fontRef idx="minor">
+            <a:schemeClr val="lt1"/>
+          </a:fontRef>
+        </p:style>
+        <p:txBody>
+          <a:bodyPr rtlCol="0" anchor="ctr"/>
+          <a:lstStyle/>
+          <a:p>
+            <a:pPr algn="ctr"/>
+          </a:p>
+        </p:txBody>
+      </p:sp>
+      <p:pic>
+        <p:nvPicPr>
+          <p:cNvPr id="40" name="Picture 39" descr="icon-aftekenen-navy.png"/>
+          <p:cNvPicPr>
+            <a:picLocks noChangeAspect="1"/>
+          </p:cNvPicPr>
+          <p:nvPr/>
+        </p:nvPicPr>
+        <p:blipFill>
+          <a:blip r:embed="rId8"/>
+          <a:stretch>
+            <a:fillRect/>
+          </a:stretch>
+        </p:blipFill>
+        <p:spPr>
+          <a:xfrm>
+            <a:off x="5016500" y="4140200"/>
+            <a:ext cx="304800" cy="304800"/>
+          </a:xfrm>
+          <a:prstGeom prst="rect">
+            <a:avLst/>
+          </a:prstGeom>
+        </p:spPr>
+      </p:pic>
+      <p:sp>
+        <p:nvSpPr>
+          <p:cNvPr id="41" name="TextBox 40"/>
+          <p:cNvSpPr txBox="1"/>
+          <p:nvPr/>
+        </p:nvSpPr>
+        <p:spPr>
+          <a:xfrm>
+            <a:off x="4241800" y="4686300"/>
+            <a:ext cx="1854200" cy="254000"/>
+          </a:xfrm>
+          <a:prstGeom prst="rect">
+            <a:avLst/>
+          </a:prstGeom>
+          <a:noFill/>
+        </p:spPr>
+        <p:txBody>
+          <a:bodyPr wrap="square" lIns="0" rIns="0" tIns="0" bIns="0">
+            <a:spAutoFit/>
+          </a:bodyPr>
+          <a:lstStyle/>
+          <a:p>
+            <a:pPr algn="ctr">
+              <a:lnSpc>
+                <a:spcPct val="100000"/>
+              </a:lnSpc>
+            </a:pPr>
+            <a:r>
+              <a:rPr sz="1700" b="1">
+                <a:solidFill>
+                  <a:srgbClr val="FFFFFF"/>
+                </a:solidFill>
+                <a:latin typeface="League Spartan"/>
+              </a:rPr>
+              <a:t>Cijfer</a:t>
+            </a:r>
+          </a:p>
+        </p:txBody>
+      </p:sp>
+      <p:sp>
+        <p:nvSpPr>
+          <p:cNvPr id="42" name="TextBox 41"/>
+          <p:cNvSpPr txBox="1"/>
+          <p:nvPr/>
+        </p:nvSpPr>
+        <p:spPr>
+          <a:xfrm>
+            <a:off x="4089400" y="4953000"/>
+            <a:ext cx="2159000" cy="571500"/>
+          </a:xfrm>
+          <a:prstGeom prst="rect">
+            <a:avLst/>
+          </a:prstGeom>
+          <a:noFill/>
+        </p:spPr>
+        <p:txBody>
+          <a:bodyPr wrap="square" lIns="0" rIns="0" tIns="0" bIns="0">
+            <a:spAutoFit/>
+          </a:bodyPr>
+          <a:lstStyle/>
+          <a:p>
+            <a:pPr algn="ctr">
+              <a:lnSpc>
+                <a:spcPct val="120000"/>
+              </a:lnSpc>
+            </a:pPr>
+            <a:r>
+              <a:rPr sz="1600" b="0">
+                <a:solidFill>
+                  <a:srgbClr val="8FA9B4"/>
+                </a:solidFill>
+                <a:latin typeface="Inter"/>
+              </a:rPr>
+              <a:t>vastgesteld</a:t>
+            </a:r>
+          </a:p>
+        </p:txBody>
+      </p:sp>
+      <p:sp>
+        <p:nvSpPr>
+          <p:cNvPr id="43" name="Rectangle 42"/>
+          <p:cNvSpPr/>
+          <p:nvPr/>
+        </p:nvSpPr>
+        <p:spPr>
+          <a:xfrm>
+            <a:off x="6578600" y="3949700"/>
+            <a:ext cx="889000" cy="685800"/>
+          </a:xfrm>
+          <a:prstGeom prst="rect">
+            <a:avLst/>
+          </a:prstGeom>
+          <a:solidFill>
+            <a:srgbClr val="002333"/>
+          </a:solidFill>
+          <a:ln>
+            <a:noFill/>
+          </a:ln>
+          <a:effectLst/>
+        </p:spPr>
+        <p:style>
+          <a:lnRef idx="1">
+            <a:schemeClr val="accent1"/>
+          </a:lnRef>
+          <a:fillRef idx="3">
+            <a:schemeClr val="accent1"/>
+          </a:fillRef>
+          <a:effectRef idx="2">
+            <a:schemeClr val="accent1"/>
+          </a:effectRef>
+          <a:fontRef idx="minor">
+            <a:schemeClr val="lt1"/>
+          </a:fontRef>
+        </p:style>
+        <p:txBody>
+          <a:bodyPr rtlCol="0" anchor="ctr"/>
+          <a:lstStyle/>
+          <a:p>
+            <a:pPr algn="ctr"/>
+          </a:p>
+        </p:txBody>
+      </p:sp>
+      <p:sp>
+        <p:nvSpPr>
+          <p:cNvPr id="44" name="Rounded Rectangle 43"/>
+          <p:cNvSpPr/>
+          <p:nvPr/>
+        </p:nvSpPr>
+        <p:spPr>
+          <a:xfrm>
+            <a:off x="6718300" y="3987800"/>
+            <a:ext cx="609600" cy="609600"/>
+          </a:xfrm>
+          <a:prstGeom prst="roundRect">
+            <a:avLst>
+              <a:gd name="adj" fmla="val 24300"/>
+            </a:avLst>
+          </a:prstGeom>
+          <a:solidFill>
+            <a:srgbClr val="F3F7F8"/>
+          </a:solidFill>
+          <a:ln>
+            <a:noFill/>
+          </a:ln>
+          <a:effectLst/>
+        </p:spPr>
+        <p:style>
+          <a:lnRef idx="1">
+            <a:schemeClr val="accent1"/>
+          </a:lnRef>
+          <a:fillRef idx="3">
+            <a:schemeClr val="accent1"/>
+          </a:fillRef>
+          <a:effectRef idx="2">
+            <a:schemeClr val="accent1"/>
+          </a:effectRef>
+          <a:fontRef idx="minor">
+            <a:schemeClr val="lt1"/>
+          </a:fontRef>
+        </p:style>
+        <p:txBody>
+          <a:bodyPr rtlCol="0" anchor="ctr"/>
+          <a:lstStyle/>
+          <a:p>
+            <a:pPr algn="ctr"/>
+          </a:p>
+        </p:txBody>
+      </p:sp>
+      <p:pic>
+        <p:nvPicPr>
+          <p:cNvPr id="45" name="Picture 44" descr="icon-check-navy.png"/>
+          <p:cNvPicPr>
+            <a:picLocks noChangeAspect="1"/>
+          </p:cNvPicPr>
+          <p:nvPr/>
+        </p:nvPicPr>
+        <p:blipFill>
+          <a:blip r:embed="rId9"/>
+          <a:stretch>
+            <a:fillRect/>
+          </a:stretch>
+        </p:blipFill>
+        <p:spPr>
+          <a:xfrm>
+            <a:off x="6870700" y="4140200"/>
+            <a:ext cx="304800" cy="304800"/>
+          </a:xfrm>
+          <a:prstGeom prst="rect">
+            <a:avLst/>
+          </a:prstGeom>
+        </p:spPr>
+      </p:pic>
+      <p:sp>
+        <p:nvSpPr>
+          <p:cNvPr id="46" name="TextBox 45"/>
+          <p:cNvSpPr txBox="1"/>
+          <p:nvPr/>
+        </p:nvSpPr>
+        <p:spPr>
+          <a:xfrm>
+            <a:off x="6096000" y="4686300"/>
+            <a:ext cx="1854200" cy="254000"/>
+          </a:xfrm>
+          <a:prstGeom prst="rect">
+            <a:avLst/>
+          </a:prstGeom>
+          <a:noFill/>
+        </p:spPr>
+        <p:txBody>
+          <a:bodyPr wrap="square" lIns="0" rIns="0" tIns="0" bIns="0">
+            <a:spAutoFit/>
+          </a:bodyPr>
+          <a:lstStyle/>
+          <a:p>
+            <a:pPr algn="ctr">
+              <a:lnSpc>
+                <a:spcPct val="100000"/>
+              </a:lnSpc>
+            </a:pPr>
+            <a:r>
+              <a:rPr sz="1700" b="1">
+                <a:solidFill>
+                  <a:srgbClr val="FFFFFF"/>
+                </a:solidFill>
+                <a:latin typeface="League Spartan"/>
+              </a:rPr>
+              <a:t>Cursusbureau</a:t>
+            </a:r>
+          </a:p>
+        </p:txBody>
+      </p:sp>
+      <p:sp>
+        <p:nvSpPr>
+          <p:cNvPr id="47" name="TextBox 46"/>
+          <p:cNvSpPr txBox="1"/>
+          <p:nvPr/>
+        </p:nvSpPr>
+        <p:spPr>
+          <a:xfrm>
+            <a:off x="5943600" y="4953000"/>
+            <a:ext cx="2159000" cy="571500"/>
+          </a:xfrm>
+          <a:prstGeom prst="rect">
+            <a:avLst/>
+          </a:prstGeom>
+          <a:noFill/>
+        </p:spPr>
+        <p:txBody>
+          <a:bodyPr wrap="square" lIns="0" rIns="0" tIns="0" bIns="0">
+            <a:spAutoFit/>
+          </a:bodyPr>
+          <a:lstStyle/>
+          <a:p>
+            <a:pPr algn="ctr">
+              <a:lnSpc>
+                <a:spcPct val="120000"/>
+              </a:lnSpc>
+            </a:pPr>
+            <a:r>
+              <a:rPr sz="1600" b="0">
+                <a:solidFill>
+                  <a:srgbClr val="8FA9B4"/>
+                </a:solidFill>
+                <a:latin typeface="Inter"/>
+              </a:rPr>
+              <a:t>checkt taal</a:t>
+            </a:r>
+          </a:p>
+        </p:txBody>
+      </p:sp>
+      <p:sp>
+        <p:nvSpPr>
+          <p:cNvPr id="48" name="Rectangle 47"/>
+          <p:cNvSpPr/>
+          <p:nvPr/>
+        </p:nvSpPr>
+        <p:spPr>
+          <a:xfrm>
+            <a:off x="8432800" y="3949700"/>
+            <a:ext cx="889000" cy="685800"/>
+          </a:xfrm>
+          <a:prstGeom prst="rect">
+            <a:avLst/>
+          </a:prstGeom>
+          <a:solidFill>
+            <a:srgbClr val="002333"/>
+          </a:solidFill>
+          <a:ln>
+            <a:noFill/>
+          </a:ln>
+          <a:effectLst/>
+        </p:spPr>
+        <p:style>
+          <a:lnRef idx="1">
+            <a:schemeClr val="accent1"/>
+          </a:lnRef>
+          <a:fillRef idx="3">
+            <a:schemeClr val="accent1"/>
+          </a:fillRef>
+          <a:effectRef idx="2">
+            <a:schemeClr val="accent1"/>
+          </a:effectRef>
+          <a:fontRef idx="minor">
+            <a:schemeClr val="lt1"/>
+          </a:fontRef>
+        </p:style>
+        <p:txBody>
+          <a:bodyPr rtlCol="0" anchor="ctr"/>
+          <a:lstStyle/>
+          <a:p>
+            <a:pPr algn="ctr"/>
+          </a:p>
+        </p:txBody>
+      </p:sp>
+      <p:sp>
+        <p:nvSpPr>
+          <p:cNvPr id="49" name="Rounded Rectangle 48"/>
+          <p:cNvSpPr/>
+          <p:nvPr/>
+        </p:nvSpPr>
+        <p:spPr>
+          <a:xfrm>
+            <a:off x="8572500" y="3987800"/>
+            <a:ext cx="609600" cy="609600"/>
+          </a:xfrm>
+          <a:prstGeom prst="roundRect">
+            <a:avLst>
+              <a:gd name="adj" fmla="val 24300"/>
+            </a:avLst>
+          </a:prstGeom>
+          <a:solidFill>
+            <a:srgbClr val="F3F7F8"/>
+          </a:solidFill>
+          <a:ln>
+            <a:noFill/>
+          </a:ln>
+          <a:effectLst/>
+        </p:spPr>
+        <p:style>
+          <a:lnRef idx="1">
+            <a:schemeClr val="accent1"/>
+          </a:lnRef>
+          <a:fillRef idx="3">
+            <a:schemeClr val="accent1"/>
+          </a:fillRef>
+          <a:effectRef idx="2">
+            <a:schemeClr val="accent1"/>
+          </a:effectRef>
+          <a:fontRef idx="minor">
+            <a:schemeClr val="lt1"/>
+          </a:fontRef>
+        </p:style>
+        <p:txBody>
+          <a:bodyPr rtlCol="0" anchor="ctr"/>
+          <a:lstStyle/>
+          <a:p>
+            <a:pPr algn="ctr"/>
+          </a:p>
+        </p:txBody>
+      </p:sp>
+      <p:pic>
+        <p:nvPicPr>
+          <p:cNvPr id="50" name="Picture 49" descr="icon-mail-navy.png"/>
+          <p:cNvPicPr>
+            <a:picLocks noChangeAspect="1"/>
+          </p:cNvPicPr>
+          <p:nvPr/>
+        </p:nvPicPr>
+        <p:blipFill>
+          <a:blip r:embed="rId10"/>
+          <a:stretch>
+            <a:fillRect/>
+          </a:stretch>
+        </p:blipFill>
+        <p:spPr>
+          <a:xfrm>
+            <a:off x="8724900" y="4140200"/>
+            <a:ext cx="304800" cy="304800"/>
+          </a:xfrm>
+          <a:prstGeom prst="rect">
+            <a:avLst/>
+          </a:prstGeom>
+        </p:spPr>
+      </p:pic>
+      <p:sp>
+        <p:nvSpPr>
+          <p:cNvPr id="51" name="TextBox 50"/>
+          <p:cNvSpPr txBox="1"/>
+          <p:nvPr/>
+        </p:nvSpPr>
+        <p:spPr>
+          <a:xfrm>
+            <a:off x="7950200" y="4686300"/>
+            <a:ext cx="1854200" cy="254000"/>
+          </a:xfrm>
+          <a:prstGeom prst="rect">
+            <a:avLst/>
+          </a:prstGeom>
+          <a:noFill/>
+        </p:spPr>
+        <p:txBody>
+          <a:bodyPr wrap="square" lIns="0" rIns="0" tIns="0" bIns="0">
+            <a:spAutoFit/>
+          </a:bodyPr>
+          <a:lstStyle/>
+          <a:p>
+            <a:pPr algn="ctr">
+              <a:lnSpc>
+                <a:spcPct val="100000"/>
+              </a:lnSpc>
+            </a:pPr>
+            <a:r>
+              <a:rPr sz="1700" b="1">
+                <a:solidFill>
+                  <a:srgbClr val="FFFFFF"/>
+                </a:solidFill>
+                <a:latin typeface="League Spartan"/>
+              </a:rPr>
+              <a:t>Secretariaat</a:t>
+            </a:r>
+          </a:p>
+        </p:txBody>
+      </p:sp>
+      <p:sp>
+        <p:nvSpPr>
+          <p:cNvPr id="52" name="TextBox 51"/>
+          <p:cNvSpPr txBox="1"/>
+          <p:nvPr/>
+        </p:nvSpPr>
+        <p:spPr>
+          <a:xfrm>
+            <a:off x="7797800" y="4953000"/>
+            <a:ext cx="2159000" cy="571500"/>
+          </a:xfrm>
+          <a:prstGeom prst="rect">
+            <a:avLst/>
+          </a:prstGeom>
+          <a:noFill/>
+        </p:spPr>
+        <p:txBody>
+          <a:bodyPr wrap="square" lIns="0" rIns="0" tIns="0" bIns="0">
+            <a:spAutoFit/>
+          </a:bodyPr>
+          <a:lstStyle/>
+          <a:p>
+            <a:pPr algn="ctr">
+              <a:lnSpc>
+                <a:spcPct val="120000"/>
+              </a:lnSpc>
+            </a:pPr>
+            <a:r>
+              <a:rPr sz="1600" b="0">
+                <a:solidFill>
+                  <a:srgbClr val="8FA9B4"/>
+                </a:solidFill>
+                <a:latin typeface="Inter"/>
+              </a:rPr>
+              <a:t>zet het open</a:t>
+            </a:r>
+          </a:p>
+        </p:txBody>
+      </p:sp>
+      <p:sp>
+        <p:nvSpPr>
+          <p:cNvPr id="53" name="Rectangle 52"/>
+          <p:cNvSpPr/>
+          <p:nvPr/>
+        </p:nvSpPr>
+        <p:spPr>
+          <a:xfrm>
+            <a:off x="10287000" y="3949700"/>
+            <a:ext cx="889000" cy="685800"/>
+          </a:xfrm>
+          <a:prstGeom prst="rect">
+            <a:avLst/>
+          </a:prstGeom>
+          <a:solidFill>
+            <a:srgbClr val="002333"/>
+          </a:solidFill>
+          <a:ln>
+            <a:noFill/>
+          </a:ln>
+          <a:effectLst/>
+        </p:spPr>
+        <p:style>
+          <a:lnRef idx="1">
+            <a:schemeClr val="accent1"/>
+          </a:lnRef>
+          <a:fillRef idx="3">
+            <a:schemeClr val="accent1"/>
+          </a:fillRef>
+          <a:effectRef idx="2">
+            <a:schemeClr val="accent1"/>
+          </a:effectRef>
+          <a:fontRef idx="minor">
+            <a:schemeClr val="lt1"/>
+          </a:fontRef>
+        </p:style>
+        <p:txBody>
+          <a:bodyPr rtlCol="0" anchor="ctr"/>
+          <a:lstStyle/>
+          <a:p>
+            <a:pPr algn="ctr"/>
+          </a:p>
+        </p:txBody>
+      </p:sp>
+      <p:sp>
+        <p:nvSpPr>
+          <p:cNvPr id="54" name="Rounded Rectangle 53"/>
+          <p:cNvSpPr/>
+          <p:nvPr/>
+        </p:nvSpPr>
+        <p:spPr>
+          <a:xfrm>
+            <a:off x="10426700" y="3987800"/>
+            <a:ext cx="609600" cy="609600"/>
+          </a:xfrm>
+          <a:prstGeom prst="roundRect">
+            <a:avLst>
+              <a:gd name="adj" fmla="val 24300"/>
+            </a:avLst>
+          </a:prstGeom>
+          <a:solidFill>
+            <a:srgbClr val="F3F7F8"/>
+          </a:solidFill>
+          <a:ln>
+            <a:noFill/>
+          </a:ln>
+          <a:effectLst/>
+        </p:spPr>
+        <p:style>
+          <a:lnRef idx="1">
+            <a:schemeClr val="accent1"/>
+          </a:lnRef>
+          <a:fillRef idx="3">
+            <a:schemeClr val="accent1"/>
+          </a:fillRef>
+          <a:effectRef idx="2">
+            <a:schemeClr val="accent1"/>
+          </a:effectRef>
+          <a:fontRef idx="minor">
+            <a:schemeClr val="lt1"/>
+          </a:fontRef>
+        </p:style>
+        <p:txBody>
+          <a:bodyPr rtlCol="0" anchor="ctr"/>
+          <a:lstStyle/>
+          <a:p>
+            <a:pPr algn="ctr"/>
+          </a:p>
+        </p:txBody>
+      </p:sp>
+      <p:pic>
+        <p:nvPicPr>
+          <p:cNvPr id="55" name="Picture 54" descr="icon-studenten-navy.png"/>
+          <p:cNvPicPr>
+            <a:picLocks noChangeAspect="1"/>
+          </p:cNvPicPr>
+          <p:nvPr/>
+        </p:nvPicPr>
+        <p:blipFill>
+          <a:blip r:embed="rId11"/>
+          <a:stretch>
+            <a:fillRect/>
+          </a:stretch>
+        </p:blipFill>
+        <p:spPr>
+          <a:xfrm>
+            <a:off x="10579100" y="4140200"/>
+            <a:ext cx="304800" cy="304800"/>
+          </a:xfrm>
+          <a:prstGeom prst="rect">
+            <a:avLst/>
+          </a:prstGeom>
+        </p:spPr>
+      </p:pic>
+      <p:sp>
+        <p:nvSpPr>
+          <p:cNvPr id="56" name="TextBox 55"/>
+          <p:cNvSpPr txBox="1"/>
+          <p:nvPr/>
+        </p:nvSpPr>
+        <p:spPr>
+          <a:xfrm>
+            <a:off x="9804400" y="4686300"/>
+            <a:ext cx="1854200" cy="254000"/>
+          </a:xfrm>
+          <a:prstGeom prst="rect">
+            <a:avLst/>
+          </a:prstGeom>
+          <a:noFill/>
+        </p:spPr>
+        <p:txBody>
+          <a:bodyPr wrap="square" lIns="0" rIns="0" tIns="0" bIns="0">
+            <a:spAutoFit/>
+          </a:bodyPr>
+          <a:lstStyle/>
+          <a:p>
+            <a:pPr algn="ctr">
+              <a:lnSpc>
+                <a:spcPct val="100000"/>
+              </a:lnSpc>
+            </a:pPr>
+            <a:r>
+              <a:rPr sz="1700" b="1">
+                <a:solidFill>
+                  <a:srgbClr val="FFFFFF"/>
+                </a:solidFill>
+                <a:latin typeface="League Spartan"/>
+              </a:rPr>
+              <a:t>Student</a:t>
+            </a:r>
+          </a:p>
+        </p:txBody>
+      </p:sp>
+      <p:sp>
+        <p:nvSpPr>
+          <p:cNvPr id="57" name="TextBox 56"/>
+          <p:cNvSpPr txBox="1"/>
+          <p:nvPr/>
+        </p:nvSpPr>
+        <p:spPr>
+          <a:xfrm>
+            <a:off x="9652000" y="4953000"/>
+            <a:ext cx="2159000" cy="571500"/>
+          </a:xfrm>
+          <a:prstGeom prst="rect">
+            <a:avLst/>
+          </a:prstGeom>
+          <a:noFill/>
+        </p:spPr>
+        <p:txBody>
+          <a:bodyPr wrap="square" lIns="0" rIns="0" tIns="0" bIns="0">
+            <a:spAutoFit/>
+          </a:bodyPr>
+          <a:lstStyle/>
+          <a:p>
+            <a:pPr algn="ctr">
+              <a:lnSpc>
+                <a:spcPct val="120000"/>
+              </a:lnSpc>
+            </a:pPr>
+            <a:r>
+              <a:rPr sz="1600" b="0">
+                <a:solidFill>
+                  <a:srgbClr val="8FA9B4"/>
+                </a:solidFill>
+                <a:latin typeface="Inter"/>
+              </a:rPr>
+              <a:t>ziet resultaat</a:t>
+            </a:r>
+          </a:p>
+        </p:txBody>
+      </p:sp>
+      <p:sp>
+        <p:nvSpPr>
+          <p:cNvPr id="58" name="Rectangle 57"/>
+          <p:cNvSpPr/>
+          <p:nvPr/>
+        </p:nvSpPr>
+        <p:spPr>
+          <a:xfrm>
+            <a:off x="762000" y="5511800"/>
+            <a:ext cx="10668000" cy="6350"/>
           </a:xfrm>
           <a:prstGeom prst="rect">
             <a:avLst/>
@@ -5236,165 +7379,19 @@
       </p:sp>
       <p:sp>
         <p:nvSpPr>
-          <p:cNvPr id="6" name="Rounded Rectangle 5"/>
+          <p:cNvPr id="59" name="Rounded Rectangle 58"/>
           <p:cNvSpPr/>
           <p:nvPr/>
         </p:nvSpPr>
         <p:spPr>
           <a:xfrm>
-            <a:off x="1155700" y="1866900"/>
-            <a:ext cx="609600" cy="609600"/>
+            <a:off x="8890000" y="5626100"/>
+            <a:ext cx="2540000" cy="558800"/>
           </a:xfrm>
           <a:prstGeom prst="roundRect">
             <a:avLst>
-              <a:gd name="adj" fmla="val 24300"/>
+              <a:gd name="adj" fmla="val 25000"/>
             </a:avLst>
-          </a:prstGeom>
-          <a:solidFill>
-            <a:srgbClr val="F3F7F8"/>
-          </a:solidFill>
-          <a:ln>
-            <a:noFill/>
-          </a:ln>
-          <a:effectLst/>
-        </p:spPr>
-        <p:style>
-          <a:lnRef idx="1">
-            <a:schemeClr val="accent1"/>
-          </a:lnRef>
-          <a:fillRef idx="3">
-            <a:schemeClr val="accent1"/>
-          </a:fillRef>
-          <a:effectRef idx="2">
-            <a:schemeClr val="accent1"/>
-          </a:effectRef>
-          <a:fontRef idx="minor">
-            <a:schemeClr val="lt1"/>
-          </a:fontRef>
-        </p:style>
-        <p:txBody>
-          <a:bodyPr rtlCol="0" anchor="ctr"/>
-          <a:lstStyle/>
-          <a:p>
-            <a:pPr algn="ctr"/>
-          </a:p>
-        </p:txBody>
-      </p:sp>
-      <p:pic>
-        <p:nvPicPr>
-          <p:cNvPr id="7" name="Picture 6" descr="icon-pen-navy.png"/>
-          <p:cNvPicPr>
-            <a:picLocks noChangeAspect="1"/>
-          </p:cNvPicPr>
-          <p:nvPr/>
-        </p:nvPicPr>
-        <p:blipFill>
-          <a:blip r:embed="rId2"/>
-          <a:stretch>
-            <a:fillRect/>
-          </a:stretch>
-        </p:blipFill>
-        <p:spPr>
-          <a:xfrm>
-            <a:off x="1308100" y="2019300"/>
-            <a:ext cx="304800" cy="304800"/>
-          </a:xfrm>
-          <a:prstGeom prst="rect">
-            <a:avLst/>
-          </a:prstGeom>
-        </p:spPr>
-      </p:pic>
-      <p:sp>
-        <p:nvSpPr>
-          <p:cNvPr id="8" name="TextBox 7"/>
-          <p:cNvSpPr txBox="1"/>
-          <p:nvPr/>
-        </p:nvSpPr>
-        <p:spPr>
-          <a:xfrm>
-            <a:off x="533400" y="2565400"/>
-            <a:ext cx="1854200" cy="254000"/>
-          </a:xfrm>
-          <a:prstGeom prst="rect">
-            <a:avLst/>
-          </a:prstGeom>
-          <a:noFill/>
-        </p:spPr>
-        <p:txBody>
-          <a:bodyPr wrap="square" lIns="0" rIns="0" tIns="0" bIns="0">
-            <a:spAutoFit/>
-          </a:bodyPr>
-          <a:lstStyle/>
-          <a:p>
-            <a:pPr algn="ctr">
-              <a:lnSpc>
-                <a:spcPct val="100000"/>
-              </a:lnSpc>
-            </a:pPr>
-            <a:r>
-              <a:rPr sz="1700" b="1">
-                <a:solidFill>
-                  <a:srgbClr val="002333"/>
-                </a:solidFill>
-                <a:latin typeface="League Spartan"/>
-              </a:rPr>
-              <a:t>Student</a:t>
-            </a:r>
-          </a:p>
-        </p:txBody>
-      </p:sp>
-      <p:sp>
-        <p:nvSpPr>
-          <p:cNvPr id="9" name="TextBox 8"/>
-          <p:cNvSpPr txBox="1"/>
-          <p:nvPr/>
-        </p:nvSpPr>
-        <p:spPr>
-          <a:xfrm>
-            <a:off x="381000" y="2832100"/>
-            <a:ext cx="2159000" cy="571500"/>
-          </a:xfrm>
-          <a:prstGeom prst="rect">
-            <a:avLst/>
-          </a:prstGeom>
-          <a:noFill/>
-        </p:spPr>
-        <p:txBody>
-          <a:bodyPr wrap="square" lIns="0" rIns="0" tIns="0" bIns="0">
-            <a:spAutoFit/>
-          </a:bodyPr>
-          <a:lstStyle/>
-          <a:p>
-            <a:pPr algn="ctr">
-              <a:lnSpc>
-                <a:spcPct val="120000"/>
-              </a:lnSpc>
-            </a:pPr>
-            <a:r>
-              <a:rPr sz="1600" b="0">
-                <a:solidFill>
-                  <a:srgbClr val="5B7480"/>
-                </a:solidFill>
-                <a:latin typeface="Inter"/>
-              </a:rPr>
-              <a:t>maakt toets</a:t>
-            </a:r>
-          </a:p>
-        </p:txBody>
-      </p:sp>
-      <p:sp>
-        <p:nvSpPr>
-          <p:cNvPr id="10" name="Rectangle 9"/>
-          <p:cNvSpPr/>
-          <p:nvPr/>
-        </p:nvSpPr>
-        <p:spPr>
-          <a:xfrm>
-            <a:off x="2870200" y="1828800"/>
-            <a:ext cx="889000" cy="685800"/>
-          </a:xfrm>
-          <a:prstGeom prst="rect">
-            <a:avLst/>
           </a:prstGeom>
           <a:solidFill>
             <a:srgbClr val="FFFFFF"/>
@@ -5426,1820 +7423,9 @@
           </a:p>
         </p:txBody>
       </p:sp>
-      <p:sp>
-        <p:nvSpPr>
-          <p:cNvPr id="11" name="Rounded Rectangle 10"/>
-          <p:cNvSpPr/>
-          <p:nvPr/>
-        </p:nvSpPr>
-        <p:spPr>
-          <a:xfrm>
-            <a:off x="3009900" y="1866900"/>
-            <a:ext cx="609600" cy="609600"/>
-          </a:xfrm>
-          <a:prstGeom prst="roundRect">
-            <a:avLst>
-              <a:gd name="adj" fmla="val 24300"/>
-            </a:avLst>
-          </a:prstGeom>
-          <a:solidFill>
-            <a:srgbClr val="F3F7F8"/>
-          </a:solidFill>
-          <a:ln>
-            <a:noFill/>
-          </a:ln>
-          <a:effectLst/>
-        </p:spPr>
-        <p:style>
-          <a:lnRef idx="1">
-            <a:schemeClr val="accent1"/>
-          </a:lnRef>
-          <a:fillRef idx="3">
-            <a:schemeClr val="accent1"/>
-          </a:fillRef>
-          <a:effectRef idx="2">
-            <a:schemeClr val="accent1"/>
-          </a:effectRef>
-          <a:fontRef idx="minor">
-            <a:schemeClr val="lt1"/>
-          </a:fontRef>
-        </p:style>
-        <p:txBody>
-          <a:bodyPr rtlCol="0" anchor="ctr"/>
-          <a:lstStyle/>
-          <a:p>
-            <a:pPr algn="ctr"/>
-          </a:p>
-        </p:txBody>
-      </p:sp>
       <p:pic>
         <p:nvPicPr>
-          <p:cNvPr id="12" name="Picture 11" descr="icon-cijfers-navy.png"/>
-          <p:cNvPicPr>
-            <a:picLocks noChangeAspect="1"/>
-          </p:cNvPicPr>
-          <p:nvPr/>
-        </p:nvPicPr>
-        <p:blipFill>
-          <a:blip r:embed="rId3"/>
-          <a:stretch>
-            <a:fillRect/>
-          </a:stretch>
-        </p:blipFill>
-        <p:spPr>
-          <a:xfrm>
-            <a:off x="3162300" y="2019300"/>
-            <a:ext cx="304800" cy="304800"/>
-          </a:xfrm>
-          <a:prstGeom prst="rect">
-            <a:avLst/>
-          </a:prstGeom>
-        </p:spPr>
-      </p:pic>
-      <p:sp>
-        <p:nvSpPr>
-          <p:cNvPr id="13" name="TextBox 12"/>
-          <p:cNvSpPr txBox="1"/>
-          <p:nvPr/>
-        </p:nvSpPr>
-        <p:spPr>
-          <a:xfrm>
-            <a:off x="2387600" y="2565400"/>
-            <a:ext cx="1854200" cy="254000"/>
-          </a:xfrm>
-          <a:prstGeom prst="rect">
-            <a:avLst/>
-          </a:prstGeom>
-          <a:noFill/>
-        </p:spPr>
-        <p:txBody>
-          <a:bodyPr wrap="square" lIns="0" rIns="0" tIns="0" bIns="0">
-            <a:spAutoFit/>
-          </a:bodyPr>
-          <a:lstStyle/>
-          <a:p>
-            <a:pPr algn="ctr">
-              <a:lnSpc>
-                <a:spcPct val="100000"/>
-              </a:lnSpc>
-            </a:pPr>
-            <a:r>
-              <a:rPr sz="1700" b="1">
-                <a:solidFill>
-                  <a:srgbClr val="002333"/>
-                </a:solidFill>
-                <a:latin typeface="League Spartan"/>
-              </a:rPr>
-              <a:t>Docent</a:t>
-            </a:r>
-          </a:p>
-        </p:txBody>
-      </p:sp>
-      <p:sp>
-        <p:nvSpPr>
-          <p:cNvPr id="14" name="TextBox 13"/>
-          <p:cNvSpPr txBox="1"/>
-          <p:nvPr/>
-        </p:nvSpPr>
-        <p:spPr>
-          <a:xfrm>
-            <a:off x="2235200" y="2832100"/>
-            <a:ext cx="2159000" cy="571500"/>
-          </a:xfrm>
-          <a:prstGeom prst="rect">
-            <a:avLst/>
-          </a:prstGeom>
-          <a:noFill/>
-        </p:spPr>
-        <p:txBody>
-          <a:bodyPr wrap="square" lIns="0" rIns="0" tIns="0" bIns="0">
-            <a:spAutoFit/>
-          </a:bodyPr>
-          <a:lstStyle/>
-          <a:p>
-            <a:pPr algn="ctr">
-              <a:lnSpc>
-                <a:spcPct val="120000"/>
-              </a:lnSpc>
-            </a:pPr>
-            <a:r>
-              <a:rPr sz="1600" b="0">
-                <a:solidFill>
-                  <a:srgbClr val="5B7480"/>
-                </a:solidFill>
-                <a:latin typeface="Inter"/>
-              </a:rPr>
-              <a:t>punten, feedback</a:t>
-            </a:r>
-          </a:p>
-        </p:txBody>
-      </p:sp>
-      <p:sp>
-        <p:nvSpPr>
-          <p:cNvPr id="15" name="Rectangle 14"/>
-          <p:cNvSpPr/>
-          <p:nvPr/>
-        </p:nvSpPr>
-        <p:spPr>
-          <a:xfrm>
-            <a:off x="4724400" y="1828800"/>
-            <a:ext cx="889000" cy="685800"/>
-          </a:xfrm>
-          <a:prstGeom prst="rect">
-            <a:avLst/>
-          </a:prstGeom>
-          <a:solidFill>
-            <a:srgbClr val="FFFFFF"/>
-          </a:solidFill>
-          <a:ln>
-            <a:noFill/>
-          </a:ln>
-          <a:effectLst/>
-        </p:spPr>
-        <p:style>
-          <a:lnRef idx="1">
-            <a:schemeClr val="accent1"/>
-          </a:lnRef>
-          <a:fillRef idx="3">
-            <a:schemeClr val="accent1"/>
-          </a:fillRef>
-          <a:effectRef idx="2">
-            <a:schemeClr val="accent1"/>
-          </a:effectRef>
-          <a:fontRef idx="minor">
-            <a:schemeClr val="lt1"/>
-          </a:fontRef>
-        </p:style>
-        <p:txBody>
-          <a:bodyPr rtlCol="0" anchor="ctr"/>
-          <a:lstStyle/>
-          <a:p>
-            <a:pPr algn="ctr"/>
-          </a:p>
-        </p:txBody>
-      </p:sp>
-      <p:sp>
-        <p:nvSpPr>
-          <p:cNvPr id="16" name="Rounded Rectangle 15"/>
-          <p:cNvSpPr/>
-          <p:nvPr/>
-        </p:nvSpPr>
-        <p:spPr>
-          <a:xfrm>
-            <a:off x="4864100" y="1866900"/>
-            <a:ext cx="609600" cy="609600"/>
-          </a:xfrm>
-          <a:prstGeom prst="roundRect">
-            <a:avLst>
-              <a:gd name="adj" fmla="val 24300"/>
-            </a:avLst>
-          </a:prstGeom>
-          <a:solidFill>
-            <a:srgbClr val="F3F7F8"/>
-          </a:solidFill>
-          <a:ln>
-            <a:noFill/>
-          </a:ln>
-          <a:effectLst/>
-        </p:spPr>
-        <p:style>
-          <a:lnRef idx="1">
-            <a:schemeClr val="accent1"/>
-          </a:lnRef>
-          <a:fillRef idx="3">
-            <a:schemeClr val="accent1"/>
-          </a:fillRef>
-          <a:effectRef idx="2">
-            <a:schemeClr val="accent1"/>
-          </a:effectRef>
-          <a:fontRef idx="minor">
-            <a:schemeClr val="lt1"/>
-          </a:fontRef>
-        </p:style>
-        <p:txBody>
-          <a:bodyPr rtlCol="0" anchor="ctr"/>
-          <a:lstStyle/>
-          <a:p>
-            <a:pPr algn="ctr"/>
-          </a:p>
-        </p:txBody>
-      </p:sp>
-      <p:pic>
-        <p:nvPicPr>
-          <p:cNvPr id="17" name="Picture 16" descr="icon-usercheck-navy.png"/>
-          <p:cNvPicPr>
-            <a:picLocks noChangeAspect="1"/>
-          </p:cNvPicPr>
-          <p:nvPr/>
-        </p:nvPicPr>
-        <p:blipFill>
-          <a:blip r:embed="rId4"/>
-          <a:stretch>
-            <a:fillRect/>
-          </a:stretch>
-        </p:blipFill>
-        <p:spPr>
-          <a:xfrm>
-            <a:off x="5016500" y="2019300"/>
-            <a:ext cx="304800" cy="304800"/>
-          </a:xfrm>
-          <a:prstGeom prst="rect">
-            <a:avLst/>
-          </a:prstGeom>
-        </p:spPr>
-      </p:pic>
-      <p:sp>
-        <p:nvSpPr>
-          <p:cNvPr id="18" name="TextBox 17"/>
-          <p:cNvSpPr txBox="1"/>
-          <p:nvPr/>
-        </p:nvSpPr>
-        <p:spPr>
-          <a:xfrm>
-            <a:off x="4241800" y="2565400"/>
-            <a:ext cx="1854200" cy="254000"/>
-          </a:xfrm>
-          <a:prstGeom prst="rect">
-            <a:avLst/>
-          </a:prstGeom>
-          <a:noFill/>
-        </p:spPr>
-        <p:txBody>
-          <a:bodyPr wrap="square" lIns="0" rIns="0" tIns="0" bIns="0">
-            <a:spAutoFit/>
-          </a:bodyPr>
-          <a:lstStyle/>
-          <a:p>
-            <a:pPr algn="ctr">
-              <a:lnSpc>
-                <a:spcPct val="100000"/>
-              </a:lnSpc>
-            </a:pPr>
-            <a:r>
-              <a:rPr sz="1700" b="1">
-                <a:solidFill>
-                  <a:srgbClr val="002333"/>
-                </a:solidFill>
-                <a:latin typeface="League Spartan"/>
-              </a:rPr>
-              <a:t>Moduleleider</a:t>
-            </a:r>
-          </a:p>
-        </p:txBody>
-      </p:sp>
-      <p:sp>
-        <p:nvSpPr>
-          <p:cNvPr id="19" name="TextBox 18"/>
-          <p:cNvSpPr txBox="1"/>
-          <p:nvPr/>
-        </p:nvSpPr>
-        <p:spPr>
-          <a:xfrm>
-            <a:off x="4089400" y="2832100"/>
-            <a:ext cx="2159000" cy="571500"/>
-          </a:xfrm>
-          <a:prstGeom prst="rect">
-            <a:avLst/>
-          </a:prstGeom>
-          <a:noFill/>
-        </p:spPr>
-        <p:txBody>
-          <a:bodyPr wrap="square" lIns="0" rIns="0" tIns="0" bIns="0">
-            <a:spAutoFit/>
-          </a:bodyPr>
-          <a:lstStyle/>
-          <a:p>
-            <a:pPr algn="ctr">
-              <a:lnSpc>
-                <a:spcPct val="120000"/>
-              </a:lnSpc>
-            </a:pPr>
-            <a:r>
-              <a:rPr sz="1600" b="0">
-                <a:solidFill>
-                  <a:srgbClr val="5B7480"/>
-                </a:solidFill>
-                <a:latin typeface="Inter"/>
-              </a:rPr>
-              <a:t>stelt cijfer vast</a:t>
-            </a:r>
-          </a:p>
-        </p:txBody>
-      </p:sp>
-      <p:sp>
-        <p:nvSpPr>
-          <p:cNvPr id="20" name="Rectangle 19"/>
-          <p:cNvSpPr/>
-          <p:nvPr/>
-        </p:nvSpPr>
-        <p:spPr>
-          <a:xfrm>
-            <a:off x="6578600" y="1828800"/>
-            <a:ext cx="889000" cy="685800"/>
-          </a:xfrm>
-          <a:prstGeom prst="rect">
-            <a:avLst/>
-          </a:prstGeom>
-          <a:solidFill>
-            <a:srgbClr val="FFFFFF"/>
-          </a:solidFill>
-          <a:ln>
-            <a:noFill/>
-          </a:ln>
-          <a:effectLst/>
-        </p:spPr>
-        <p:style>
-          <a:lnRef idx="1">
-            <a:schemeClr val="accent1"/>
-          </a:lnRef>
-          <a:fillRef idx="3">
-            <a:schemeClr val="accent1"/>
-          </a:fillRef>
-          <a:effectRef idx="2">
-            <a:schemeClr val="accent1"/>
-          </a:effectRef>
-          <a:fontRef idx="minor">
-            <a:schemeClr val="lt1"/>
-          </a:fontRef>
-        </p:style>
-        <p:txBody>
-          <a:bodyPr rtlCol="0" anchor="ctr"/>
-          <a:lstStyle/>
-          <a:p>
-            <a:pPr algn="ctr"/>
-          </a:p>
-        </p:txBody>
-      </p:sp>
-      <p:sp>
-        <p:nvSpPr>
-          <p:cNvPr id="21" name="Rounded Rectangle 20"/>
-          <p:cNvSpPr/>
-          <p:nvPr/>
-        </p:nvSpPr>
-        <p:spPr>
-          <a:xfrm>
-            <a:off x="6718300" y="1866900"/>
-            <a:ext cx="609600" cy="609600"/>
-          </a:xfrm>
-          <a:prstGeom prst="roundRect">
-            <a:avLst>
-              <a:gd name="adj" fmla="val 24300"/>
-            </a:avLst>
-          </a:prstGeom>
-          <a:solidFill>
-            <a:srgbClr val="F3F7F8"/>
-          </a:solidFill>
-          <a:ln>
-            <a:noFill/>
-          </a:ln>
-          <a:effectLst/>
-        </p:spPr>
-        <p:style>
-          <a:lnRef idx="1">
-            <a:schemeClr val="accent1"/>
-          </a:lnRef>
-          <a:fillRef idx="3">
-            <a:schemeClr val="accent1"/>
-          </a:fillRef>
-          <a:effectRef idx="2">
-            <a:schemeClr val="accent1"/>
-          </a:effectRef>
-          <a:fontRef idx="minor">
-            <a:schemeClr val="lt1"/>
-          </a:fontRef>
-        </p:style>
-        <p:txBody>
-          <a:bodyPr rtlCol="0" anchor="ctr"/>
-          <a:lstStyle/>
-          <a:p>
-            <a:pPr algn="ctr"/>
-          </a:p>
-        </p:txBody>
-      </p:sp>
-      <p:pic>
-        <p:nvPicPr>
-          <p:cNvPr id="22" name="Picture 21" descr="icon-data-navy.png"/>
-          <p:cNvPicPr>
-            <a:picLocks noChangeAspect="1"/>
-          </p:cNvPicPr>
-          <p:nvPr/>
-        </p:nvPicPr>
-        <p:blipFill>
-          <a:blip r:embed="rId5"/>
-          <a:stretch>
-            <a:fillRect/>
-          </a:stretch>
-        </p:blipFill>
-        <p:spPr>
-          <a:xfrm>
-            <a:off x="6870700" y="2019300"/>
-            <a:ext cx="304800" cy="304800"/>
-          </a:xfrm>
-          <a:prstGeom prst="rect">
-            <a:avLst/>
-          </a:prstGeom>
-        </p:spPr>
-      </p:pic>
-      <p:sp>
-        <p:nvSpPr>
-          <p:cNvPr id="23" name="TextBox 22"/>
-          <p:cNvSpPr txBox="1"/>
-          <p:nvPr/>
-        </p:nvSpPr>
-        <p:spPr>
-          <a:xfrm>
-            <a:off x="6096000" y="2565400"/>
-            <a:ext cx="1854200" cy="254000"/>
-          </a:xfrm>
-          <a:prstGeom prst="rect">
-            <a:avLst/>
-          </a:prstGeom>
-          <a:noFill/>
-        </p:spPr>
-        <p:txBody>
-          <a:bodyPr wrap="square" lIns="0" rIns="0" tIns="0" bIns="0">
-            <a:spAutoFit/>
-          </a:bodyPr>
-          <a:lstStyle/>
-          <a:p>
-            <a:pPr algn="ctr">
-              <a:lnSpc>
-                <a:spcPct val="100000"/>
-              </a:lnSpc>
-            </a:pPr>
-            <a:r>
-              <a:rPr sz="1700" b="1">
-                <a:solidFill>
-                  <a:srgbClr val="002333"/>
-                </a:solidFill>
-                <a:latin typeface="League Spartan"/>
-              </a:rPr>
-              <a:t>Cursusbureau</a:t>
-            </a:r>
-          </a:p>
-        </p:txBody>
-      </p:sp>
-      <p:sp>
-        <p:nvSpPr>
-          <p:cNvPr id="24" name="TextBox 23"/>
-          <p:cNvSpPr txBox="1"/>
-          <p:nvPr/>
-        </p:nvSpPr>
-        <p:spPr>
-          <a:xfrm>
-            <a:off x="5943600" y="2832100"/>
-            <a:ext cx="2159000" cy="571500"/>
-          </a:xfrm>
-          <a:prstGeom prst="rect">
-            <a:avLst/>
-          </a:prstGeom>
-          <a:noFill/>
-        </p:spPr>
-        <p:txBody>
-          <a:bodyPr wrap="square" lIns="0" rIns="0" tIns="0" bIns="0">
-            <a:spAutoFit/>
-          </a:bodyPr>
-          <a:lstStyle/>
-          <a:p>
-            <a:pPr algn="ctr">
-              <a:lnSpc>
-                <a:spcPct val="120000"/>
-              </a:lnSpc>
-            </a:pPr>
-            <a:r>
-              <a:rPr sz="1600" b="0">
-                <a:solidFill>
-                  <a:srgbClr val="5B7480"/>
-                </a:solidFill>
-                <a:latin typeface="Inter"/>
-              </a:rPr>
-              <a:t>krijgt eindcijfer</a:t>
-            </a:r>
-          </a:p>
-        </p:txBody>
-      </p:sp>
-      <p:sp>
-        <p:nvSpPr>
-          <p:cNvPr id="25" name="TextBox 24"/>
-          <p:cNvSpPr txBox="1"/>
-          <p:nvPr/>
-        </p:nvSpPr>
-        <p:spPr>
-          <a:xfrm>
-            <a:off x="762000" y="3619500"/>
-            <a:ext cx="3810000" cy="254000"/>
-          </a:xfrm>
-          <a:prstGeom prst="rect">
-            <a:avLst/>
-          </a:prstGeom>
-          <a:noFill/>
-        </p:spPr>
-        <p:txBody>
-          <a:bodyPr wrap="square" lIns="0" rIns="0" tIns="0" bIns="0">
-            <a:spAutoFit/>
-          </a:bodyPr>
-          <a:lstStyle/>
-          <a:p>
-            <a:pPr algn="l">
-              <a:lnSpc>
-                <a:spcPct val="100000"/>
-              </a:lnSpc>
-            </a:pPr>
-            <a:r>
-              <a:rPr sz="1800" b="1">
-                <a:solidFill>
-                  <a:srgbClr val="5B7480"/>
-                </a:solidFill>
-                <a:latin typeface="League Spartan"/>
-              </a:rPr>
-              <a:t>Schrijfopdrachten</a:t>
-            </a:r>
-          </a:p>
-        </p:txBody>
-      </p:sp>
-      <p:sp>
-        <p:nvSpPr>
-          <p:cNvPr id="26" name="Rectangle 25"/>
-          <p:cNvSpPr/>
-          <p:nvPr/>
-        </p:nvSpPr>
-        <p:spPr>
-          <a:xfrm>
-            <a:off x="1460500" y="4279900"/>
-            <a:ext cx="9271000" cy="25400"/>
-          </a:xfrm>
-          <a:prstGeom prst="rect">
-            <a:avLst/>
-          </a:prstGeom>
-          <a:solidFill>
-            <a:srgbClr val="E7EEF0"/>
-          </a:solidFill>
-          <a:ln>
-            <a:noFill/>
-          </a:ln>
-          <a:effectLst/>
-        </p:spPr>
-        <p:style>
-          <a:lnRef idx="1">
-            <a:schemeClr val="accent1"/>
-          </a:lnRef>
-          <a:fillRef idx="3">
-            <a:schemeClr val="accent1"/>
-          </a:fillRef>
-          <a:effectRef idx="2">
-            <a:schemeClr val="accent1"/>
-          </a:effectRef>
-          <a:fontRef idx="minor">
-            <a:schemeClr val="lt1"/>
-          </a:fontRef>
-        </p:style>
-        <p:txBody>
-          <a:bodyPr rtlCol="0" anchor="ctr"/>
-          <a:lstStyle/>
-          <a:p>
-            <a:pPr algn="ctr"/>
-          </a:p>
-        </p:txBody>
-      </p:sp>
-      <p:sp>
-        <p:nvSpPr>
-          <p:cNvPr id="27" name="Rectangle 26"/>
-          <p:cNvSpPr/>
-          <p:nvPr/>
-        </p:nvSpPr>
-        <p:spPr>
-          <a:xfrm>
-            <a:off x="1016000" y="3949700"/>
-            <a:ext cx="889000" cy="685800"/>
-          </a:xfrm>
-          <a:prstGeom prst="rect">
-            <a:avLst/>
-          </a:prstGeom>
-          <a:solidFill>
-            <a:srgbClr val="FFFFFF"/>
-          </a:solidFill>
-          <a:ln>
-            <a:noFill/>
-          </a:ln>
-          <a:effectLst/>
-        </p:spPr>
-        <p:style>
-          <a:lnRef idx="1">
-            <a:schemeClr val="accent1"/>
-          </a:lnRef>
-          <a:fillRef idx="3">
-            <a:schemeClr val="accent1"/>
-          </a:fillRef>
-          <a:effectRef idx="2">
-            <a:schemeClr val="accent1"/>
-          </a:effectRef>
-          <a:fontRef idx="minor">
-            <a:schemeClr val="lt1"/>
-          </a:fontRef>
-        </p:style>
-        <p:txBody>
-          <a:bodyPr rtlCol="0" anchor="ctr"/>
-          <a:lstStyle/>
-          <a:p>
-            <a:pPr algn="ctr"/>
-          </a:p>
-        </p:txBody>
-      </p:sp>
-      <p:sp>
-        <p:nvSpPr>
-          <p:cNvPr id="28" name="Rounded Rectangle 27"/>
-          <p:cNvSpPr/>
-          <p:nvPr/>
-        </p:nvSpPr>
-        <p:spPr>
-          <a:xfrm>
-            <a:off x="1155700" y="3987800"/>
-            <a:ext cx="609600" cy="609600"/>
-          </a:xfrm>
-          <a:prstGeom prst="roundRect">
-            <a:avLst>
-              <a:gd name="adj" fmla="val 24300"/>
-            </a:avLst>
-          </a:prstGeom>
-          <a:solidFill>
-            <a:srgbClr val="F3F7F8"/>
-          </a:solidFill>
-          <a:ln>
-            <a:noFill/>
-          </a:ln>
-          <a:effectLst/>
-        </p:spPr>
-        <p:style>
-          <a:lnRef idx="1">
-            <a:schemeClr val="accent1"/>
-          </a:lnRef>
-          <a:fillRef idx="3">
-            <a:schemeClr val="accent1"/>
-          </a:fillRef>
-          <a:effectRef idx="2">
-            <a:schemeClr val="accent1"/>
-          </a:effectRef>
-          <a:fontRef idx="minor">
-            <a:schemeClr val="lt1"/>
-          </a:fontRef>
-        </p:style>
-        <p:txBody>
-          <a:bodyPr rtlCol="0" anchor="ctr"/>
-          <a:lstStyle/>
-          <a:p>
-            <a:pPr algn="ctr"/>
-          </a:p>
-        </p:txBody>
-      </p:sp>
-      <p:pic>
-        <p:nvPicPr>
-          <p:cNvPr id="29" name="Picture 28" descr="icon-inleveren-navy.png"/>
-          <p:cNvPicPr>
-            <a:picLocks noChangeAspect="1"/>
-          </p:cNvPicPr>
-          <p:nvPr/>
-        </p:nvPicPr>
-        <p:blipFill>
-          <a:blip r:embed="rId6"/>
-          <a:stretch>
-            <a:fillRect/>
-          </a:stretch>
-        </p:blipFill>
-        <p:spPr>
-          <a:xfrm>
-            <a:off x="1308100" y="4140200"/>
-            <a:ext cx="304800" cy="304800"/>
-          </a:xfrm>
-          <a:prstGeom prst="rect">
-            <a:avLst/>
-          </a:prstGeom>
-        </p:spPr>
-      </p:pic>
-      <p:sp>
-        <p:nvSpPr>
-          <p:cNvPr id="30" name="TextBox 29"/>
-          <p:cNvSpPr txBox="1"/>
-          <p:nvPr/>
-        </p:nvSpPr>
-        <p:spPr>
-          <a:xfrm>
-            <a:off x="533400" y="4686300"/>
-            <a:ext cx="1854200" cy="254000"/>
-          </a:xfrm>
-          <a:prstGeom prst="rect">
-            <a:avLst/>
-          </a:prstGeom>
-          <a:noFill/>
-        </p:spPr>
-        <p:txBody>
-          <a:bodyPr wrap="square" lIns="0" rIns="0" tIns="0" bIns="0">
-            <a:spAutoFit/>
-          </a:bodyPr>
-          <a:lstStyle/>
-          <a:p>
-            <a:pPr algn="ctr">
-              <a:lnSpc>
-                <a:spcPct val="100000"/>
-              </a:lnSpc>
-            </a:pPr>
-            <a:r>
-              <a:rPr sz="1700" b="1">
-                <a:solidFill>
-                  <a:srgbClr val="002333"/>
-                </a:solidFill>
-                <a:latin typeface="League Spartan"/>
-              </a:rPr>
-              <a:t>Student</a:t>
-            </a:r>
-          </a:p>
-        </p:txBody>
-      </p:sp>
-      <p:sp>
-        <p:nvSpPr>
-          <p:cNvPr id="31" name="TextBox 30"/>
-          <p:cNvSpPr txBox="1"/>
-          <p:nvPr/>
-        </p:nvSpPr>
-        <p:spPr>
-          <a:xfrm>
-            <a:off x="381000" y="4953000"/>
-            <a:ext cx="2159000" cy="571500"/>
-          </a:xfrm>
-          <a:prstGeom prst="rect">
-            <a:avLst/>
-          </a:prstGeom>
-          <a:noFill/>
-        </p:spPr>
-        <p:txBody>
-          <a:bodyPr wrap="square" lIns="0" rIns="0" tIns="0" bIns="0">
-            <a:spAutoFit/>
-          </a:bodyPr>
-          <a:lstStyle/>
-          <a:p>
-            <a:pPr algn="ctr">
-              <a:lnSpc>
-                <a:spcPct val="120000"/>
-              </a:lnSpc>
-            </a:pPr>
-            <a:r>
-              <a:rPr sz="1600" b="0">
-                <a:solidFill>
-                  <a:srgbClr val="5B7480"/>
-                </a:solidFill>
-                <a:latin typeface="Inter"/>
-              </a:rPr>
-              <a:t>levert in</a:t>
-            </a:r>
-          </a:p>
-        </p:txBody>
-      </p:sp>
-      <p:sp>
-        <p:nvSpPr>
-          <p:cNvPr id="32" name="Rectangle 31"/>
-          <p:cNvSpPr/>
-          <p:nvPr/>
-        </p:nvSpPr>
-        <p:spPr>
-          <a:xfrm>
-            <a:off x="2870200" y="3949700"/>
-            <a:ext cx="889000" cy="685800"/>
-          </a:xfrm>
-          <a:prstGeom prst="rect">
-            <a:avLst/>
-          </a:prstGeom>
-          <a:solidFill>
-            <a:srgbClr val="FFFFFF"/>
-          </a:solidFill>
-          <a:ln>
-            <a:noFill/>
-          </a:ln>
-          <a:effectLst/>
-        </p:spPr>
-        <p:style>
-          <a:lnRef idx="1">
-            <a:schemeClr val="accent1"/>
-          </a:lnRef>
-          <a:fillRef idx="3">
-            <a:schemeClr val="accent1"/>
-          </a:fillRef>
-          <a:effectRef idx="2">
-            <a:schemeClr val="accent1"/>
-          </a:effectRef>
-          <a:fontRef idx="minor">
-            <a:schemeClr val="lt1"/>
-          </a:fontRef>
-        </p:style>
-        <p:txBody>
-          <a:bodyPr rtlCol="0" anchor="ctr"/>
-          <a:lstStyle/>
-          <a:p>
-            <a:pPr algn="ctr"/>
-          </a:p>
-        </p:txBody>
-      </p:sp>
-      <p:sp>
-        <p:nvSpPr>
-          <p:cNvPr id="33" name="Rounded Rectangle 32"/>
-          <p:cNvSpPr/>
-          <p:nvPr/>
-        </p:nvSpPr>
-        <p:spPr>
-          <a:xfrm>
-            <a:off x="3009900" y="3987800"/>
-            <a:ext cx="609600" cy="609600"/>
-          </a:xfrm>
-          <a:prstGeom prst="roundRect">
-            <a:avLst>
-              <a:gd name="adj" fmla="val 24300"/>
-            </a:avLst>
-          </a:prstGeom>
-          <a:solidFill>
-            <a:srgbClr val="F3F7F8"/>
-          </a:solidFill>
-          <a:ln>
-            <a:noFill/>
-          </a:ln>
-          <a:effectLst/>
-        </p:spPr>
-        <p:style>
-          <a:lnRef idx="1">
-            <a:schemeClr val="accent1"/>
-          </a:lnRef>
-          <a:fillRef idx="3">
-            <a:schemeClr val="accent1"/>
-          </a:fillRef>
-          <a:effectRef idx="2">
-            <a:schemeClr val="accent1"/>
-          </a:effectRef>
-          <a:fontRef idx="minor">
-            <a:schemeClr val="lt1"/>
-          </a:fontRef>
-        </p:style>
-        <p:txBody>
-          <a:bodyPr rtlCol="0" anchor="ctr"/>
-          <a:lstStyle/>
-          <a:p>
-            <a:pPr algn="ctr"/>
-          </a:p>
-        </p:txBody>
-      </p:sp>
-      <p:pic>
-        <p:nvPicPr>
-          <p:cNvPr id="34" name="Picture 33" descr="icon-filepen-navy.png"/>
-          <p:cNvPicPr>
-            <a:picLocks noChangeAspect="1"/>
-          </p:cNvPicPr>
-          <p:nvPr/>
-        </p:nvPicPr>
-        <p:blipFill>
-          <a:blip r:embed="rId7"/>
-          <a:stretch>
-            <a:fillRect/>
-          </a:stretch>
-        </p:blipFill>
-        <p:spPr>
-          <a:xfrm>
-            <a:off x="3162300" y="4140200"/>
-            <a:ext cx="304800" cy="304800"/>
-          </a:xfrm>
-          <a:prstGeom prst="rect">
-            <a:avLst/>
-          </a:prstGeom>
-        </p:spPr>
-      </p:pic>
-      <p:sp>
-        <p:nvSpPr>
-          <p:cNvPr id="35" name="TextBox 34"/>
-          <p:cNvSpPr txBox="1"/>
-          <p:nvPr/>
-        </p:nvSpPr>
-        <p:spPr>
-          <a:xfrm>
-            <a:off x="2387600" y="4686300"/>
-            <a:ext cx="1854200" cy="254000"/>
-          </a:xfrm>
-          <a:prstGeom prst="rect">
-            <a:avLst/>
-          </a:prstGeom>
-          <a:noFill/>
-        </p:spPr>
-        <p:txBody>
-          <a:bodyPr wrap="square" lIns="0" rIns="0" tIns="0" bIns="0">
-            <a:spAutoFit/>
-          </a:bodyPr>
-          <a:lstStyle/>
-          <a:p>
-            <a:pPr algn="ctr">
-              <a:lnSpc>
-                <a:spcPct val="100000"/>
-              </a:lnSpc>
-            </a:pPr>
-            <a:r>
-              <a:rPr sz="1700" b="1">
-                <a:solidFill>
-                  <a:srgbClr val="002333"/>
-                </a:solidFill>
-                <a:latin typeface="League Spartan"/>
-              </a:rPr>
-              <a:t>Docent</a:t>
-            </a:r>
-          </a:p>
-        </p:txBody>
-      </p:sp>
-      <p:sp>
-        <p:nvSpPr>
-          <p:cNvPr id="36" name="TextBox 35"/>
-          <p:cNvSpPr txBox="1"/>
-          <p:nvPr/>
-        </p:nvSpPr>
-        <p:spPr>
-          <a:xfrm>
-            <a:off x="2235200" y="4953000"/>
-            <a:ext cx="2159000" cy="571500"/>
-          </a:xfrm>
-          <a:prstGeom prst="rect">
-            <a:avLst/>
-          </a:prstGeom>
-          <a:noFill/>
-        </p:spPr>
-        <p:txBody>
-          <a:bodyPr wrap="square" lIns="0" rIns="0" tIns="0" bIns="0">
-            <a:spAutoFit/>
-          </a:bodyPr>
-          <a:lstStyle/>
-          <a:p>
-            <a:pPr algn="ctr">
-              <a:lnSpc>
-                <a:spcPct val="120000"/>
-              </a:lnSpc>
-            </a:pPr>
-            <a:r>
-              <a:rPr sz="1600" b="0">
-                <a:solidFill>
-                  <a:srgbClr val="5B7480"/>
-                </a:solidFill>
-                <a:latin typeface="Inter"/>
-              </a:rPr>
-              <a:t>wisselend format</a:t>
-            </a:r>
-          </a:p>
-        </p:txBody>
-      </p:sp>
-      <p:sp>
-        <p:nvSpPr>
-          <p:cNvPr id="37" name="Rectangle 36"/>
-          <p:cNvSpPr/>
-          <p:nvPr/>
-        </p:nvSpPr>
-        <p:spPr>
-          <a:xfrm>
-            <a:off x="4724400" y="3949700"/>
-            <a:ext cx="889000" cy="685800"/>
-          </a:xfrm>
-          <a:prstGeom prst="rect">
-            <a:avLst/>
-          </a:prstGeom>
-          <a:solidFill>
-            <a:srgbClr val="FFFFFF"/>
-          </a:solidFill>
-          <a:ln>
-            <a:noFill/>
-          </a:ln>
-          <a:effectLst/>
-        </p:spPr>
-        <p:style>
-          <a:lnRef idx="1">
-            <a:schemeClr val="accent1"/>
-          </a:lnRef>
-          <a:fillRef idx="3">
-            <a:schemeClr val="accent1"/>
-          </a:fillRef>
-          <a:effectRef idx="2">
-            <a:schemeClr val="accent1"/>
-          </a:effectRef>
-          <a:fontRef idx="minor">
-            <a:schemeClr val="lt1"/>
-          </a:fontRef>
-        </p:style>
-        <p:txBody>
-          <a:bodyPr rtlCol="0" anchor="ctr"/>
-          <a:lstStyle/>
-          <a:p>
-            <a:pPr algn="ctr"/>
-          </a:p>
-        </p:txBody>
-      </p:sp>
-      <p:sp>
-        <p:nvSpPr>
-          <p:cNvPr id="38" name="Rounded Rectangle 37"/>
-          <p:cNvSpPr/>
-          <p:nvPr/>
-        </p:nvSpPr>
-        <p:spPr>
-          <a:xfrm>
-            <a:off x="4864100" y="3987800"/>
-            <a:ext cx="609600" cy="609600"/>
-          </a:xfrm>
-          <a:prstGeom prst="roundRect">
-            <a:avLst>
-              <a:gd name="adj" fmla="val 24300"/>
-            </a:avLst>
-          </a:prstGeom>
-          <a:solidFill>
-            <a:srgbClr val="F3F7F8"/>
-          </a:solidFill>
-          <a:ln>
-            <a:noFill/>
-          </a:ln>
-          <a:effectLst/>
-        </p:spPr>
-        <p:style>
-          <a:lnRef idx="1">
-            <a:schemeClr val="accent1"/>
-          </a:lnRef>
-          <a:fillRef idx="3">
-            <a:schemeClr val="accent1"/>
-          </a:fillRef>
-          <a:effectRef idx="2">
-            <a:schemeClr val="accent1"/>
-          </a:effectRef>
-          <a:fontRef idx="minor">
-            <a:schemeClr val="lt1"/>
-          </a:fontRef>
-        </p:style>
-        <p:txBody>
-          <a:bodyPr rtlCol="0" anchor="ctr"/>
-          <a:lstStyle/>
-          <a:p>
-            <a:pPr algn="ctr"/>
-          </a:p>
-        </p:txBody>
-      </p:sp>
-      <p:pic>
-        <p:nvPicPr>
-          <p:cNvPr id="39" name="Picture 38" descr="icon-aftekenen-navy.png"/>
-          <p:cNvPicPr>
-            <a:picLocks noChangeAspect="1"/>
-          </p:cNvPicPr>
-          <p:nvPr/>
-        </p:nvPicPr>
-        <p:blipFill>
-          <a:blip r:embed="rId8"/>
-          <a:stretch>
-            <a:fillRect/>
-          </a:stretch>
-        </p:blipFill>
-        <p:spPr>
-          <a:xfrm>
-            <a:off x="5016500" y="4140200"/>
-            <a:ext cx="304800" cy="304800"/>
-          </a:xfrm>
-          <a:prstGeom prst="rect">
-            <a:avLst/>
-          </a:prstGeom>
-        </p:spPr>
-      </p:pic>
-      <p:sp>
-        <p:nvSpPr>
-          <p:cNvPr id="40" name="TextBox 39"/>
-          <p:cNvSpPr txBox="1"/>
-          <p:nvPr/>
-        </p:nvSpPr>
-        <p:spPr>
-          <a:xfrm>
-            <a:off x="4241800" y="4686300"/>
-            <a:ext cx="1854200" cy="254000"/>
-          </a:xfrm>
-          <a:prstGeom prst="rect">
-            <a:avLst/>
-          </a:prstGeom>
-          <a:noFill/>
-        </p:spPr>
-        <p:txBody>
-          <a:bodyPr wrap="square" lIns="0" rIns="0" tIns="0" bIns="0">
-            <a:spAutoFit/>
-          </a:bodyPr>
-          <a:lstStyle/>
-          <a:p>
-            <a:pPr algn="ctr">
-              <a:lnSpc>
-                <a:spcPct val="100000"/>
-              </a:lnSpc>
-            </a:pPr>
-            <a:r>
-              <a:rPr sz="1700" b="1">
-                <a:solidFill>
-                  <a:srgbClr val="002333"/>
-                </a:solidFill>
-                <a:latin typeface="League Spartan"/>
-              </a:rPr>
-              <a:t>Cijfer</a:t>
-            </a:r>
-          </a:p>
-        </p:txBody>
-      </p:sp>
-      <p:sp>
-        <p:nvSpPr>
-          <p:cNvPr id="41" name="TextBox 40"/>
-          <p:cNvSpPr txBox="1"/>
-          <p:nvPr/>
-        </p:nvSpPr>
-        <p:spPr>
-          <a:xfrm>
-            <a:off x="4089400" y="4953000"/>
-            <a:ext cx="2159000" cy="571500"/>
-          </a:xfrm>
-          <a:prstGeom prst="rect">
-            <a:avLst/>
-          </a:prstGeom>
-          <a:noFill/>
-        </p:spPr>
-        <p:txBody>
-          <a:bodyPr wrap="square" lIns="0" rIns="0" tIns="0" bIns="0">
-            <a:spAutoFit/>
-          </a:bodyPr>
-          <a:lstStyle/>
-          <a:p>
-            <a:pPr algn="ctr">
-              <a:lnSpc>
-                <a:spcPct val="120000"/>
-              </a:lnSpc>
-            </a:pPr>
-            <a:r>
-              <a:rPr sz="1600" b="0">
-                <a:solidFill>
-                  <a:srgbClr val="5B7480"/>
-                </a:solidFill>
-                <a:latin typeface="Inter"/>
-              </a:rPr>
-              <a:t>vastgesteld</a:t>
-            </a:r>
-          </a:p>
-        </p:txBody>
-      </p:sp>
-      <p:sp>
-        <p:nvSpPr>
-          <p:cNvPr id="42" name="Rectangle 41"/>
-          <p:cNvSpPr/>
-          <p:nvPr/>
-        </p:nvSpPr>
-        <p:spPr>
-          <a:xfrm>
-            <a:off x="6578600" y="3949700"/>
-            <a:ext cx="889000" cy="685800"/>
-          </a:xfrm>
-          <a:prstGeom prst="rect">
-            <a:avLst/>
-          </a:prstGeom>
-          <a:solidFill>
-            <a:srgbClr val="FFFFFF"/>
-          </a:solidFill>
-          <a:ln>
-            <a:noFill/>
-          </a:ln>
-          <a:effectLst/>
-        </p:spPr>
-        <p:style>
-          <a:lnRef idx="1">
-            <a:schemeClr val="accent1"/>
-          </a:lnRef>
-          <a:fillRef idx="3">
-            <a:schemeClr val="accent1"/>
-          </a:fillRef>
-          <a:effectRef idx="2">
-            <a:schemeClr val="accent1"/>
-          </a:effectRef>
-          <a:fontRef idx="minor">
-            <a:schemeClr val="lt1"/>
-          </a:fontRef>
-        </p:style>
-        <p:txBody>
-          <a:bodyPr rtlCol="0" anchor="ctr"/>
-          <a:lstStyle/>
-          <a:p>
-            <a:pPr algn="ctr"/>
-          </a:p>
-        </p:txBody>
-      </p:sp>
-      <p:sp>
-        <p:nvSpPr>
-          <p:cNvPr id="43" name="Rounded Rectangle 42"/>
-          <p:cNvSpPr/>
-          <p:nvPr/>
-        </p:nvSpPr>
-        <p:spPr>
-          <a:xfrm>
-            <a:off x="6718300" y="3987800"/>
-            <a:ext cx="609600" cy="609600"/>
-          </a:xfrm>
-          <a:prstGeom prst="roundRect">
-            <a:avLst>
-              <a:gd name="adj" fmla="val 24300"/>
-            </a:avLst>
-          </a:prstGeom>
-          <a:solidFill>
-            <a:srgbClr val="F3F7F8"/>
-          </a:solidFill>
-          <a:ln>
-            <a:noFill/>
-          </a:ln>
-          <a:effectLst/>
-        </p:spPr>
-        <p:style>
-          <a:lnRef idx="1">
-            <a:schemeClr val="accent1"/>
-          </a:lnRef>
-          <a:fillRef idx="3">
-            <a:schemeClr val="accent1"/>
-          </a:fillRef>
-          <a:effectRef idx="2">
-            <a:schemeClr val="accent1"/>
-          </a:effectRef>
-          <a:fontRef idx="minor">
-            <a:schemeClr val="lt1"/>
-          </a:fontRef>
-        </p:style>
-        <p:txBody>
-          <a:bodyPr rtlCol="0" anchor="ctr"/>
-          <a:lstStyle/>
-          <a:p>
-            <a:pPr algn="ctr"/>
-          </a:p>
-        </p:txBody>
-      </p:sp>
-      <p:pic>
-        <p:nvPicPr>
-          <p:cNvPr id="44" name="Picture 43" descr="icon-check-navy.png"/>
-          <p:cNvPicPr>
-            <a:picLocks noChangeAspect="1"/>
-          </p:cNvPicPr>
-          <p:nvPr/>
-        </p:nvPicPr>
-        <p:blipFill>
-          <a:blip r:embed="rId9"/>
-          <a:stretch>
-            <a:fillRect/>
-          </a:stretch>
-        </p:blipFill>
-        <p:spPr>
-          <a:xfrm>
-            <a:off x="6870700" y="4140200"/>
-            <a:ext cx="304800" cy="304800"/>
-          </a:xfrm>
-          <a:prstGeom prst="rect">
-            <a:avLst/>
-          </a:prstGeom>
-        </p:spPr>
-      </p:pic>
-      <p:sp>
-        <p:nvSpPr>
-          <p:cNvPr id="45" name="TextBox 44"/>
-          <p:cNvSpPr txBox="1"/>
-          <p:nvPr/>
-        </p:nvSpPr>
-        <p:spPr>
-          <a:xfrm>
-            <a:off x="6096000" y="4686300"/>
-            <a:ext cx="1854200" cy="254000"/>
-          </a:xfrm>
-          <a:prstGeom prst="rect">
-            <a:avLst/>
-          </a:prstGeom>
-          <a:noFill/>
-        </p:spPr>
-        <p:txBody>
-          <a:bodyPr wrap="square" lIns="0" rIns="0" tIns="0" bIns="0">
-            <a:spAutoFit/>
-          </a:bodyPr>
-          <a:lstStyle/>
-          <a:p>
-            <a:pPr algn="ctr">
-              <a:lnSpc>
-                <a:spcPct val="100000"/>
-              </a:lnSpc>
-            </a:pPr>
-            <a:r>
-              <a:rPr sz="1700" b="1">
-                <a:solidFill>
-                  <a:srgbClr val="002333"/>
-                </a:solidFill>
-                <a:latin typeface="League Spartan"/>
-              </a:rPr>
-              <a:t>Cursusbureau</a:t>
-            </a:r>
-          </a:p>
-        </p:txBody>
-      </p:sp>
-      <p:sp>
-        <p:nvSpPr>
-          <p:cNvPr id="46" name="TextBox 45"/>
-          <p:cNvSpPr txBox="1"/>
-          <p:nvPr/>
-        </p:nvSpPr>
-        <p:spPr>
-          <a:xfrm>
-            <a:off x="5943600" y="4953000"/>
-            <a:ext cx="2159000" cy="571500"/>
-          </a:xfrm>
-          <a:prstGeom prst="rect">
-            <a:avLst/>
-          </a:prstGeom>
-          <a:noFill/>
-        </p:spPr>
-        <p:txBody>
-          <a:bodyPr wrap="square" lIns="0" rIns="0" tIns="0" bIns="0">
-            <a:spAutoFit/>
-          </a:bodyPr>
-          <a:lstStyle/>
-          <a:p>
-            <a:pPr algn="ctr">
-              <a:lnSpc>
-                <a:spcPct val="120000"/>
-              </a:lnSpc>
-            </a:pPr>
-            <a:r>
-              <a:rPr sz="1600" b="0">
-                <a:solidFill>
-                  <a:srgbClr val="5B7480"/>
-                </a:solidFill>
-                <a:latin typeface="Inter"/>
-              </a:rPr>
-              <a:t>checkt taal</a:t>
-            </a:r>
-          </a:p>
-        </p:txBody>
-      </p:sp>
-      <p:sp>
-        <p:nvSpPr>
-          <p:cNvPr id="47" name="Rectangle 46"/>
-          <p:cNvSpPr/>
-          <p:nvPr/>
-        </p:nvSpPr>
-        <p:spPr>
-          <a:xfrm>
-            <a:off x="8432800" y="3949700"/>
-            <a:ext cx="889000" cy="685800"/>
-          </a:xfrm>
-          <a:prstGeom prst="rect">
-            <a:avLst/>
-          </a:prstGeom>
-          <a:solidFill>
-            <a:srgbClr val="FFFFFF"/>
-          </a:solidFill>
-          <a:ln>
-            <a:noFill/>
-          </a:ln>
-          <a:effectLst/>
-        </p:spPr>
-        <p:style>
-          <a:lnRef idx="1">
-            <a:schemeClr val="accent1"/>
-          </a:lnRef>
-          <a:fillRef idx="3">
-            <a:schemeClr val="accent1"/>
-          </a:fillRef>
-          <a:effectRef idx="2">
-            <a:schemeClr val="accent1"/>
-          </a:effectRef>
-          <a:fontRef idx="minor">
-            <a:schemeClr val="lt1"/>
-          </a:fontRef>
-        </p:style>
-        <p:txBody>
-          <a:bodyPr rtlCol="0" anchor="ctr"/>
-          <a:lstStyle/>
-          <a:p>
-            <a:pPr algn="ctr"/>
-          </a:p>
-        </p:txBody>
-      </p:sp>
-      <p:sp>
-        <p:nvSpPr>
-          <p:cNvPr id="48" name="Rounded Rectangle 47"/>
-          <p:cNvSpPr/>
-          <p:nvPr/>
-        </p:nvSpPr>
-        <p:spPr>
-          <a:xfrm>
-            <a:off x="8572500" y="3987800"/>
-            <a:ext cx="609600" cy="609600"/>
-          </a:xfrm>
-          <a:prstGeom prst="roundRect">
-            <a:avLst>
-              <a:gd name="adj" fmla="val 24300"/>
-            </a:avLst>
-          </a:prstGeom>
-          <a:solidFill>
-            <a:srgbClr val="F3F7F8"/>
-          </a:solidFill>
-          <a:ln>
-            <a:noFill/>
-          </a:ln>
-          <a:effectLst/>
-        </p:spPr>
-        <p:style>
-          <a:lnRef idx="1">
-            <a:schemeClr val="accent1"/>
-          </a:lnRef>
-          <a:fillRef idx="3">
-            <a:schemeClr val="accent1"/>
-          </a:fillRef>
-          <a:effectRef idx="2">
-            <a:schemeClr val="accent1"/>
-          </a:effectRef>
-          <a:fontRef idx="minor">
-            <a:schemeClr val="lt1"/>
-          </a:fontRef>
-        </p:style>
-        <p:txBody>
-          <a:bodyPr rtlCol="0" anchor="ctr"/>
-          <a:lstStyle/>
-          <a:p>
-            <a:pPr algn="ctr"/>
-          </a:p>
-        </p:txBody>
-      </p:sp>
-      <p:pic>
-        <p:nvPicPr>
-          <p:cNvPr id="49" name="Picture 48" descr="icon-mail-navy.png"/>
-          <p:cNvPicPr>
-            <a:picLocks noChangeAspect="1"/>
-          </p:cNvPicPr>
-          <p:nvPr/>
-        </p:nvPicPr>
-        <p:blipFill>
-          <a:blip r:embed="rId10"/>
-          <a:stretch>
-            <a:fillRect/>
-          </a:stretch>
-        </p:blipFill>
-        <p:spPr>
-          <a:xfrm>
-            <a:off x="8724900" y="4140200"/>
-            <a:ext cx="304800" cy="304800"/>
-          </a:xfrm>
-          <a:prstGeom prst="rect">
-            <a:avLst/>
-          </a:prstGeom>
-        </p:spPr>
-      </p:pic>
-      <p:sp>
-        <p:nvSpPr>
-          <p:cNvPr id="50" name="TextBox 49"/>
-          <p:cNvSpPr txBox="1"/>
-          <p:nvPr/>
-        </p:nvSpPr>
-        <p:spPr>
-          <a:xfrm>
-            <a:off x="7950200" y="4686300"/>
-            <a:ext cx="1854200" cy="254000"/>
-          </a:xfrm>
-          <a:prstGeom prst="rect">
-            <a:avLst/>
-          </a:prstGeom>
-          <a:noFill/>
-        </p:spPr>
-        <p:txBody>
-          <a:bodyPr wrap="square" lIns="0" rIns="0" tIns="0" bIns="0">
-            <a:spAutoFit/>
-          </a:bodyPr>
-          <a:lstStyle/>
-          <a:p>
-            <a:pPr algn="ctr">
-              <a:lnSpc>
-                <a:spcPct val="100000"/>
-              </a:lnSpc>
-            </a:pPr>
-            <a:r>
-              <a:rPr sz="1700" b="1">
-                <a:solidFill>
-                  <a:srgbClr val="002333"/>
-                </a:solidFill>
-                <a:latin typeface="League Spartan"/>
-              </a:rPr>
-              <a:t>Secretariaat</a:t>
-            </a:r>
-          </a:p>
-        </p:txBody>
-      </p:sp>
-      <p:sp>
-        <p:nvSpPr>
-          <p:cNvPr id="51" name="TextBox 50"/>
-          <p:cNvSpPr txBox="1"/>
-          <p:nvPr/>
-        </p:nvSpPr>
-        <p:spPr>
-          <a:xfrm>
-            <a:off x="7797800" y="4953000"/>
-            <a:ext cx="2159000" cy="571500"/>
-          </a:xfrm>
-          <a:prstGeom prst="rect">
-            <a:avLst/>
-          </a:prstGeom>
-          <a:noFill/>
-        </p:spPr>
-        <p:txBody>
-          <a:bodyPr wrap="square" lIns="0" rIns="0" tIns="0" bIns="0">
-            <a:spAutoFit/>
-          </a:bodyPr>
-          <a:lstStyle/>
-          <a:p>
-            <a:pPr algn="ctr">
-              <a:lnSpc>
-                <a:spcPct val="120000"/>
-              </a:lnSpc>
-            </a:pPr>
-            <a:r>
-              <a:rPr sz="1600" b="0">
-                <a:solidFill>
-                  <a:srgbClr val="5B7480"/>
-                </a:solidFill>
-                <a:latin typeface="Inter"/>
-              </a:rPr>
-              <a:t>zet het open</a:t>
-            </a:r>
-          </a:p>
-        </p:txBody>
-      </p:sp>
-      <p:sp>
-        <p:nvSpPr>
-          <p:cNvPr id="52" name="Rectangle 51"/>
-          <p:cNvSpPr/>
-          <p:nvPr/>
-        </p:nvSpPr>
-        <p:spPr>
-          <a:xfrm>
-            <a:off x="10287000" y="3949700"/>
-            <a:ext cx="889000" cy="685800"/>
-          </a:xfrm>
-          <a:prstGeom prst="rect">
-            <a:avLst/>
-          </a:prstGeom>
-          <a:solidFill>
-            <a:srgbClr val="FFFFFF"/>
-          </a:solidFill>
-          <a:ln>
-            <a:noFill/>
-          </a:ln>
-          <a:effectLst/>
-        </p:spPr>
-        <p:style>
-          <a:lnRef idx="1">
-            <a:schemeClr val="accent1"/>
-          </a:lnRef>
-          <a:fillRef idx="3">
-            <a:schemeClr val="accent1"/>
-          </a:fillRef>
-          <a:effectRef idx="2">
-            <a:schemeClr val="accent1"/>
-          </a:effectRef>
-          <a:fontRef idx="minor">
-            <a:schemeClr val="lt1"/>
-          </a:fontRef>
-        </p:style>
-        <p:txBody>
-          <a:bodyPr rtlCol="0" anchor="ctr"/>
-          <a:lstStyle/>
-          <a:p>
-            <a:pPr algn="ctr"/>
-          </a:p>
-        </p:txBody>
-      </p:sp>
-      <p:sp>
-        <p:nvSpPr>
-          <p:cNvPr id="53" name="Rounded Rectangle 52"/>
-          <p:cNvSpPr/>
-          <p:nvPr/>
-        </p:nvSpPr>
-        <p:spPr>
-          <a:xfrm>
-            <a:off x="10426700" y="3987800"/>
-            <a:ext cx="609600" cy="609600"/>
-          </a:xfrm>
-          <a:prstGeom prst="roundRect">
-            <a:avLst>
-              <a:gd name="adj" fmla="val 24300"/>
-            </a:avLst>
-          </a:prstGeom>
-          <a:solidFill>
-            <a:srgbClr val="F3F7F8"/>
-          </a:solidFill>
-          <a:ln>
-            <a:noFill/>
-          </a:ln>
-          <a:effectLst/>
-        </p:spPr>
-        <p:style>
-          <a:lnRef idx="1">
-            <a:schemeClr val="accent1"/>
-          </a:lnRef>
-          <a:fillRef idx="3">
-            <a:schemeClr val="accent1"/>
-          </a:fillRef>
-          <a:effectRef idx="2">
-            <a:schemeClr val="accent1"/>
-          </a:effectRef>
-          <a:fontRef idx="minor">
-            <a:schemeClr val="lt1"/>
-          </a:fontRef>
-        </p:style>
-        <p:txBody>
-          <a:bodyPr rtlCol="0" anchor="ctr"/>
-          <a:lstStyle/>
-          <a:p>
-            <a:pPr algn="ctr"/>
-          </a:p>
-        </p:txBody>
-      </p:sp>
-      <p:pic>
-        <p:nvPicPr>
-          <p:cNvPr id="54" name="Picture 53" descr="icon-studenten-navy.png"/>
-          <p:cNvPicPr>
-            <a:picLocks noChangeAspect="1"/>
-          </p:cNvPicPr>
-          <p:nvPr/>
-        </p:nvPicPr>
-        <p:blipFill>
-          <a:blip r:embed="rId11"/>
-          <a:stretch>
-            <a:fillRect/>
-          </a:stretch>
-        </p:blipFill>
-        <p:spPr>
-          <a:xfrm>
-            <a:off x="10579100" y="4140200"/>
-            <a:ext cx="304800" cy="304800"/>
-          </a:xfrm>
-          <a:prstGeom prst="rect">
-            <a:avLst/>
-          </a:prstGeom>
-        </p:spPr>
-      </p:pic>
-      <p:sp>
-        <p:nvSpPr>
-          <p:cNvPr id="55" name="TextBox 54"/>
-          <p:cNvSpPr txBox="1"/>
-          <p:nvPr/>
-        </p:nvSpPr>
-        <p:spPr>
-          <a:xfrm>
-            <a:off x="9804400" y="4686300"/>
-            <a:ext cx="1854200" cy="254000"/>
-          </a:xfrm>
-          <a:prstGeom prst="rect">
-            <a:avLst/>
-          </a:prstGeom>
-          <a:noFill/>
-        </p:spPr>
-        <p:txBody>
-          <a:bodyPr wrap="square" lIns="0" rIns="0" tIns="0" bIns="0">
-            <a:spAutoFit/>
-          </a:bodyPr>
-          <a:lstStyle/>
-          <a:p>
-            <a:pPr algn="ctr">
-              <a:lnSpc>
-                <a:spcPct val="100000"/>
-              </a:lnSpc>
-            </a:pPr>
-            <a:r>
-              <a:rPr sz="1700" b="1">
-                <a:solidFill>
-                  <a:srgbClr val="002333"/>
-                </a:solidFill>
-                <a:latin typeface="League Spartan"/>
-              </a:rPr>
-              <a:t>Student</a:t>
-            </a:r>
-          </a:p>
-        </p:txBody>
-      </p:sp>
-      <p:sp>
-        <p:nvSpPr>
-          <p:cNvPr id="56" name="TextBox 55"/>
-          <p:cNvSpPr txBox="1"/>
-          <p:nvPr/>
-        </p:nvSpPr>
-        <p:spPr>
-          <a:xfrm>
-            <a:off x="9652000" y="4953000"/>
-            <a:ext cx="2159000" cy="571500"/>
-          </a:xfrm>
-          <a:prstGeom prst="rect">
-            <a:avLst/>
-          </a:prstGeom>
-          <a:noFill/>
-        </p:spPr>
-        <p:txBody>
-          <a:bodyPr wrap="square" lIns="0" rIns="0" tIns="0" bIns="0">
-            <a:spAutoFit/>
-          </a:bodyPr>
-          <a:lstStyle/>
-          <a:p>
-            <a:pPr algn="ctr">
-              <a:lnSpc>
-                <a:spcPct val="120000"/>
-              </a:lnSpc>
-            </a:pPr>
-            <a:r>
-              <a:rPr sz="1600" b="0">
-                <a:solidFill>
-                  <a:srgbClr val="5B7480"/>
-                </a:solidFill>
-                <a:latin typeface="Inter"/>
-              </a:rPr>
-              <a:t>ziet resultaat</a:t>
-            </a:r>
-          </a:p>
-        </p:txBody>
-      </p:sp>
-      <p:sp>
-        <p:nvSpPr>
-          <p:cNvPr id="57" name="Rectangle 56"/>
-          <p:cNvSpPr/>
-          <p:nvPr/>
-        </p:nvSpPr>
-        <p:spPr>
-          <a:xfrm>
-            <a:off x="762000" y="5511800"/>
-            <a:ext cx="10668000" cy="6350"/>
-          </a:xfrm>
-          <a:prstGeom prst="rect">
-            <a:avLst/>
-          </a:prstGeom>
-          <a:solidFill>
-            <a:srgbClr val="E7EEF0"/>
-          </a:solidFill>
-          <a:ln>
-            <a:noFill/>
-          </a:ln>
-          <a:effectLst/>
-        </p:spPr>
-        <p:style>
-          <a:lnRef idx="1">
-            <a:schemeClr val="accent1"/>
-          </a:lnRef>
-          <a:fillRef idx="3">
-            <a:schemeClr val="accent1"/>
-          </a:fillRef>
-          <a:effectRef idx="2">
-            <a:schemeClr val="accent1"/>
-          </a:effectRef>
-          <a:fontRef idx="minor">
-            <a:schemeClr val="lt1"/>
-          </a:fontRef>
-        </p:style>
-        <p:txBody>
-          <a:bodyPr rtlCol="0" anchor="ctr"/>
-          <a:lstStyle/>
-          <a:p>
-            <a:pPr algn="ctr"/>
-          </a:p>
-        </p:txBody>
-      </p:sp>
-      <p:pic>
-        <p:nvPicPr>
-          <p:cNvPr id="58" name="Picture 57" descr="logo_navy.png"/>
+          <p:cNvPr id="60" name="Picture 59" descr="logo_navy.png"/>
           <p:cNvPicPr>
             <a:picLocks noChangeAspect="1"/>
           </p:cNvPicPr>
@@ -7253,7 +7439,7 @@
         </p:blipFill>
         <p:spPr>
           <a:xfrm>
-            <a:off x="9010650" y="5759450"/>
+            <a:off x="8947150" y="5759450"/>
             <a:ext cx="1079500" cy="292100"/>
           </a:xfrm>
           <a:prstGeom prst="rect">
@@ -7263,13 +7449,13 @@
       </p:pic>
       <p:sp>
         <p:nvSpPr>
-          <p:cNvPr id="59" name="Rectangle 58"/>
+          <p:cNvPr id="61" name="Rectangle 60"/>
           <p:cNvSpPr/>
           <p:nvPr/>
         </p:nvSpPr>
         <p:spPr>
           <a:xfrm>
-            <a:off x="10344150" y="5740400"/>
+            <a:off x="10280650" y="5740400"/>
             <a:ext cx="6350" cy="330200"/>
           </a:xfrm>
           <a:prstGeom prst="rect">
@@ -7307,7 +7493,7 @@
       </p:sp>
       <p:pic>
         <p:nvPicPr>
-          <p:cNvPr id="60" name="Picture 59" descr="klant.png"/>
+          <p:cNvPr id="62" name="Picture 61" descr="klant.png"/>
           <p:cNvPicPr>
             <a:picLocks noChangeAspect="1"/>
           </p:cNvPicPr>
@@ -7321,7 +7507,7 @@
         </p:blipFill>
         <p:spPr>
           <a:xfrm>
-            <a:off x="10604500" y="5702300"/>
+            <a:off x="10541000" y="5702300"/>
             <a:ext cx="406400" cy="406400"/>
           </a:xfrm>
           <a:prstGeom prst="rect">
@@ -7331,7 +7517,7 @@
       </p:pic>
       <p:sp>
         <p:nvSpPr>
-          <p:cNvPr id="61" name="TextBox 60"/>
+          <p:cNvPr id="63" name="TextBox 62"/>
           <p:cNvSpPr txBox="1"/>
           <p:nvPr/>
         </p:nvSpPr>
@@ -7359,7 +7545,7 @@
             <a:r>
               <a:rPr sz="1150" b="0">
                 <a:solidFill>
-                  <a:srgbClr val="9AAFB8"/>
+                  <a:srgbClr val="FFFFFF"/>
                 </a:solidFill>
                 <a:latin typeface="Inter"/>
               </a:rPr>
@@ -7427,19 +7613,56 @@
       </p:sp>
       <p:sp>
         <p:nvSpPr>
-          <p:cNvPr id="3" name="Rounded Rectangle 2"/>
+          <p:cNvPr id="3" name="TextBox 2"/>
+          <p:cNvSpPr txBox="1"/>
+          <p:nvPr/>
+        </p:nvSpPr>
+        <p:spPr>
+          <a:xfrm>
+            <a:off x="762000" y="1714500"/>
+            <a:ext cx="4445000" cy="330200"/>
+          </a:xfrm>
+          <a:prstGeom prst="rect">
+            <a:avLst/>
+          </a:prstGeom>
+          <a:noFill/>
+        </p:spPr>
+        <p:txBody>
+          <a:bodyPr wrap="square" lIns="0" rIns="0" tIns="0" bIns="0">
+            <a:spAutoFit/>
+          </a:bodyPr>
+          <a:lstStyle/>
+          <a:p>
+            <a:pPr algn="l">
+              <a:lnSpc>
+                <a:spcPct val="100000"/>
+              </a:lnSpc>
+            </a:pPr>
+            <a:r>
+              <a:rPr sz="2600" b="1">
+                <a:solidFill>
+                  <a:srgbClr val="002333"/>
+                </a:solidFill>
+                <a:latin typeface="League Spartan"/>
+              </a:rPr>
+              <a:t>Geld</a:t>
+            </a:r>
+          </a:p>
+        </p:txBody>
+      </p:sp>
+      <p:sp>
+        <p:nvSpPr>
+          <p:cNvPr id="4" name="Rectangle 3"/>
           <p:cNvSpPr/>
           <p:nvPr/>
         </p:nvSpPr>
         <p:spPr>
           <a:xfrm>
-            <a:off x="762000" y="1587500"/>
-            <a:ext cx="4572000" cy="3619500"/>
-          </a:xfrm>
-          <a:prstGeom prst="roundRect">
-            <a:avLst>
-              <a:gd name="adj" fmla="val 5614"/>
-            </a:avLst>
+            <a:off x="762000" y="2184400"/>
+            <a:ext cx="4318000" cy="25400"/>
+          </a:xfrm>
+          <a:prstGeom prst="rect">
+            <a:avLst/>
           </a:prstGeom>
           <a:solidFill>
             <a:srgbClr val="002333"/>
@@ -7471,48 +7694,9 @@
           </a:p>
         </p:txBody>
       </p:sp>
-      <p:sp>
-        <p:nvSpPr>
-          <p:cNvPr id="4" name="TextBox 3"/>
-          <p:cNvSpPr txBox="1"/>
-          <p:nvPr/>
-        </p:nvSpPr>
-        <p:spPr>
-          <a:xfrm>
-            <a:off x="1117600" y="1892300"/>
-            <a:ext cx="3860800" cy="304800"/>
-          </a:xfrm>
-          <a:prstGeom prst="rect">
-            <a:avLst/>
-          </a:prstGeom>
-          <a:noFill/>
-        </p:spPr>
-        <p:txBody>
-          <a:bodyPr wrap="square" lIns="0" rIns="0" tIns="0" bIns="0">
-            <a:spAutoFit/>
-          </a:bodyPr>
-          <a:lstStyle/>
-          <a:p>
-            <a:pPr algn="l">
-              <a:lnSpc>
-                <a:spcPct val="100000"/>
-              </a:lnSpc>
-            </a:pPr>
-            <a:r>
-              <a:rPr sz="2200" b="1">
-                <a:solidFill>
-                  <a:srgbClr val="00E075"/>
-                </a:solidFill>
-                <a:latin typeface="League Spartan"/>
-              </a:rPr>
-              <a:t>Geld</a:t>
-            </a:r>
-          </a:p>
-        </p:txBody>
-      </p:sp>
       <p:pic>
         <p:nvPicPr>
-          <p:cNvPr id="5" name="Picture 4" descr="icon-klok-mint.png"/>
+          <p:cNvPr id="5" name="Picture 4" descr="icon-klok-navy.png"/>
           <p:cNvPicPr>
             <a:picLocks noChangeAspect="1"/>
           </p:cNvPicPr>
@@ -7526,7 +7710,7 @@
         </p:blipFill>
         <p:spPr>
           <a:xfrm>
-            <a:off x="1117600" y="2540000"/>
+            <a:off x="762000" y="2540000"/>
             <a:ext cx="355600" cy="355600"/>
           </a:xfrm>
           <a:prstGeom prst="rect">
@@ -7542,8 +7726,8 @@
         </p:nvSpPr>
         <p:spPr>
           <a:xfrm>
-            <a:off x="1651000" y="2597150"/>
-            <a:ext cx="3429000" cy="279400"/>
+            <a:off x="1295400" y="2597150"/>
+            <a:ext cx="3937000" cy="279400"/>
           </a:xfrm>
           <a:prstGeom prst="rect">
             <a:avLst/>
@@ -7564,7 +7748,7 @@
             <a:r>
               <a:rPr sz="1800" b="0">
                 <a:solidFill>
-                  <a:srgbClr val="FFFFFF"/>
+                  <a:srgbClr val="002333"/>
                 </a:solidFill>
                 <a:latin typeface="Inter"/>
               </a:rPr>
@@ -7575,7 +7759,7 @@
       </p:sp>
       <p:pic>
         <p:nvPicPr>
-          <p:cNvPr id="7" name="Picture 6" descr="icon-pen-mint.png"/>
+          <p:cNvPr id="7" name="Picture 6" descr="icon-pen-navy.png"/>
           <p:cNvPicPr>
             <a:picLocks noChangeAspect="1"/>
           </p:cNvPicPr>
@@ -7589,7 +7773,7 @@
         </p:blipFill>
         <p:spPr>
           <a:xfrm>
-            <a:off x="1117600" y="3175000"/>
+            <a:off x="762000" y="3175000"/>
             <a:ext cx="355600" cy="355600"/>
           </a:xfrm>
           <a:prstGeom prst="rect">
@@ -7605,8 +7789,8 @@
         </p:nvSpPr>
         <p:spPr>
           <a:xfrm>
-            <a:off x="1651000" y="3232150"/>
-            <a:ext cx="3429000" cy="279400"/>
+            <a:off x="1295400" y="3232150"/>
+            <a:ext cx="3937000" cy="279400"/>
           </a:xfrm>
           <a:prstGeom prst="rect">
             <a:avLst/>
@@ -7627,7 +7811,7 @@
             <a:r>
               <a:rPr sz="1800" b="0">
                 <a:solidFill>
-                  <a:srgbClr val="FFFFFF"/>
+                  <a:srgbClr val="002333"/>
                 </a:solidFill>
                 <a:latin typeface="Inter"/>
               </a:rPr>
@@ -7638,60 +7822,14 @@
       </p:sp>
       <p:sp>
         <p:nvSpPr>
-          <p:cNvPr id="9" name="Rounded Rectangle 8"/>
-          <p:cNvSpPr/>
-          <p:nvPr/>
-        </p:nvSpPr>
-        <p:spPr>
-          <a:xfrm>
-            <a:off x="5588000" y="1587500"/>
-            <a:ext cx="5842000" cy="3619500"/>
-          </a:xfrm>
-          <a:prstGeom prst="roundRect">
-            <a:avLst>
-              <a:gd name="adj" fmla="val 5614"/>
-            </a:avLst>
-          </a:prstGeom>
-          <a:solidFill>
-            <a:srgbClr val="F3F7F8"/>
-          </a:solidFill>
-          <a:ln>
-            <a:noFill/>
-          </a:ln>
-          <a:effectLst/>
-        </p:spPr>
-        <p:style>
-          <a:lnRef idx="1">
-            <a:schemeClr val="accent1"/>
-          </a:lnRef>
-          <a:fillRef idx="3">
-            <a:schemeClr val="accent1"/>
-          </a:fillRef>
-          <a:effectRef idx="2">
-            <a:schemeClr val="accent1"/>
-          </a:effectRef>
-          <a:fontRef idx="minor">
-            <a:schemeClr val="lt1"/>
-          </a:fontRef>
-        </p:style>
-        <p:txBody>
-          <a:bodyPr rtlCol="0" anchor="ctr"/>
-          <a:lstStyle/>
-          <a:p>
-            <a:pPr algn="ctr"/>
-          </a:p>
-        </p:txBody>
-      </p:sp>
-      <p:sp>
-        <p:nvSpPr>
-          <p:cNvPr id="10" name="TextBox 9"/>
+          <p:cNvPr id="9" name="TextBox 8"/>
           <p:cNvSpPr txBox="1"/>
           <p:nvPr/>
         </p:nvSpPr>
         <p:spPr>
           <a:xfrm>
-            <a:off x="5943600" y="1892300"/>
-            <a:ext cx="5130800" cy="304800"/>
+            <a:off x="6350000" y="1714500"/>
+            <a:ext cx="4445000" cy="330200"/>
           </a:xfrm>
           <a:prstGeom prst="rect">
             <a:avLst/>
@@ -7710,7 +7848,7 @@
               </a:lnSpc>
             </a:pPr>
             <a:r>
-              <a:rPr sz="2200" b="1">
+              <a:rPr sz="2600" b="1">
                 <a:solidFill>
                   <a:srgbClr val="002333"/>
                 </a:solidFill>
@@ -7718,6 +7856,50 @@
               </a:rPr>
               <a:t>Consistentie</a:t>
             </a:r>
+          </a:p>
+        </p:txBody>
+      </p:sp>
+      <p:sp>
+        <p:nvSpPr>
+          <p:cNvPr id="10" name="Rectangle 9"/>
+          <p:cNvSpPr/>
+          <p:nvPr/>
+        </p:nvSpPr>
+        <p:spPr>
+          <a:xfrm>
+            <a:off x="6350000" y="2184400"/>
+            <a:ext cx="4318000" cy="25400"/>
+          </a:xfrm>
+          <a:prstGeom prst="rect">
+            <a:avLst/>
+          </a:prstGeom>
+          <a:solidFill>
+            <a:srgbClr val="002333"/>
+          </a:solidFill>
+          <a:ln>
+            <a:noFill/>
+          </a:ln>
+          <a:effectLst/>
+        </p:spPr>
+        <p:style>
+          <a:lnRef idx="1">
+            <a:schemeClr val="accent1"/>
+          </a:lnRef>
+          <a:fillRef idx="3">
+            <a:schemeClr val="accent1"/>
+          </a:fillRef>
+          <a:effectRef idx="2">
+            <a:schemeClr val="accent1"/>
+          </a:effectRef>
+          <a:fontRef idx="minor">
+            <a:schemeClr val="lt1"/>
+          </a:fontRef>
+        </p:style>
+        <p:txBody>
+          <a:bodyPr rtlCol="0" anchor="ctr"/>
+          <a:lstStyle/>
+          <a:p>
+            <a:pPr algn="ctr"/>
           </a:p>
         </p:txBody>
       </p:sp>
@@ -7737,7 +7919,7 @@
         </p:blipFill>
         <p:spPr>
           <a:xfrm>
-            <a:off x="5943600" y="2540000"/>
+            <a:off x="6350000" y="2540000"/>
             <a:ext cx="355600" cy="355600"/>
           </a:xfrm>
           <a:prstGeom prst="rect">
@@ -7753,8 +7935,8 @@
         </p:nvSpPr>
         <p:spPr>
           <a:xfrm>
-            <a:off x="6477000" y="2597150"/>
-            <a:ext cx="4699000" cy="279400"/>
+            <a:off x="6883400" y="2597150"/>
+            <a:ext cx="3937000" cy="279400"/>
           </a:xfrm>
           <a:prstGeom prst="rect">
             <a:avLst/>
@@ -7779,7 +7961,7 @@
                 </a:solidFill>
                 <a:latin typeface="Inter"/>
               </a:rPr>
-              <a:t>Oordelen van beoordelaars lopen uiteen</a:t>
+              <a:t>Oordelen lopen uiteen</a:t>
             </a:r>
           </a:p>
         </p:txBody>
@@ -7800,7 +7982,7 @@
         </p:blipFill>
         <p:spPr>
           <a:xfrm>
-            <a:off x="5943600" y="3175000"/>
+            <a:off x="6350000" y="3175000"/>
             <a:ext cx="355600" cy="355600"/>
           </a:xfrm>
           <a:prstGeom prst="rect">
@@ -7816,8 +7998,8 @@
         </p:nvSpPr>
         <p:spPr>
           <a:xfrm>
-            <a:off x="6477000" y="3232150"/>
-            <a:ext cx="4699000" cy="279400"/>
+            <a:off x="6883400" y="3232150"/>
+            <a:ext cx="3937000" cy="279400"/>
           </a:xfrm>
           <a:prstGeom prst="rect">
             <a:avLst/>
@@ -7842,7 +8024,7 @@
                 </a:solidFill>
                 <a:latin typeface="Inter"/>
               </a:rPr>
-              <a:t>Kalibreren, nieuwe rubric ongetest</a:t>
+              <a:t>Nieuwe rubric ongetest</a:t>
             </a:r>
           </a:p>
         </p:txBody>
@@ -7863,7 +8045,7 @@
         </p:blipFill>
         <p:spPr>
           <a:xfrm>
-            <a:off x="5943600" y="3810000"/>
+            <a:off x="6350000" y="3810000"/>
             <a:ext cx="355600" cy="355600"/>
           </a:xfrm>
           <a:prstGeom prst="rect">
@@ -7879,8 +8061,8 @@
         </p:nvSpPr>
         <p:spPr>
           <a:xfrm>
-            <a:off x="6477000" y="3867150"/>
-            <a:ext cx="4699000" cy="279400"/>
+            <a:off x="6883400" y="3867150"/>
+            <a:ext cx="3937000" cy="279400"/>
           </a:xfrm>
           <a:prstGeom prst="rect">
             <a:avLst/>
@@ -7926,7 +8108,7 @@
         </p:blipFill>
         <p:spPr>
           <a:xfrm>
-            <a:off x="5943600" y="4445000"/>
+            <a:off x="6350000" y="4445000"/>
             <a:ext cx="355600" cy="355600"/>
           </a:xfrm>
           <a:prstGeom prst="rect">
@@ -7942,8 +8124,8 @@
         </p:nvSpPr>
         <p:spPr>
           <a:xfrm>
-            <a:off x="6477000" y="4502150"/>
-            <a:ext cx="4699000" cy="279400"/>
+            <a:off x="6883400" y="4502150"/>
+            <a:ext cx="3937000" cy="279400"/>
           </a:xfrm>
           <a:prstGeom prst="rect">
             <a:avLst/>
@@ -8168,58 +8350,17 @@
       <p:grpSpPr/>
       <p:sp>
         <p:nvSpPr>
-          <p:cNvPr id="2" name="TextBox 1"/>
-          <p:cNvSpPr txBox="1"/>
-          <p:nvPr/>
-        </p:nvSpPr>
-        <p:spPr>
-          <a:xfrm>
-            <a:off x="762000" y="558800"/>
-            <a:ext cx="10668000" cy="762000"/>
-          </a:xfrm>
-          <a:prstGeom prst="rect">
-            <a:avLst/>
-          </a:prstGeom>
-          <a:noFill/>
-        </p:spPr>
-        <p:txBody>
-          <a:bodyPr wrap="square" lIns="0" rIns="0" tIns="0" bIns="0">
-            <a:spAutoFit/>
-          </a:bodyPr>
-          <a:lstStyle/>
-          <a:p>
-            <a:pPr algn="ctr">
-              <a:lnSpc>
-                <a:spcPct val="100000"/>
-              </a:lnSpc>
-            </a:pPr>
-            <a:r>
-              <a:rPr sz="4800" b="1">
-                <a:solidFill>
-                  <a:srgbClr val="002333"/>
-                </a:solidFill>
-                <a:latin typeface="League Spartan"/>
-              </a:rPr>
-              <a:t>Oplossing</a:t>
-            </a:r>
-          </a:p>
-        </p:txBody>
-      </p:sp>
-      <p:sp>
-        <p:nvSpPr>
-          <p:cNvPr id="3" name="Rounded Rectangle 2"/>
+          <p:cNvPr id="2" name="Rectangle 1"/>
           <p:cNvSpPr/>
           <p:nvPr/>
         </p:nvSpPr>
         <p:spPr>
           <a:xfrm>
-            <a:off x="762000" y="1587500"/>
-            <a:ext cx="4572000" cy="3619500"/>
-          </a:xfrm>
-          <a:prstGeom prst="roundRect">
-            <a:avLst>
-              <a:gd name="adj" fmla="val 5614"/>
-            </a:avLst>
+            <a:off x="0" y="0"/>
+            <a:ext cx="12192000" cy="6858000"/>
+          </a:xfrm>
+          <a:prstGeom prst="rect">
+            <a:avLst/>
           </a:prstGeom>
           <a:solidFill>
             <a:srgbClr val="002333"/>
@@ -8253,14 +8394,99 @@
       </p:sp>
       <p:sp>
         <p:nvSpPr>
-          <p:cNvPr id="4" name="TextBox 3"/>
+          <p:cNvPr id="3" name="TextBox 2"/>
           <p:cNvSpPr txBox="1"/>
           <p:nvPr/>
         </p:nvSpPr>
         <p:spPr>
           <a:xfrm>
-            <a:off x="1117600" y="1892300"/>
-            <a:ext cx="3860800" cy="304800"/>
+            <a:off x="762000" y="558800"/>
+            <a:ext cx="10668000" cy="762000"/>
+          </a:xfrm>
+          <a:prstGeom prst="rect">
+            <a:avLst/>
+          </a:prstGeom>
+          <a:noFill/>
+        </p:spPr>
+        <p:txBody>
+          <a:bodyPr wrap="square" lIns="0" rIns="0" tIns="0" bIns="0">
+            <a:spAutoFit/>
+          </a:bodyPr>
+          <a:lstStyle/>
+          <a:p>
+            <a:pPr algn="ctr">
+              <a:lnSpc>
+                <a:spcPct val="100000"/>
+              </a:lnSpc>
+            </a:pPr>
+            <a:r>
+              <a:rPr sz="4800" b="1">
+                <a:solidFill>
+                  <a:srgbClr val="FFFFFF"/>
+                </a:solidFill>
+                <a:latin typeface="League Spartan"/>
+              </a:rPr>
+              <a:t>Oplossing</a:t>
+            </a:r>
+          </a:p>
+        </p:txBody>
+      </p:sp>
+      <p:sp>
+        <p:nvSpPr>
+          <p:cNvPr id="4" name="Rounded Rectangle 3"/>
+          <p:cNvSpPr/>
+          <p:nvPr/>
+        </p:nvSpPr>
+        <p:spPr>
+          <a:xfrm>
+            <a:off x="762000" y="1587500"/>
+            <a:ext cx="5207000" cy="3619500"/>
+          </a:xfrm>
+          <a:prstGeom prst="roundRect">
+            <a:avLst>
+              <a:gd name="adj" fmla="val 5614"/>
+            </a:avLst>
+          </a:prstGeom>
+          <a:solidFill>
+            <a:srgbClr val="0E3546"/>
+          </a:solidFill>
+          <a:ln>
+            <a:noFill/>
+          </a:ln>
+          <a:effectLst/>
+        </p:spPr>
+        <p:style>
+          <a:lnRef idx="1">
+            <a:schemeClr val="accent1"/>
+          </a:lnRef>
+          <a:fillRef idx="3">
+            <a:schemeClr val="accent1"/>
+          </a:fillRef>
+          <a:effectRef idx="2">
+            <a:schemeClr val="accent1"/>
+          </a:effectRef>
+          <a:fontRef idx="minor">
+            <a:schemeClr val="lt1"/>
+          </a:fontRef>
+        </p:style>
+        <p:txBody>
+          <a:bodyPr rtlCol="0" anchor="ctr"/>
+          <a:lstStyle/>
+          <a:p>
+            <a:pPr algn="ctr"/>
+          </a:p>
+        </p:txBody>
+      </p:sp>
+      <p:sp>
+        <p:nvSpPr>
+          <p:cNvPr id="5" name="TextBox 4"/>
+          <p:cNvSpPr txBox="1"/>
+          <p:nvPr/>
+        </p:nvSpPr>
+        <p:spPr>
+          <a:xfrm>
+            <a:off x="1117600" y="1905000"/>
+            <a:ext cx="4445000" cy="304800"/>
           </a:xfrm>
           <a:prstGeom prst="rect">
             <a:avLst/>
@@ -8279,7 +8505,7 @@
               </a:lnSpc>
             </a:pPr>
             <a:r>
-              <a:rPr sz="2200" b="1">
+              <a:rPr sz="2400" b="1">
                 <a:solidFill>
                   <a:srgbClr val="00E075"/>
                 </a:solidFill>
@@ -8290,9 +8516,55 @@
           </a:p>
         </p:txBody>
       </p:sp>
+      <p:sp>
+        <p:nvSpPr>
+          <p:cNvPr id="6" name="Rounded Rectangle 5"/>
+          <p:cNvSpPr/>
+          <p:nvPr/>
+        </p:nvSpPr>
+        <p:spPr>
+          <a:xfrm>
+            <a:off x="1117600" y="2667000"/>
+            <a:ext cx="355600" cy="355600"/>
+          </a:xfrm>
+          <a:prstGeom prst="roundRect">
+            <a:avLst>
+              <a:gd name="adj" fmla="val 25000"/>
+            </a:avLst>
+          </a:prstGeom>
+          <a:solidFill>
+            <a:srgbClr val="002333"/>
+          </a:solidFill>
+          <a:ln>
+            <a:noFill/>
+          </a:ln>
+          <a:effectLst/>
+        </p:spPr>
+        <p:style>
+          <a:lnRef idx="1">
+            <a:schemeClr val="accent1"/>
+          </a:lnRef>
+          <a:fillRef idx="3">
+            <a:schemeClr val="accent1"/>
+          </a:fillRef>
+          <a:effectRef idx="2">
+            <a:schemeClr val="accent1"/>
+          </a:effectRef>
+          <a:fontRef idx="minor">
+            <a:schemeClr val="lt1"/>
+          </a:fontRef>
+        </p:style>
+        <p:txBody>
+          <a:bodyPr rtlCol="0" anchor="ctr"/>
+          <a:lstStyle/>
+          <a:p>
+            <a:pPr algn="ctr"/>
+          </a:p>
+        </p:txBody>
+      </p:sp>
       <p:pic>
         <p:nvPicPr>
-          <p:cNvPr id="5" name="Picture 4" descr="icon-filepen-mint.png"/>
+          <p:cNvPr id="7" name="Picture 6" descr="icon-check-mint.png"/>
           <p:cNvPicPr>
             <a:picLocks noChangeAspect="1"/>
           </p:cNvPicPr>
@@ -8306,8 +8578,8 @@
         </p:blipFill>
         <p:spPr>
           <a:xfrm>
-            <a:off x="1117600" y="2540000"/>
-            <a:ext cx="355600" cy="355600"/>
+            <a:off x="1206500" y="2755900"/>
+            <a:ext cx="177800" cy="177800"/>
           </a:xfrm>
           <a:prstGeom prst="rect">
             <a:avLst/>
@@ -8316,14 +8588,14 @@
       </p:pic>
       <p:sp>
         <p:nvSpPr>
-          <p:cNvPr id="6" name="TextBox 5"/>
+          <p:cNvPr id="8" name="TextBox 7"/>
           <p:cNvSpPr txBox="1"/>
           <p:nvPr/>
         </p:nvSpPr>
         <p:spPr>
           <a:xfrm>
-            <a:off x="1651000" y="2597150"/>
-            <a:ext cx="3429000" cy="279400"/>
+            <a:off x="1651000" y="2724150"/>
+            <a:ext cx="4064000" cy="279400"/>
           </a:xfrm>
           <a:prstGeom prst="rect">
             <a:avLst/>
@@ -8353,9 +8625,729 @@
           </a:p>
         </p:txBody>
       </p:sp>
+      <p:sp>
+        <p:nvSpPr>
+          <p:cNvPr id="9" name="Rounded Rectangle 8"/>
+          <p:cNvSpPr/>
+          <p:nvPr/>
+        </p:nvSpPr>
+        <p:spPr>
+          <a:xfrm>
+            <a:off x="1117600" y="3365500"/>
+            <a:ext cx="355600" cy="355600"/>
+          </a:xfrm>
+          <a:prstGeom prst="roundRect">
+            <a:avLst>
+              <a:gd name="adj" fmla="val 25000"/>
+            </a:avLst>
+          </a:prstGeom>
+          <a:solidFill>
+            <a:srgbClr val="002333"/>
+          </a:solidFill>
+          <a:ln>
+            <a:noFill/>
+          </a:ln>
+          <a:effectLst/>
+        </p:spPr>
+        <p:style>
+          <a:lnRef idx="1">
+            <a:schemeClr val="accent1"/>
+          </a:lnRef>
+          <a:fillRef idx="3">
+            <a:schemeClr val="accent1"/>
+          </a:fillRef>
+          <a:effectRef idx="2">
+            <a:schemeClr val="accent1"/>
+          </a:effectRef>
+          <a:fontRef idx="minor">
+            <a:schemeClr val="lt1"/>
+          </a:fontRef>
+        </p:style>
+        <p:txBody>
+          <a:bodyPr rtlCol="0" anchor="ctr"/>
+          <a:lstStyle/>
+          <a:p>
+            <a:pPr algn="ctr"/>
+          </a:p>
+        </p:txBody>
+      </p:sp>
       <p:pic>
         <p:nvPicPr>
-          <p:cNvPr id="7" name="Picture 6" descr="icon-klok-mint.png"/>
+          <p:cNvPr id="10" name="Picture 9" descr="icon-check-mint.png"/>
+          <p:cNvPicPr>
+            <a:picLocks noChangeAspect="1"/>
+          </p:cNvPicPr>
+          <p:nvPr/>
+        </p:nvPicPr>
+        <p:blipFill>
+          <a:blip r:embed="rId2"/>
+          <a:stretch>
+            <a:fillRect/>
+          </a:stretch>
+        </p:blipFill>
+        <p:spPr>
+          <a:xfrm>
+            <a:off x="1206500" y="3454400"/>
+            <a:ext cx="177800" cy="177800"/>
+          </a:xfrm>
+          <a:prstGeom prst="rect">
+            <a:avLst/>
+          </a:prstGeom>
+        </p:spPr>
+      </p:pic>
+      <p:sp>
+        <p:nvSpPr>
+          <p:cNvPr id="11" name="TextBox 10"/>
+          <p:cNvSpPr txBox="1"/>
+          <p:nvPr/>
+        </p:nvSpPr>
+        <p:spPr>
+          <a:xfrm>
+            <a:off x="1651000" y="3422650"/>
+            <a:ext cx="4064000" cy="279400"/>
+          </a:xfrm>
+          <a:prstGeom prst="rect">
+            <a:avLst/>
+          </a:prstGeom>
+          <a:noFill/>
+        </p:spPr>
+        <p:txBody>
+          <a:bodyPr wrap="square" lIns="0" rIns="0" tIns="0" bIns="0">
+            <a:spAutoFit/>
+          </a:bodyPr>
+          <a:lstStyle/>
+          <a:p>
+            <a:pPr algn="l">
+              <a:lnSpc>
+                <a:spcPct val="100000"/>
+              </a:lnSpc>
+            </a:pPr>
+            <a:r>
+              <a:rPr sz="1800" b="0">
+                <a:solidFill>
+                  <a:srgbClr val="FFFFFF"/>
+                </a:solidFill>
+                <a:latin typeface="Inter"/>
+              </a:rPr>
+              <a:t>Minder beoordelingsuren</a:t>
+            </a:r>
+          </a:p>
+        </p:txBody>
+      </p:sp>
+      <p:sp>
+        <p:nvSpPr>
+          <p:cNvPr id="12" name="Rounded Rectangle 11"/>
+          <p:cNvSpPr/>
+          <p:nvPr/>
+        </p:nvSpPr>
+        <p:spPr>
+          <a:xfrm>
+            <a:off x="1117600" y="4064000"/>
+            <a:ext cx="355600" cy="355600"/>
+          </a:xfrm>
+          <a:prstGeom prst="roundRect">
+            <a:avLst>
+              <a:gd name="adj" fmla="val 25000"/>
+            </a:avLst>
+          </a:prstGeom>
+          <a:solidFill>
+            <a:srgbClr val="002333"/>
+          </a:solidFill>
+          <a:ln>
+            <a:noFill/>
+          </a:ln>
+          <a:effectLst/>
+        </p:spPr>
+        <p:style>
+          <a:lnRef idx="1">
+            <a:schemeClr val="accent1"/>
+          </a:lnRef>
+          <a:fillRef idx="3">
+            <a:schemeClr val="accent1"/>
+          </a:fillRef>
+          <a:effectRef idx="2">
+            <a:schemeClr val="accent1"/>
+          </a:effectRef>
+          <a:fontRef idx="minor">
+            <a:schemeClr val="lt1"/>
+          </a:fontRef>
+        </p:style>
+        <p:txBody>
+          <a:bodyPr rtlCol="0" anchor="ctr"/>
+          <a:lstStyle/>
+          <a:p>
+            <a:pPr algn="ctr"/>
+          </a:p>
+        </p:txBody>
+      </p:sp>
+      <p:pic>
+        <p:nvPicPr>
+          <p:cNvPr id="13" name="Picture 12" descr="icon-check-mint.png"/>
+          <p:cNvPicPr>
+            <a:picLocks noChangeAspect="1"/>
+          </p:cNvPicPr>
+          <p:nvPr/>
+        </p:nvPicPr>
+        <p:blipFill>
+          <a:blip r:embed="rId2"/>
+          <a:stretch>
+            <a:fillRect/>
+          </a:stretch>
+        </p:blipFill>
+        <p:spPr>
+          <a:xfrm>
+            <a:off x="1206500" y="4152900"/>
+            <a:ext cx="177800" cy="177800"/>
+          </a:xfrm>
+          <a:prstGeom prst="rect">
+            <a:avLst/>
+          </a:prstGeom>
+        </p:spPr>
+      </p:pic>
+      <p:sp>
+        <p:nvSpPr>
+          <p:cNvPr id="14" name="TextBox 13"/>
+          <p:cNvSpPr txBox="1"/>
+          <p:nvPr/>
+        </p:nvSpPr>
+        <p:spPr>
+          <a:xfrm>
+            <a:off x="1651000" y="4121150"/>
+            <a:ext cx="4064000" cy="279400"/>
+          </a:xfrm>
+          <a:prstGeom prst="rect">
+            <a:avLst/>
+          </a:prstGeom>
+          <a:noFill/>
+        </p:spPr>
+        <p:txBody>
+          <a:bodyPr wrap="square" lIns="0" rIns="0" tIns="0" bIns="0">
+            <a:spAutoFit/>
+          </a:bodyPr>
+          <a:lstStyle/>
+          <a:p>
+            <a:pPr algn="l">
+              <a:lnSpc>
+                <a:spcPct val="100000"/>
+              </a:lnSpc>
+            </a:pPr>
+            <a:r>
+              <a:rPr sz="1800" b="0">
+                <a:solidFill>
+                  <a:srgbClr val="FFFFFF"/>
+                </a:solidFill>
+                <a:latin typeface="Inter"/>
+              </a:rPr>
+              <a:t>Eerder een cijfer</a:t>
+            </a:r>
+          </a:p>
+        </p:txBody>
+      </p:sp>
+      <p:sp>
+        <p:nvSpPr>
+          <p:cNvPr id="15" name="Rounded Rectangle 14"/>
+          <p:cNvSpPr/>
+          <p:nvPr/>
+        </p:nvSpPr>
+        <p:spPr>
+          <a:xfrm>
+            <a:off x="6223000" y="1587500"/>
+            <a:ext cx="5207000" cy="3619500"/>
+          </a:xfrm>
+          <a:prstGeom prst="roundRect">
+            <a:avLst>
+              <a:gd name="adj" fmla="val 5614"/>
+            </a:avLst>
+          </a:prstGeom>
+          <a:solidFill>
+            <a:srgbClr val="0E3546"/>
+          </a:solidFill>
+          <a:ln>
+            <a:noFill/>
+          </a:ln>
+          <a:effectLst/>
+        </p:spPr>
+        <p:style>
+          <a:lnRef idx="1">
+            <a:schemeClr val="accent1"/>
+          </a:lnRef>
+          <a:fillRef idx="3">
+            <a:schemeClr val="accent1"/>
+          </a:fillRef>
+          <a:effectRef idx="2">
+            <a:schemeClr val="accent1"/>
+          </a:effectRef>
+          <a:fontRef idx="minor">
+            <a:schemeClr val="lt1"/>
+          </a:fontRef>
+        </p:style>
+        <p:txBody>
+          <a:bodyPr rtlCol="0" anchor="ctr"/>
+          <a:lstStyle/>
+          <a:p>
+            <a:pPr algn="ctr"/>
+          </a:p>
+        </p:txBody>
+      </p:sp>
+      <p:sp>
+        <p:nvSpPr>
+          <p:cNvPr id="16" name="TextBox 15"/>
+          <p:cNvSpPr txBox="1"/>
+          <p:nvPr/>
+        </p:nvSpPr>
+        <p:spPr>
+          <a:xfrm>
+            <a:off x="6578600" y="1905000"/>
+            <a:ext cx="4445000" cy="304800"/>
+          </a:xfrm>
+          <a:prstGeom prst="rect">
+            <a:avLst/>
+          </a:prstGeom>
+          <a:noFill/>
+        </p:spPr>
+        <p:txBody>
+          <a:bodyPr wrap="square" lIns="0" rIns="0" tIns="0" bIns="0">
+            <a:spAutoFit/>
+          </a:bodyPr>
+          <a:lstStyle/>
+          <a:p>
+            <a:pPr algn="l">
+              <a:lnSpc>
+                <a:spcPct val="100000"/>
+              </a:lnSpc>
+            </a:pPr>
+            <a:r>
+              <a:rPr sz="2400" b="1">
+                <a:solidFill>
+                  <a:srgbClr val="00E075"/>
+                </a:solidFill>
+                <a:latin typeface="League Spartan"/>
+              </a:rPr>
+              <a:t>Consistentie</a:t>
+            </a:r>
+          </a:p>
+        </p:txBody>
+      </p:sp>
+      <p:sp>
+        <p:nvSpPr>
+          <p:cNvPr id="17" name="Rounded Rectangle 16"/>
+          <p:cNvSpPr/>
+          <p:nvPr/>
+        </p:nvSpPr>
+        <p:spPr>
+          <a:xfrm>
+            <a:off x="6578600" y="2667000"/>
+            <a:ext cx="355600" cy="355600"/>
+          </a:xfrm>
+          <a:prstGeom prst="roundRect">
+            <a:avLst>
+              <a:gd name="adj" fmla="val 25000"/>
+            </a:avLst>
+          </a:prstGeom>
+          <a:solidFill>
+            <a:srgbClr val="002333"/>
+          </a:solidFill>
+          <a:ln>
+            <a:noFill/>
+          </a:ln>
+          <a:effectLst/>
+        </p:spPr>
+        <p:style>
+          <a:lnRef idx="1">
+            <a:schemeClr val="accent1"/>
+          </a:lnRef>
+          <a:fillRef idx="3">
+            <a:schemeClr val="accent1"/>
+          </a:fillRef>
+          <a:effectRef idx="2">
+            <a:schemeClr val="accent1"/>
+          </a:effectRef>
+          <a:fontRef idx="minor">
+            <a:schemeClr val="lt1"/>
+          </a:fontRef>
+        </p:style>
+        <p:txBody>
+          <a:bodyPr rtlCol="0" anchor="ctr"/>
+          <a:lstStyle/>
+          <a:p>
+            <a:pPr algn="ctr"/>
+          </a:p>
+        </p:txBody>
+      </p:sp>
+      <p:pic>
+        <p:nvPicPr>
+          <p:cNvPr id="18" name="Picture 17" descr="icon-check-mint.png"/>
+          <p:cNvPicPr>
+            <a:picLocks noChangeAspect="1"/>
+          </p:cNvPicPr>
+          <p:nvPr/>
+        </p:nvPicPr>
+        <p:blipFill>
+          <a:blip r:embed="rId2"/>
+          <a:stretch>
+            <a:fillRect/>
+          </a:stretch>
+        </p:blipFill>
+        <p:spPr>
+          <a:xfrm>
+            <a:off x="6667500" y="2755900"/>
+            <a:ext cx="177800" cy="177800"/>
+          </a:xfrm>
+          <a:prstGeom prst="rect">
+            <a:avLst/>
+          </a:prstGeom>
+        </p:spPr>
+      </p:pic>
+      <p:sp>
+        <p:nvSpPr>
+          <p:cNvPr id="19" name="TextBox 18"/>
+          <p:cNvSpPr txBox="1"/>
+          <p:nvPr/>
+        </p:nvSpPr>
+        <p:spPr>
+          <a:xfrm>
+            <a:off x="7112000" y="2724150"/>
+            <a:ext cx="4064000" cy="279400"/>
+          </a:xfrm>
+          <a:prstGeom prst="rect">
+            <a:avLst/>
+          </a:prstGeom>
+          <a:noFill/>
+        </p:spPr>
+        <p:txBody>
+          <a:bodyPr wrap="square" lIns="0" rIns="0" tIns="0" bIns="0">
+            <a:spAutoFit/>
+          </a:bodyPr>
+          <a:lstStyle/>
+          <a:p>
+            <a:pPr algn="l">
+              <a:lnSpc>
+                <a:spcPct val="100000"/>
+              </a:lnSpc>
+            </a:pPr>
+            <a:r>
+              <a:rPr sz="1800" b="0">
+                <a:solidFill>
+                  <a:srgbClr val="FFFFFF"/>
+                </a:solidFill>
+                <a:latin typeface="Inter"/>
+              </a:rPr>
+              <a:t>Dezelfde rubric voor elke opdracht</a:t>
+            </a:r>
+          </a:p>
+        </p:txBody>
+      </p:sp>
+      <p:sp>
+        <p:nvSpPr>
+          <p:cNvPr id="20" name="Rounded Rectangle 19"/>
+          <p:cNvSpPr/>
+          <p:nvPr/>
+        </p:nvSpPr>
+        <p:spPr>
+          <a:xfrm>
+            <a:off x="6578600" y="3365500"/>
+            <a:ext cx="355600" cy="355600"/>
+          </a:xfrm>
+          <a:prstGeom prst="roundRect">
+            <a:avLst>
+              <a:gd name="adj" fmla="val 25000"/>
+            </a:avLst>
+          </a:prstGeom>
+          <a:solidFill>
+            <a:srgbClr val="002333"/>
+          </a:solidFill>
+          <a:ln>
+            <a:noFill/>
+          </a:ln>
+          <a:effectLst/>
+        </p:spPr>
+        <p:style>
+          <a:lnRef idx="1">
+            <a:schemeClr val="accent1"/>
+          </a:lnRef>
+          <a:fillRef idx="3">
+            <a:schemeClr val="accent1"/>
+          </a:fillRef>
+          <a:effectRef idx="2">
+            <a:schemeClr val="accent1"/>
+          </a:effectRef>
+          <a:fontRef idx="minor">
+            <a:schemeClr val="lt1"/>
+          </a:fontRef>
+        </p:style>
+        <p:txBody>
+          <a:bodyPr rtlCol="0" anchor="ctr"/>
+          <a:lstStyle/>
+          <a:p>
+            <a:pPr algn="ctr"/>
+          </a:p>
+        </p:txBody>
+      </p:sp>
+      <p:pic>
+        <p:nvPicPr>
+          <p:cNvPr id="21" name="Picture 20" descr="icon-check-mint.png"/>
+          <p:cNvPicPr>
+            <a:picLocks noChangeAspect="1"/>
+          </p:cNvPicPr>
+          <p:nvPr/>
+        </p:nvPicPr>
+        <p:blipFill>
+          <a:blip r:embed="rId2"/>
+          <a:stretch>
+            <a:fillRect/>
+          </a:stretch>
+        </p:blipFill>
+        <p:spPr>
+          <a:xfrm>
+            <a:off x="6667500" y="3454400"/>
+            <a:ext cx="177800" cy="177800"/>
+          </a:xfrm>
+          <a:prstGeom prst="rect">
+            <a:avLst/>
+          </a:prstGeom>
+        </p:spPr>
+      </p:pic>
+      <p:sp>
+        <p:nvSpPr>
+          <p:cNvPr id="22" name="TextBox 21"/>
+          <p:cNvSpPr txBox="1"/>
+          <p:nvPr/>
+        </p:nvSpPr>
+        <p:spPr>
+          <a:xfrm>
+            <a:off x="7112000" y="3422650"/>
+            <a:ext cx="4064000" cy="279400"/>
+          </a:xfrm>
+          <a:prstGeom prst="rect">
+            <a:avLst/>
+          </a:prstGeom>
+          <a:noFill/>
+        </p:spPr>
+        <p:txBody>
+          <a:bodyPr wrap="square" lIns="0" rIns="0" tIns="0" bIns="0">
+            <a:spAutoFit/>
+          </a:bodyPr>
+          <a:lstStyle/>
+          <a:p>
+            <a:pPr algn="l">
+              <a:lnSpc>
+                <a:spcPct val="100000"/>
+              </a:lnSpc>
+            </a:pPr>
+            <a:r>
+              <a:rPr sz="1800" b="0">
+                <a:solidFill>
+                  <a:srgbClr val="FFFFFF"/>
+                </a:solidFill>
+                <a:latin typeface="Inter"/>
+              </a:rPr>
+              <a:t>Cijferopbouw per criterium</a:t>
+            </a:r>
+          </a:p>
+        </p:txBody>
+      </p:sp>
+      <p:sp>
+        <p:nvSpPr>
+          <p:cNvPr id="23" name="Rounded Rectangle 22"/>
+          <p:cNvSpPr/>
+          <p:nvPr/>
+        </p:nvSpPr>
+        <p:spPr>
+          <a:xfrm>
+            <a:off x="6578600" y="4064000"/>
+            <a:ext cx="355600" cy="355600"/>
+          </a:xfrm>
+          <a:prstGeom prst="roundRect">
+            <a:avLst>
+              <a:gd name="adj" fmla="val 25000"/>
+            </a:avLst>
+          </a:prstGeom>
+          <a:solidFill>
+            <a:srgbClr val="002333"/>
+          </a:solidFill>
+          <a:ln>
+            <a:noFill/>
+          </a:ln>
+          <a:effectLst/>
+        </p:spPr>
+        <p:style>
+          <a:lnRef idx="1">
+            <a:schemeClr val="accent1"/>
+          </a:lnRef>
+          <a:fillRef idx="3">
+            <a:schemeClr val="accent1"/>
+          </a:fillRef>
+          <a:effectRef idx="2">
+            <a:schemeClr val="accent1"/>
+          </a:effectRef>
+          <a:fontRef idx="minor">
+            <a:schemeClr val="lt1"/>
+          </a:fontRef>
+        </p:style>
+        <p:txBody>
+          <a:bodyPr rtlCol="0" anchor="ctr"/>
+          <a:lstStyle/>
+          <a:p>
+            <a:pPr algn="ctr"/>
+          </a:p>
+        </p:txBody>
+      </p:sp>
+      <p:pic>
+        <p:nvPicPr>
+          <p:cNvPr id="24" name="Picture 23" descr="icon-check-mint.png"/>
+          <p:cNvPicPr>
+            <a:picLocks noChangeAspect="1"/>
+          </p:cNvPicPr>
+          <p:nvPr/>
+        </p:nvPicPr>
+        <p:blipFill>
+          <a:blip r:embed="rId2"/>
+          <a:stretch>
+            <a:fillRect/>
+          </a:stretch>
+        </p:blipFill>
+        <p:spPr>
+          <a:xfrm>
+            <a:off x="6667500" y="4152900"/>
+            <a:ext cx="177800" cy="177800"/>
+          </a:xfrm>
+          <a:prstGeom prst="rect">
+            <a:avLst/>
+          </a:prstGeom>
+        </p:spPr>
+      </p:pic>
+      <p:sp>
+        <p:nvSpPr>
+          <p:cNvPr id="25" name="TextBox 24"/>
+          <p:cNvSpPr txBox="1"/>
+          <p:nvPr/>
+        </p:nvSpPr>
+        <p:spPr>
+          <a:xfrm>
+            <a:off x="7112000" y="4121150"/>
+            <a:ext cx="4064000" cy="279400"/>
+          </a:xfrm>
+          <a:prstGeom prst="rect">
+            <a:avLst/>
+          </a:prstGeom>
+          <a:noFill/>
+        </p:spPr>
+        <p:txBody>
+          <a:bodyPr wrap="square" lIns="0" rIns="0" tIns="0" bIns="0">
+            <a:spAutoFit/>
+          </a:bodyPr>
+          <a:lstStyle/>
+          <a:p>
+            <a:pPr algn="l">
+              <a:lnSpc>
+                <a:spcPct val="100000"/>
+              </a:lnSpc>
+            </a:pPr>
+            <a:r>
+              <a:rPr sz="1800" b="0">
+                <a:solidFill>
+                  <a:srgbClr val="FFFFFF"/>
+                </a:solidFill>
+                <a:latin typeface="Inter"/>
+              </a:rPr>
+              <a:t>Kalibreren begint bij de inhoud</a:t>
+            </a:r>
+          </a:p>
+        </p:txBody>
+      </p:sp>
+      <p:sp>
+        <p:nvSpPr>
+          <p:cNvPr id="26" name="Rectangle 25"/>
+          <p:cNvSpPr/>
+          <p:nvPr/>
+        </p:nvSpPr>
+        <p:spPr>
+          <a:xfrm>
+            <a:off x="762000" y="5511800"/>
+            <a:ext cx="10668000" cy="6350"/>
+          </a:xfrm>
+          <a:prstGeom prst="rect">
+            <a:avLst/>
+          </a:prstGeom>
+          <a:solidFill>
+            <a:srgbClr val="FFFFFF"/>
+          </a:solidFill>
+          <a:ln>
+            <a:noFill/>
+          </a:ln>
+          <a:effectLst/>
+        </p:spPr>
+        <p:style>
+          <a:lnRef idx="1">
+            <a:schemeClr val="accent1"/>
+          </a:lnRef>
+          <a:fillRef idx="3">
+            <a:schemeClr val="accent1"/>
+          </a:fillRef>
+          <a:effectRef idx="2">
+            <a:schemeClr val="accent1"/>
+          </a:effectRef>
+          <a:fontRef idx="minor">
+            <a:schemeClr val="lt1"/>
+          </a:fontRef>
+        </p:style>
+        <p:txBody>
+          <a:bodyPr rtlCol="0" anchor="ctr"/>
+          <a:lstStyle/>
+          <a:p>
+            <a:pPr algn="ctr"/>
+          </a:p>
+        </p:txBody>
+      </p:sp>
+      <p:sp>
+        <p:nvSpPr>
+          <p:cNvPr id="27" name="Rounded Rectangle 26"/>
+          <p:cNvSpPr/>
+          <p:nvPr/>
+        </p:nvSpPr>
+        <p:spPr>
+          <a:xfrm>
+            <a:off x="8890000" y="5626100"/>
+            <a:ext cx="2540000" cy="558800"/>
+          </a:xfrm>
+          <a:prstGeom prst="roundRect">
+            <a:avLst>
+              <a:gd name="adj" fmla="val 25000"/>
+            </a:avLst>
+          </a:prstGeom>
+          <a:solidFill>
+            <a:srgbClr val="FFFFFF"/>
+          </a:solidFill>
+          <a:ln>
+            <a:noFill/>
+          </a:ln>
+          <a:effectLst/>
+        </p:spPr>
+        <p:style>
+          <a:lnRef idx="1">
+            <a:schemeClr val="accent1"/>
+          </a:lnRef>
+          <a:fillRef idx="3">
+            <a:schemeClr val="accent1"/>
+          </a:fillRef>
+          <a:effectRef idx="2">
+            <a:schemeClr val="accent1"/>
+          </a:effectRef>
+          <a:fontRef idx="minor">
+            <a:schemeClr val="lt1"/>
+          </a:fontRef>
+        </p:style>
+        <p:txBody>
+          <a:bodyPr rtlCol="0" anchor="ctr"/>
+          <a:lstStyle/>
+          <a:p>
+            <a:pPr algn="ctr"/>
+          </a:p>
+        </p:txBody>
+      </p:sp>
+      <p:pic>
+        <p:nvPicPr>
+          <p:cNvPr id="28" name="Picture 27" descr="logo_navy.png"/>
           <p:cNvPicPr>
             <a:picLocks noChangeAspect="1"/>
           </p:cNvPicPr>
@@ -8369,8 +9361,8 @@
         </p:blipFill>
         <p:spPr>
           <a:xfrm>
-            <a:off x="1117600" y="3175000"/>
-            <a:ext cx="355600" cy="355600"/>
+            <a:off x="8947150" y="5759450"/>
+            <a:ext cx="1079500" cy="292100"/>
           </a:xfrm>
           <a:prstGeom prst="rect">
             <a:avLst/>
@@ -8379,46 +9371,51 @@
       </p:pic>
       <p:sp>
         <p:nvSpPr>
-          <p:cNvPr id="8" name="TextBox 7"/>
-          <p:cNvSpPr txBox="1"/>
-          <p:nvPr/>
-        </p:nvSpPr>
-        <p:spPr>
-          <a:xfrm>
-            <a:off x="1651000" y="3232150"/>
-            <a:ext cx="3429000" cy="279400"/>
-          </a:xfrm>
-          <a:prstGeom prst="rect">
-            <a:avLst/>
-          </a:prstGeom>
-          <a:noFill/>
-        </p:spPr>
-        <p:txBody>
-          <a:bodyPr wrap="square" lIns="0" rIns="0" tIns="0" bIns="0">
-            <a:spAutoFit/>
-          </a:bodyPr>
-          <a:lstStyle/>
-          <a:p>
-            <a:pPr algn="l">
-              <a:lnSpc>
-                <a:spcPct val="100000"/>
-              </a:lnSpc>
-            </a:pPr>
-            <a:r>
-              <a:rPr sz="1800" b="0">
-                <a:solidFill>
-                  <a:srgbClr val="FFFFFF"/>
-                </a:solidFill>
-                <a:latin typeface="Inter"/>
-              </a:rPr>
-              <a:t>Minder beoordelingsuren</a:t>
-            </a:r>
+          <p:cNvPr id="29" name="Rectangle 28"/>
+          <p:cNvSpPr/>
+          <p:nvPr/>
+        </p:nvSpPr>
+        <p:spPr>
+          <a:xfrm>
+            <a:off x="10280650" y="5740400"/>
+            <a:ext cx="6350" cy="330200"/>
+          </a:xfrm>
+          <a:prstGeom prst="rect">
+            <a:avLst/>
+          </a:prstGeom>
+          <a:solidFill>
+            <a:srgbClr val="CDD9DE"/>
+          </a:solidFill>
+          <a:ln>
+            <a:noFill/>
+          </a:ln>
+          <a:effectLst/>
+        </p:spPr>
+        <p:style>
+          <a:lnRef idx="1">
+            <a:schemeClr val="accent1"/>
+          </a:lnRef>
+          <a:fillRef idx="3">
+            <a:schemeClr val="accent1"/>
+          </a:fillRef>
+          <a:effectRef idx="2">
+            <a:schemeClr val="accent1"/>
+          </a:effectRef>
+          <a:fontRef idx="minor">
+            <a:schemeClr val="lt1"/>
+          </a:fontRef>
+        </p:style>
+        <p:txBody>
+          <a:bodyPr rtlCol="0" anchor="ctr"/>
+          <a:lstStyle/>
+          <a:p>
+            <a:pPr algn="ctr"/>
           </a:p>
         </p:txBody>
       </p:sp>
       <p:pic>
         <p:nvPicPr>
-          <p:cNvPr id="9" name="Picture 8" descr="icon-historie-mint.png"/>
+          <p:cNvPr id="30" name="Picture 29" descr="klant.png"/>
           <p:cNvPicPr>
             <a:picLocks noChangeAspect="1"/>
           </p:cNvPicPr>
@@ -8432,8 +9429,8 @@
         </p:blipFill>
         <p:spPr>
           <a:xfrm>
-            <a:off x="1117600" y="3810000"/>
-            <a:ext cx="355600" cy="355600"/>
+            <a:off x="10541000" y="5702300"/>
+            <a:ext cx="406400" cy="406400"/>
           </a:xfrm>
           <a:prstGeom prst="rect">
             <a:avLst/>
@@ -8442,456 +9439,7 @@
       </p:pic>
       <p:sp>
         <p:nvSpPr>
-          <p:cNvPr id="10" name="TextBox 9"/>
-          <p:cNvSpPr txBox="1"/>
-          <p:nvPr/>
-        </p:nvSpPr>
-        <p:spPr>
-          <a:xfrm>
-            <a:off x="1651000" y="3867150"/>
-            <a:ext cx="3429000" cy="279400"/>
-          </a:xfrm>
-          <a:prstGeom prst="rect">
-            <a:avLst/>
-          </a:prstGeom>
-          <a:noFill/>
-        </p:spPr>
-        <p:txBody>
-          <a:bodyPr wrap="square" lIns="0" rIns="0" tIns="0" bIns="0">
-            <a:spAutoFit/>
-          </a:bodyPr>
-          <a:lstStyle/>
-          <a:p>
-            <a:pPr algn="l">
-              <a:lnSpc>
-                <a:spcPct val="100000"/>
-              </a:lnSpc>
-            </a:pPr>
-            <a:r>
-              <a:rPr sz="1800" b="0">
-                <a:solidFill>
-                  <a:srgbClr val="FFFFFF"/>
-                </a:solidFill>
-                <a:latin typeface="Inter"/>
-              </a:rPr>
-              <a:t>Eerder een cijfer</a:t>
-            </a:r>
-          </a:p>
-        </p:txBody>
-      </p:sp>
-      <p:sp>
-        <p:nvSpPr>
-          <p:cNvPr id="11" name="Rounded Rectangle 10"/>
-          <p:cNvSpPr/>
-          <p:nvPr/>
-        </p:nvSpPr>
-        <p:spPr>
-          <a:xfrm>
-            <a:off x="5588000" y="1587500"/>
-            <a:ext cx="5842000" cy="3619500"/>
-          </a:xfrm>
-          <a:prstGeom prst="roundRect">
-            <a:avLst>
-              <a:gd name="adj" fmla="val 5614"/>
-            </a:avLst>
-          </a:prstGeom>
-          <a:solidFill>
-            <a:srgbClr val="F3F7F8"/>
-          </a:solidFill>
-          <a:ln>
-            <a:noFill/>
-          </a:ln>
-          <a:effectLst/>
-        </p:spPr>
-        <p:style>
-          <a:lnRef idx="1">
-            <a:schemeClr val="accent1"/>
-          </a:lnRef>
-          <a:fillRef idx="3">
-            <a:schemeClr val="accent1"/>
-          </a:fillRef>
-          <a:effectRef idx="2">
-            <a:schemeClr val="accent1"/>
-          </a:effectRef>
-          <a:fontRef idx="minor">
-            <a:schemeClr val="lt1"/>
-          </a:fontRef>
-        </p:style>
-        <p:txBody>
-          <a:bodyPr rtlCol="0" anchor="ctr"/>
-          <a:lstStyle/>
-          <a:p>
-            <a:pPr algn="ctr"/>
-          </a:p>
-        </p:txBody>
-      </p:sp>
-      <p:sp>
-        <p:nvSpPr>
-          <p:cNvPr id="12" name="TextBox 11"/>
-          <p:cNvSpPr txBox="1"/>
-          <p:nvPr/>
-        </p:nvSpPr>
-        <p:spPr>
-          <a:xfrm>
-            <a:off x="5943600" y="1892300"/>
-            <a:ext cx="5130800" cy="304800"/>
-          </a:xfrm>
-          <a:prstGeom prst="rect">
-            <a:avLst/>
-          </a:prstGeom>
-          <a:noFill/>
-        </p:spPr>
-        <p:txBody>
-          <a:bodyPr wrap="square" lIns="0" rIns="0" tIns="0" bIns="0">
-            <a:spAutoFit/>
-          </a:bodyPr>
-          <a:lstStyle/>
-          <a:p>
-            <a:pPr algn="l">
-              <a:lnSpc>
-                <a:spcPct val="100000"/>
-              </a:lnSpc>
-            </a:pPr>
-            <a:r>
-              <a:rPr sz="2200" b="1">
-                <a:solidFill>
-                  <a:srgbClr val="002333"/>
-                </a:solidFill>
-                <a:latin typeface="League Spartan"/>
-              </a:rPr>
-              <a:t>Consistentie</a:t>
-            </a:r>
-          </a:p>
-        </p:txBody>
-      </p:sp>
-      <p:pic>
-        <p:nvPicPr>
-          <p:cNvPr id="13" name="Picture 12" descr="icon-rubric-navy.png"/>
-          <p:cNvPicPr>
-            <a:picLocks noChangeAspect="1"/>
-          </p:cNvPicPr>
-          <p:nvPr/>
-        </p:nvPicPr>
-        <p:blipFill>
-          <a:blip r:embed="rId5"/>
-          <a:stretch>
-            <a:fillRect/>
-          </a:stretch>
-        </p:blipFill>
-        <p:spPr>
-          <a:xfrm>
-            <a:off x="5943600" y="2540000"/>
-            <a:ext cx="355600" cy="355600"/>
-          </a:xfrm>
-          <a:prstGeom prst="rect">
-            <a:avLst/>
-          </a:prstGeom>
-        </p:spPr>
-      </p:pic>
-      <p:sp>
-        <p:nvSpPr>
-          <p:cNvPr id="14" name="TextBox 13"/>
-          <p:cNvSpPr txBox="1"/>
-          <p:nvPr/>
-        </p:nvSpPr>
-        <p:spPr>
-          <a:xfrm>
-            <a:off x="6477000" y="2597150"/>
-            <a:ext cx="4699000" cy="279400"/>
-          </a:xfrm>
-          <a:prstGeom prst="rect">
-            <a:avLst/>
-          </a:prstGeom>
-          <a:noFill/>
-        </p:spPr>
-        <p:txBody>
-          <a:bodyPr wrap="square" lIns="0" rIns="0" tIns="0" bIns="0">
-            <a:spAutoFit/>
-          </a:bodyPr>
-          <a:lstStyle/>
-          <a:p>
-            <a:pPr algn="l">
-              <a:lnSpc>
-                <a:spcPct val="100000"/>
-              </a:lnSpc>
-            </a:pPr>
-            <a:r>
-              <a:rPr sz="1800" b="0">
-                <a:solidFill>
-                  <a:srgbClr val="002333"/>
-                </a:solidFill>
-                <a:latin typeface="Inter"/>
-              </a:rPr>
-              <a:t>Dezelfde rubric voor elke opdracht</a:t>
-            </a:r>
-          </a:p>
-        </p:txBody>
-      </p:sp>
-      <p:pic>
-        <p:nvPicPr>
-          <p:cNvPr id="15" name="Picture 14" descr="icon-cijfers-navy.png"/>
-          <p:cNvPicPr>
-            <a:picLocks noChangeAspect="1"/>
-          </p:cNvPicPr>
-          <p:nvPr/>
-        </p:nvPicPr>
-        <p:blipFill>
-          <a:blip r:embed="rId6"/>
-          <a:stretch>
-            <a:fillRect/>
-          </a:stretch>
-        </p:blipFill>
-        <p:spPr>
-          <a:xfrm>
-            <a:off x="5943600" y="3175000"/>
-            <a:ext cx="355600" cy="355600"/>
-          </a:xfrm>
-          <a:prstGeom prst="rect">
-            <a:avLst/>
-          </a:prstGeom>
-        </p:spPr>
-      </p:pic>
-      <p:sp>
-        <p:nvSpPr>
-          <p:cNvPr id="16" name="TextBox 15"/>
-          <p:cNvSpPr txBox="1"/>
-          <p:nvPr/>
-        </p:nvSpPr>
-        <p:spPr>
-          <a:xfrm>
-            <a:off x="6477000" y="3232150"/>
-            <a:ext cx="4699000" cy="279400"/>
-          </a:xfrm>
-          <a:prstGeom prst="rect">
-            <a:avLst/>
-          </a:prstGeom>
-          <a:noFill/>
-        </p:spPr>
-        <p:txBody>
-          <a:bodyPr wrap="square" lIns="0" rIns="0" tIns="0" bIns="0">
-            <a:spAutoFit/>
-          </a:bodyPr>
-          <a:lstStyle/>
-          <a:p>
-            <a:pPr algn="l">
-              <a:lnSpc>
-                <a:spcPct val="100000"/>
-              </a:lnSpc>
-            </a:pPr>
-            <a:r>
-              <a:rPr sz="1800" b="0">
-                <a:solidFill>
-                  <a:srgbClr val="002333"/>
-                </a:solidFill>
-                <a:latin typeface="Inter"/>
-              </a:rPr>
-              <a:t>Uitlegbare cijferopbouw per criterium</a:t>
-            </a:r>
-          </a:p>
-        </p:txBody>
-      </p:sp>
-      <p:pic>
-        <p:nvPicPr>
-          <p:cNvPr id="17" name="Picture 16" descr="icon-gesprek-navy.png"/>
-          <p:cNvPicPr>
-            <a:picLocks noChangeAspect="1"/>
-          </p:cNvPicPr>
-          <p:nvPr/>
-        </p:nvPicPr>
-        <p:blipFill>
-          <a:blip r:embed="rId7"/>
-          <a:stretch>
-            <a:fillRect/>
-          </a:stretch>
-        </p:blipFill>
-        <p:spPr>
-          <a:xfrm>
-            <a:off x="5943600" y="3810000"/>
-            <a:ext cx="355600" cy="355600"/>
-          </a:xfrm>
-          <a:prstGeom prst="rect">
-            <a:avLst/>
-          </a:prstGeom>
-        </p:spPr>
-      </p:pic>
-      <p:sp>
-        <p:nvSpPr>
-          <p:cNvPr id="18" name="TextBox 17"/>
-          <p:cNvSpPr txBox="1"/>
-          <p:nvPr/>
-        </p:nvSpPr>
-        <p:spPr>
-          <a:xfrm>
-            <a:off x="6477000" y="3867150"/>
-            <a:ext cx="4699000" cy="279400"/>
-          </a:xfrm>
-          <a:prstGeom prst="rect">
-            <a:avLst/>
-          </a:prstGeom>
-          <a:noFill/>
-        </p:spPr>
-        <p:txBody>
-          <a:bodyPr wrap="square" lIns="0" rIns="0" tIns="0" bIns="0">
-            <a:spAutoFit/>
-          </a:bodyPr>
-          <a:lstStyle/>
-          <a:p>
-            <a:pPr algn="l">
-              <a:lnSpc>
-                <a:spcPct val="100000"/>
-              </a:lnSpc>
-            </a:pPr>
-            <a:r>
-              <a:rPr sz="1800" b="0">
-                <a:solidFill>
-                  <a:srgbClr val="002333"/>
-                </a:solidFill>
-                <a:latin typeface="Inter"/>
-              </a:rPr>
-              <a:t>Kalibreren begint bij de inhoud</a:t>
-            </a:r>
-          </a:p>
-        </p:txBody>
-      </p:sp>
-      <p:sp>
-        <p:nvSpPr>
-          <p:cNvPr id="19" name="Rectangle 18"/>
-          <p:cNvSpPr/>
-          <p:nvPr/>
-        </p:nvSpPr>
-        <p:spPr>
-          <a:xfrm>
-            <a:off x="762000" y="5511800"/>
-            <a:ext cx="10668000" cy="6350"/>
-          </a:xfrm>
-          <a:prstGeom prst="rect">
-            <a:avLst/>
-          </a:prstGeom>
-          <a:solidFill>
-            <a:srgbClr val="E7EEF0"/>
-          </a:solidFill>
-          <a:ln>
-            <a:noFill/>
-          </a:ln>
-          <a:effectLst/>
-        </p:spPr>
-        <p:style>
-          <a:lnRef idx="1">
-            <a:schemeClr val="accent1"/>
-          </a:lnRef>
-          <a:fillRef idx="3">
-            <a:schemeClr val="accent1"/>
-          </a:fillRef>
-          <a:effectRef idx="2">
-            <a:schemeClr val="accent1"/>
-          </a:effectRef>
-          <a:fontRef idx="minor">
-            <a:schemeClr val="lt1"/>
-          </a:fontRef>
-        </p:style>
-        <p:txBody>
-          <a:bodyPr rtlCol="0" anchor="ctr"/>
-          <a:lstStyle/>
-          <a:p>
-            <a:pPr algn="ctr"/>
-          </a:p>
-        </p:txBody>
-      </p:sp>
-      <p:pic>
-        <p:nvPicPr>
-          <p:cNvPr id="20" name="Picture 19" descr="logo_navy.png"/>
-          <p:cNvPicPr>
-            <a:picLocks noChangeAspect="1"/>
-          </p:cNvPicPr>
-          <p:nvPr/>
-        </p:nvPicPr>
-        <p:blipFill>
-          <a:blip r:embed="rId8"/>
-          <a:stretch>
-            <a:fillRect/>
-          </a:stretch>
-        </p:blipFill>
-        <p:spPr>
-          <a:xfrm>
-            <a:off x="9010650" y="5759450"/>
-            <a:ext cx="1079500" cy="292100"/>
-          </a:xfrm>
-          <a:prstGeom prst="rect">
-            <a:avLst/>
-          </a:prstGeom>
-        </p:spPr>
-      </p:pic>
-      <p:sp>
-        <p:nvSpPr>
-          <p:cNvPr id="21" name="Rectangle 20"/>
-          <p:cNvSpPr/>
-          <p:nvPr/>
-        </p:nvSpPr>
-        <p:spPr>
-          <a:xfrm>
-            <a:off x="10344150" y="5740400"/>
-            <a:ext cx="6350" cy="330200"/>
-          </a:xfrm>
-          <a:prstGeom prst="rect">
-            <a:avLst/>
-          </a:prstGeom>
-          <a:solidFill>
-            <a:srgbClr val="CDD9DE"/>
-          </a:solidFill>
-          <a:ln>
-            <a:noFill/>
-          </a:ln>
-          <a:effectLst/>
-        </p:spPr>
-        <p:style>
-          <a:lnRef idx="1">
-            <a:schemeClr val="accent1"/>
-          </a:lnRef>
-          <a:fillRef idx="3">
-            <a:schemeClr val="accent1"/>
-          </a:fillRef>
-          <a:effectRef idx="2">
-            <a:schemeClr val="accent1"/>
-          </a:effectRef>
-          <a:fontRef idx="minor">
-            <a:schemeClr val="lt1"/>
-          </a:fontRef>
-        </p:style>
-        <p:txBody>
-          <a:bodyPr rtlCol="0" anchor="ctr"/>
-          <a:lstStyle/>
-          <a:p>
-            <a:pPr algn="ctr"/>
-          </a:p>
-        </p:txBody>
-      </p:sp>
-      <p:pic>
-        <p:nvPicPr>
-          <p:cNvPr id="22" name="Picture 21" descr="klant.png"/>
-          <p:cNvPicPr>
-            <a:picLocks noChangeAspect="1"/>
-          </p:cNvPicPr>
-          <p:nvPr/>
-        </p:nvPicPr>
-        <p:blipFill>
-          <a:blip r:embed="rId9"/>
-          <a:stretch>
-            <a:fillRect/>
-          </a:stretch>
-        </p:blipFill>
-        <p:spPr>
-          <a:xfrm>
-            <a:off x="10604500" y="5702300"/>
-            <a:ext cx="406400" cy="406400"/>
-          </a:xfrm>
-          <a:prstGeom prst="rect">
-            <a:avLst/>
-          </a:prstGeom>
-        </p:spPr>
-      </p:pic>
-      <p:sp>
-        <p:nvSpPr>
-          <p:cNvPr id="23" name="TextBox 22"/>
+          <p:cNvPr id="31" name="TextBox 30"/>
           <p:cNvSpPr txBox="1"/>
           <p:nvPr/>
         </p:nvSpPr>
@@ -8919,7 +9467,7 @@
             <a:r>
               <a:rPr sz="1150" b="0">
                 <a:solidFill>
-                  <a:srgbClr val="9AAFB8"/>
+                  <a:srgbClr val="FFFFFF"/>
                 </a:solidFill>
                 <a:latin typeface="Inter"/>
               </a:rPr>
@@ -8987,14 +9535,60 @@
       </p:sp>
       <p:sp>
         <p:nvSpPr>
-          <p:cNvPr id="3" name="TextBox 2"/>
+          <p:cNvPr id="3" name="Rounded Rectangle 2"/>
+          <p:cNvSpPr/>
+          <p:nvPr/>
+        </p:nvSpPr>
+        <p:spPr>
+          <a:xfrm>
+            <a:off x="762000" y="1587500"/>
+            <a:ext cx="10668000" cy="2413000"/>
+          </a:xfrm>
+          <a:prstGeom prst="roundRect">
+            <a:avLst>
+              <a:gd name="adj" fmla="val 8421"/>
+            </a:avLst>
+          </a:prstGeom>
+          <a:solidFill>
+            <a:srgbClr val="002333"/>
+          </a:solidFill>
+          <a:ln>
+            <a:noFill/>
+          </a:ln>
+          <a:effectLst/>
+        </p:spPr>
+        <p:style>
+          <a:lnRef idx="1">
+            <a:schemeClr val="accent1"/>
+          </a:lnRef>
+          <a:fillRef idx="3">
+            <a:schemeClr val="accent1"/>
+          </a:fillRef>
+          <a:effectRef idx="2">
+            <a:schemeClr val="accent1"/>
+          </a:effectRef>
+          <a:fontRef idx="minor">
+            <a:schemeClr val="lt1"/>
+          </a:fontRef>
+        </p:style>
+        <p:txBody>
+          <a:bodyPr rtlCol="0" anchor="ctr"/>
+          <a:lstStyle/>
+          <a:p>
+            <a:pPr algn="ctr"/>
+          </a:p>
+        </p:txBody>
+      </p:sp>
+      <p:sp>
+        <p:nvSpPr>
+          <p:cNvPr id="4" name="TextBox 3"/>
           <p:cNvSpPr txBox="1"/>
           <p:nvPr/>
         </p:nvSpPr>
         <p:spPr>
           <a:xfrm>
-            <a:off x="762000" y="1905000"/>
-            <a:ext cx="5105400" cy="1206500"/>
+            <a:off x="1206500" y="1981200"/>
+            <a:ext cx="2667000" cy="1460500"/>
           </a:xfrm>
           <a:prstGeom prst="rect">
             <a:avLst/>
@@ -9007,15 +9601,15 @@
           </a:bodyPr>
           <a:lstStyle/>
           <a:p>
-            <a:pPr algn="ctr">
+            <a:pPr algn="l">
               <a:lnSpc>
                 <a:spcPct val="100000"/>
               </a:lnSpc>
             </a:pPr>
             <a:r>
-              <a:rPr sz="9000" b="1">
+              <a:rPr sz="11500" b="1">
                 <a:solidFill>
-                  <a:srgbClr val="002333"/>
+                  <a:srgbClr val="FFFFFF"/>
                 </a:solidFill>
                 <a:latin typeface="League Spartan"/>
               </a:rPr>
@@ -9026,14 +9620,14 @@
       </p:sp>
       <p:sp>
         <p:nvSpPr>
-          <p:cNvPr id="4" name="TextBox 3"/>
+          <p:cNvPr id="5" name="TextBox 4"/>
           <p:cNvSpPr txBox="1"/>
           <p:nvPr/>
         </p:nvSpPr>
         <p:spPr>
           <a:xfrm>
-            <a:off x="762000" y="3365500"/>
-            <a:ext cx="5105400" cy="317500"/>
+            <a:off x="3810000" y="2222500"/>
+            <a:ext cx="2413000" cy="952500"/>
           </a:xfrm>
           <a:prstGeom prst="rect">
             <a:avLst/>
@@ -9046,33 +9640,163 @@
           </a:bodyPr>
           <a:lstStyle/>
           <a:p>
-            <a:pPr algn="ctr">
+            <a:pPr algn="l">
               <a:lnSpc>
-                <a:spcPct val="100000"/>
+                <a:spcPct val="115000"/>
               </a:lnSpc>
             </a:pPr>
             <a:r>
-              <a:rPr sz="2200" b="1">
+              <a:rPr sz="2800" b="1">
                 <a:solidFill>
-                  <a:srgbClr val="002333"/>
+                  <a:srgbClr val="FFFFFF"/>
                 </a:solidFill>
                 <a:latin typeface="League Spartan"/>
               </a:rPr>
-              <a:t>per student per maand</a:t>
-            </a:r>
-          </a:p>
-        </p:txBody>
-      </p:sp>
-      <p:sp>
-        <p:nvSpPr>
-          <p:cNvPr id="5" name="TextBox 4"/>
+              <a:t>per student,</a:t>
+            </a:r>
+          </a:p>
+          <a:p>
+            <a:pPr algn="l">
+              <a:lnSpc>
+                <a:spcPct val="115000"/>
+              </a:lnSpc>
+            </a:pPr>
+            <a:r>
+              <a:rPr sz="2800" b="1">
+                <a:solidFill>
+                  <a:srgbClr val="FFFFFF"/>
+                </a:solidFill>
+                <a:latin typeface="League Spartan"/>
+              </a:rPr>
+              <a:t>per maand</a:t>
+            </a:r>
+          </a:p>
+        </p:txBody>
+      </p:sp>
+      <p:sp>
+        <p:nvSpPr>
+          <p:cNvPr id="6" name="Rectangle 5"/>
+          <p:cNvSpPr/>
+          <p:nvPr/>
+        </p:nvSpPr>
+        <p:spPr>
+          <a:xfrm>
+            <a:off x="6350000" y="1905000"/>
+            <a:ext cx="12700" cy="1778000"/>
+          </a:xfrm>
+          <a:prstGeom prst="rect">
+            <a:avLst/>
+          </a:prstGeom>
+          <a:solidFill>
+            <a:srgbClr val="1E4656"/>
+          </a:solidFill>
+          <a:ln>
+            <a:noFill/>
+          </a:ln>
+          <a:effectLst/>
+        </p:spPr>
+        <p:style>
+          <a:lnRef idx="1">
+            <a:schemeClr val="accent1"/>
+          </a:lnRef>
+          <a:fillRef idx="3">
+            <a:schemeClr val="accent1"/>
+          </a:fillRef>
+          <a:effectRef idx="2">
+            <a:schemeClr val="accent1"/>
+          </a:effectRef>
+          <a:fontRef idx="minor">
+            <a:schemeClr val="lt1"/>
+          </a:fontRef>
+        </p:style>
+        <p:txBody>
+          <a:bodyPr rtlCol="0" anchor="ctr"/>
+          <a:lstStyle/>
+          <a:p>
+            <a:pPr algn="ctr"/>
+          </a:p>
+        </p:txBody>
+      </p:sp>
+      <p:sp>
+        <p:nvSpPr>
+          <p:cNvPr id="7" name="Rounded Rectangle 6"/>
+          <p:cNvSpPr/>
+          <p:nvPr/>
+        </p:nvSpPr>
+        <p:spPr>
+          <a:xfrm>
+            <a:off x="6731000" y="2095500"/>
+            <a:ext cx="355600" cy="355600"/>
+          </a:xfrm>
+          <a:prstGeom prst="roundRect">
+            <a:avLst>
+              <a:gd name="adj" fmla="val 25000"/>
+            </a:avLst>
+          </a:prstGeom>
+          <a:solidFill>
+            <a:srgbClr val="0E3546"/>
+          </a:solidFill>
+          <a:ln>
+            <a:noFill/>
+          </a:ln>
+          <a:effectLst/>
+        </p:spPr>
+        <p:style>
+          <a:lnRef idx="1">
+            <a:schemeClr val="accent1"/>
+          </a:lnRef>
+          <a:fillRef idx="3">
+            <a:schemeClr val="accent1"/>
+          </a:fillRef>
+          <a:effectRef idx="2">
+            <a:schemeClr val="accent1"/>
+          </a:effectRef>
+          <a:fontRef idx="minor">
+            <a:schemeClr val="lt1"/>
+          </a:fontRef>
+        </p:style>
+        <p:txBody>
+          <a:bodyPr rtlCol="0" anchor="ctr"/>
+          <a:lstStyle/>
+          <a:p>
+            <a:pPr algn="ctr"/>
+          </a:p>
+        </p:txBody>
+      </p:sp>
+      <p:pic>
+        <p:nvPicPr>
+          <p:cNvPr id="8" name="Picture 7" descr="icon-check-mint.png"/>
+          <p:cNvPicPr>
+            <a:picLocks noChangeAspect="1"/>
+          </p:cNvPicPr>
+          <p:nvPr/>
+        </p:nvPicPr>
+        <p:blipFill>
+          <a:blip r:embed="rId2"/>
+          <a:stretch>
+            <a:fillRect/>
+          </a:stretch>
+        </p:blipFill>
+        <p:spPr>
+          <a:xfrm>
+            <a:off x="6819900" y="2184400"/>
+            <a:ext cx="177800" cy="177800"/>
+          </a:xfrm>
+          <a:prstGeom prst="rect">
+            <a:avLst/>
+          </a:prstGeom>
+        </p:spPr>
+      </p:pic>
+      <p:sp>
+        <p:nvSpPr>
+          <p:cNvPr id="9" name="TextBox 8"/>
           <p:cNvSpPr txBox="1"/>
           <p:nvPr/>
         </p:nvSpPr>
         <p:spPr>
           <a:xfrm>
-            <a:off x="762000" y="3797300"/>
-            <a:ext cx="5105400" cy="279400"/>
+            <a:off x="7239000" y="2152650"/>
+            <a:ext cx="4064000" cy="635000"/>
           </a:xfrm>
           <a:prstGeom prst="rect">
             <a:avLst/>
@@ -9085,33 +9809,103 @@
           </a:bodyPr>
           <a:lstStyle/>
           <a:p>
-            <a:pPr algn="ctr">
+            <a:pPr algn="l">
               <a:lnSpc>
-                <a:spcPct val="100000"/>
+                <a:spcPct val="125000"/>
               </a:lnSpc>
             </a:pPr>
             <a:r>
-              <a:rPr sz="1700" b="0">
+              <a:rPr sz="1800" b="0">
                 <a:solidFill>
-                  <a:srgbClr val="5B7480"/>
+                  <a:srgbClr val="FFFFFF"/>
                 </a:solidFill>
                 <a:latin typeface="Inter"/>
               </a:rPr>
-              <a:t>minimaal 150 studenten</a:t>
-            </a:r>
-          </a:p>
-        </p:txBody>
-      </p:sp>
-      <p:sp>
-        <p:nvSpPr>
-          <p:cNvPr id="6" name="TextBox 5"/>
+              <a:t>Minimaal 150 studenten</a:t>
+            </a:r>
+          </a:p>
+        </p:txBody>
+      </p:sp>
+      <p:sp>
+        <p:nvSpPr>
+          <p:cNvPr id="10" name="Rounded Rectangle 9"/>
+          <p:cNvSpPr/>
+          <p:nvPr/>
+        </p:nvSpPr>
+        <p:spPr>
+          <a:xfrm>
+            <a:off x="6731000" y="2857500"/>
+            <a:ext cx="355600" cy="355600"/>
+          </a:xfrm>
+          <a:prstGeom prst="roundRect">
+            <a:avLst>
+              <a:gd name="adj" fmla="val 25000"/>
+            </a:avLst>
+          </a:prstGeom>
+          <a:solidFill>
+            <a:srgbClr val="0E3546"/>
+          </a:solidFill>
+          <a:ln>
+            <a:noFill/>
+          </a:ln>
+          <a:effectLst/>
+        </p:spPr>
+        <p:style>
+          <a:lnRef idx="1">
+            <a:schemeClr val="accent1"/>
+          </a:lnRef>
+          <a:fillRef idx="3">
+            <a:schemeClr val="accent1"/>
+          </a:fillRef>
+          <a:effectRef idx="2">
+            <a:schemeClr val="accent1"/>
+          </a:effectRef>
+          <a:fontRef idx="minor">
+            <a:schemeClr val="lt1"/>
+          </a:fontRef>
+        </p:style>
+        <p:txBody>
+          <a:bodyPr rtlCol="0" anchor="ctr"/>
+          <a:lstStyle/>
+          <a:p>
+            <a:pPr algn="ctr"/>
+          </a:p>
+        </p:txBody>
+      </p:sp>
+      <p:pic>
+        <p:nvPicPr>
+          <p:cNvPr id="11" name="Picture 10" descr="icon-check-mint.png"/>
+          <p:cNvPicPr>
+            <a:picLocks noChangeAspect="1"/>
+          </p:cNvPicPr>
+          <p:nvPr/>
+        </p:nvPicPr>
+        <p:blipFill>
+          <a:blip r:embed="rId2"/>
+          <a:stretch>
+            <a:fillRect/>
+          </a:stretch>
+        </p:blipFill>
+        <p:spPr>
+          <a:xfrm>
+            <a:off x="6819900" y="2946400"/>
+            <a:ext cx="177800" cy="177800"/>
+          </a:xfrm>
+          <a:prstGeom prst="rect">
+            <a:avLst/>
+          </a:prstGeom>
+        </p:spPr>
+      </p:pic>
+      <p:sp>
+        <p:nvSpPr>
+          <p:cNvPr id="12" name="TextBox 11"/>
           <p:cNvSpPr txBox="1"/>
           <p:nvPr/>
         </p:nvSpPr>
         <p:spPr>
           <a:xfrm>
-            <a:off x="6324600" y="1905000"/>
-            <a:ext cx="5105400" cy="1206500"/>
+            <a:off x="7239000" y="2914650"/>
+            <a:ext cx="4064000" cy="635000"/>
           </a:xfrm>
           <a:prstGeom prst="rect">
             <a:avLst/>
@@ -9124,111 +9918,49 @@
           </a:bodyPr>
           <a:lstStyle/>
           <a:p>
-            <a:pPr algn="ctr">
+            <a:pPr algn="l">
               <a:lnSpc>
-                <a:spcPct val="100000"/>
+                <a:spcPct val="125000"/>
               </a:lnSpc>
             </a:pPr>
             <a:r>
-              <a:rPr sz="9000" b="1">
+              <a:rPr sz="1800" b="0">
                 <a:solidFill>
-                  <a:srgbClr val="002333"/>
-                </a:solidFill>
-                <a:latin typeface="League Spartan"/>
-              </a:rPr>
-              <a:t>€1.500</a:t>
-            </a:r>
-          </a:p>
-        </p:txBody>
-      </p:sp>
-      <p:sp>
-        <p:nvSpPr>
-          <p:cNvPr id="7" name="TextBox 6"/>
-          <p:cNvSpPr txBox="1"/>
-          <p:nvPr/>
-        </p:nvSpPr>
-        <p:spPr>
-          <a:xfrm>
-            <a:off x="6324600" y="3365500"/>
-            <a:ext cx="5105400" cy="317500"/>
-          </a:xfrm>
-          <a:prstGeom prst="rect">
-            <a:avLst/>
-          </a:prstGeom>
-          <a:noFill/>
-        </p:spPr>
-        <p:txBody>
-          <a:bodyPr wrap="square" lIns="0" rIns="0" tIns="0" bIns="0">
-            <a:spAutoFit/>
-          </a:bodyPr>
-          <a:lstStyle/>
-          <a:p>
-            <a:pPr algn="ctr">
-              <a:lnSpc>
-                <a:spcPct val="100000"/>
-              </a:lnSpc>
-            </a:pPr>
-            <a:r>
-              <a:rPr sz="2200" b="1">
-                <a:solidFill>
-                  <a:srgbClr val="002333"/>
-                </a:solidFill>
-                <a:latin typeface="League Spartan"/>
-              </a:rPr>
-              <a:t>minimaal</a:t>
-            </a:r>
-          </a:p>
-        </p:txBody>
-      </p:sp>
-      <p:sp>
-        <p:nvSpPr>
-          <p:cNvPr id="8" name="TextBox 7"/>
-          <p:cNvSpPr txBox="1"/>
-          <p:nvPr/>
-        </p:nvSpPr>
-        <p:spPr>
-          <a:xfrm>
-            <a:off x="6324600" y="3797300"/>
-            <a:ext cx="5105400" cy="279400"/>
-          </a:xfrm>
-          <a:prstGeom prst="rect">
-            <a:avLst/>
-          </a:prstGeom>
-          <a:noFill/>
-        </p:spPr>
-        <p:txBody>
-          <a:bodyPr wrap="square" lIns="0" rIns="0" tIns="0" bIns="0">
-            <a:spAutoFit/>
-          </a:bodyPr>
-          <a:lstStyle/>
-          <a:p>
-            <a:pPr algn="ctr">
-              <a:lnSpc>
-                <a:spcPct val="100000"/>
-              </a:lnSpc>
-            </a:pPr>
-            <a:r>
-              <a:rPr sz="1700" b="0">
-                <a:solidFill>
-                  <a:srgbClr val="5B7480"/>
+                  <a:srgbClr val="FFFFFF"/>
                 </a:solidFill>
                 <a:latin typeface="Inter"/>
               </a:rPr>
-              <a:t>voor het reserveren van AI-capaciteit</a:t>
-            </a:r>
-          </a:p>
-        </p:txBody>
-      </p:sp>
-      <p:sp>
-        <p:nvSpPr>
-          <p:cNvPr id="9" name="Rectangle 8"/>
+              <a:t>Minimaal €1.500 voor het</a:t>
+            </a:r>
+          </a:p>
+          <a:p>
+            <a:pPr algn="l">
+              <a:lnSpc>
+                <a:spcPct val="125000"/>
+              </a:lnSpc>
+            </a:pPr>
+            <a:r>
+              <a:rPr sz="1800" b="0">
+                <a:solidFill>
+                  <a:srgbClr val="FFFFFF"/>
+                </a:solidFill>
+                <a:latin typeface="Inter"/>
+              </a:rPr>
+              <a:t>reserveren van AI-capaciteit</a:t>
+            </a:r>
+          </a:p>
+        </p:txBody>
+      </p:sp>
+      <p:sp>
+        <p:nvSpPr>
+          <p:cNvPr id="13" name="Rectangle 12"/>
           <p:cNvSpPr/>
           <p:nvPr/>
         </p:nvSpPr>
         <p:spPr>
           <a:xfrm>
-            <a:off x="6089650" y="1905000"/>
-            <a:ext cx="12700" cy="2159000"/>
+            <a:off x="762000" y="4254500"/>
+            <a:ext cx="10668000" cy="12700"/>
           </a:xfrm>
           <a:prstGeom prst="rect">
             <a:avLst/>
@@ -9265,7 +9997,482 @@
       </p:sp>
       <p:sp>
         <p:nvSpPr>
-          <p:cNvPr id="10" name="Rectangle 9"/>
+          <p:cNvPr id="14" name="TextBox 13"/>
+          <p:cNvSpPr txBox="1"/>
+          <p:nvPr/>
+        </p:nvSpPr>
+        <p:spPr>
+          <a:xfrm>
+            <a:off x="762000" y="4445000"/>
+            <a:ext cx="3810000" cy="254000"/>
+          </a:xfrm>
+          <a:prstGeom prst="rect">
+            <a:avLst/>
+          </a:prstGeom>
+          <a:noFill/>
+        </p:spPr>
+        <p:txBody>
+          <a:bodyPr wrap="square" lIns="0" rIns="0" tIns="0" bIns="0">
+            <a:spAutoFit/>
+          </a:bodyPr>
+          <a:lstStyle/>
+          <a:p>
+            <a:pPr algn="l">
+              <a:lnSpc>
+                <a:spcPct val="100000"/>
+              </a:lnSpc>
+            </a:pPr>
+            <a:r>
+              <a:rPr sz="1600" b="0">
+                <a:solidFill>
+                  <a:srgbClr val="5B7480"/>
+                </a:solidFill>
+                <a:latin typeface="Inter"/>
+              </a:rPr>
+              <a:t>Wat dat dekt</a:t>
+            </a:r>
+          </a:p>
+        </p:txBody>
+      </p:sp>
+      <p:sp>
+        <p:nvSpPr>
+          <p:cNvPr id="15" name="Rounded Rectangle 14"/>
+          <p:cNvSpPr/>
+          <p:nvPr/>
+        </p:nvSpPr>
+        <p:spPr>
+          <a:xfrm>
+            <a:off x="762000" y="4826000"/>
+            <a:ext cx="457200" cy="457200"/>
+          </a:xfrm>
+          <a:prstGeom prst="roundRect">
+            <a:avLst>
+              <a:gd name="adj" fmla="val 25000"/>
+            </a:avLst>
+          </a:prstGeom>
+          <a:solidFill>
+            <a:srgbClr val="F3F7F8"/>
+          </a:solidFill>
+          <a:ln>
+            <a:noFill/>
+          </a:ln>
+          <a:effectLst/>
+        </p:spPr>
+        <p:style>
+          <a:lnRef idx="1">
+            <a:schemeClr val="accent1"/>
+          </a:lnRef>
+          <a:fillRef idx="3">
+            <a:schemeClr val="accent1"/>
+          </a:fillRef>
+          <a:effectRef idx="2">
+            <a:schemeClr val="accent1"/>
+          </a:effectRef>
+          <a:fontRef idx="minor">
+            <a:schemeClr val="lt1"/>
+          </a:fontRef>
+        </p:style>
+        <p:txBody>
+          <a:bodyPr rtlCol="0" anchor="ctr"/>
+          <a:lstStyle/>
+          <a:p>
+            <a:pPr algn="ctr"/>
+          </a:p>
+        </p:txBody>
+      </p:sp>
+      <p:pic>
+        <p:nvPicPr>
+          <p:cNvPr id="16" name="Picture 15" descr="icon-filepen-navy.png"/>
+          <p:cNvPicPr>
+            <a:picLocks noChangeAspect="1"/>
+          </p:cNvPicPr>
+          <p:nvPr/>
+        </p:nvPicPr>
+        <p:blipFill>
+          <a:blip r:embed="rId3"/>
+          <a:stretch>
+            <a:fillRect/>
+          </a:stretch>
+        </p:blipFill>
+        <p:spPr>
+          <a:xfrm>
+            <a:off x="876300" y="4940300"/>
+            <a:ext cx="228600" cy="228600"/>
+          </a:xfrm>
+          <a:prstGeom prst="rect">
+            <a:avLst/>
+          </a:prstGeom>
+        </p:spPr>
+      </p:pic>
+      <p:sp>
+        <p:nvSpPr>
+          <p:cNvPr id="17" name="TextBox 16"/>
+          <p:cNvSpPr txBox="1"/>
+          <p:nvPr/>
+        </p:nvSpPr>
+        <p:spPr>
+          <a:xfrm>
+            <a:off x="1371600" y="4927600"/>
+            <a:ext cx="1714500" cy="254000"/>
+          </a:xfrm>
+          <a:prstGeom prst="rect">
+            <a:avLst/>
+          </a:prstGeom>
+          <a:noFill/>
+        </p:spPr>
+        <p:txBody>
+          <a:bodyPr wrap="square" lIns="0" rIns="0" tIns="0" bIns="0">
+            <a:spAutoFit/>
+          </a:bodyPr>
+          <a:lstStyle/>
+          <a:p>
+            <a:pPr algn="l">
+              <a:lnSpc>
+                <a:spcPct val="100000"/>
+              </a:lnSpc>
+            </a:pPr>
+            <a:r>
+              <a:rPr sz="1600" b="0">
+                <a:solidFill>
+                  <a:srgbClr val="002333"/>
+                </a:solidFill>
+                <a:latin typeface="Inter"/>
+              </a:rPr>
+              <a:t>AI Paper Grader</a:t>
+            </a:r>
+          </a:p>
+        </p:txBody>
+      </p:sp>
+      <p:sp>
+        <p:nvSpPr>
+          <p:cNvPr id="18" name="Rounded Rectangle 17"/>
+          <p:cNvSpPr/>
+          <p:nvPr/>
+        </p:nvSpPr>
+        <p:spPr>
+          <a:xfrm>
+            <a:off x="3543300" y="4826000"/>
+            <a:ext cx="457200" cy="457200"/>
+          </a:xfrm>
+          <a:prstGeom prst="roundRect">
+            <a:avLst>
+              <a:gd name="adj" fmla="val 25000"/>
+            </a:avLst>
+          </a:prstGeom>
+          <a:solidFill>
+            <a:srgbClr val="F3F7F8"/>
+          </a:solidFill>
+          <a:ln>
+            <a:noFill/>
+          </a:ln>
+          <a:effectLst/>
+        </p:spPr>
+        <p:style>
+          <a:lnRef idx="1">
+            <a:schemeClr val="accent1"/>
+          </a:lnRef>
+          <a:fillRef idx="3">
+            <a:schemeClr val="accent1"/>
+          </a:fillRef>
+          <a:effectRef idx="2">
+            <a:schemeClr val="accent1"/>
+          </a:effectRef>
+          <a:fontRef idx="minor">
+            <a:schemeClr val="lt1"/>
+          </a:fontRef>
+        </p:style>
+        <p:txBody>
+          <a:bodyPr rtlCol="0" anchor="ctr"/>
+          <a:lstStyle/>
+          <a:p>
+            <a:pPr algn="ctr"/>
+          </a:p>
+        </p:txBody>
+      </p:sp>
+      <p:pic>
+        <p:nvPicPr>
+          <p:cNvPr id="19" name="Picture 18" descr="icon-cijfers-navy.png"/>
+          <p:cNvPicPr>
+            <a:picLocks noChangeAspect="1"/>
+          </p:cNvPicPr>
+          <p:nvPr/>
+        </p:nvPicPr>
+        <p:blipFill>
+          <a:blip r:embed="rId4"/>
+          <a:stretch>
+            <a:fillRect/>
+          </a:stretch>
+        </p:blipFill>
+        <p:spPr>
+          <a:xfrm>
+            <a:off x="3657600" y="4940300"/>
+            <a:ext cx="228600" cy="228600"/>
+          </a:xfrm>
+          <a:prstGeom prst="rect">
+            <a:avLst/>
+          </a:prstGeom>
+        </p:spPr>
+      </p:pic>
+      <p:sp>
+        <p:nvSpPr>
+          <p:cNvPr id="20" name="TextBox 19"/>
+          <p:cNvSpPr txBox="1"/>
+          <p:nvPr/>
+        </p:nvSpPr>
+        <p:spPr>
+          <a:xfrm>
+            <a:off x="4152900" y="4927600"/>
+            <a:ext cx="1714500" cy="254000"/>
+          </a:xfrm>
+          <a:prstGeom prst="rect">
+            <a:avLst/>
+          </a:prstGeom>
+          <a:noFill/>
+        </p:spPr>
+        <p:txBody>
+          <a:bodyPr wrap="square" lIns="0" rIns="0" tIns="0" bIns="0">
+            <a:spAutoFit/>
+          </a:bodyPr>
+          <a:lstStyle/>
+          <a:p>
+            <a:pPr algn="l">
+              <a:lnSpc>
+                <a:spcPct val="100000"/>
+              </a:lnSpc>
+            </a:pPr>
+            <a:r>
+              <a:rPr sz="1600" b="0">
+                <a:solidFill>
+                  <a:srgbClr val="002333"/>
+                </a:solidFill>
+                <a:latin typeface="Inter"/>
+              </a:rPr>
+              <a:t>AI Exam Grader</a:t>
+            </a:r>
+          </a:p>
+        </p:txBody>
+      </p:sp>
+      <p:sp>
+        <p:nvSpPr>
+          <p:cNvPr id="21" name="Rounded Rectangle 20"/>
+          <p:cNvSpPr/>
+          <p:nvPr/>
+        </p:nvSpPr>
+        <p:spPr>
+          <a:xfrm>
+            <a:off x="6324600" y="4826000"/>
+            <a:ext cx="457200" cy="457200"/>
+          </a:xfrm>
+          <a:prstGeom prst="roundRect">
+            <a:avLst>
+              <a:gd name="adj" fmla="val 25000"/>
+            </a:avLst>
+          </a:prstGeom>
+          <a:solidFill>
+            <a:srgbClr val="F3F7F8"/>
+          </a:solidFill>
+          <a:ln>
+            <a:noFill/>
+          </a:ln>
+          <a:effectLst/>
+        </p:spPr>
+        <p:style>
+          <a:lnRef idx="1">
+            <a:schemeClr val="accent1"/>
+          </a:lnRef>
+          <a:fillRef idx="3">
+            <a:schemeClr val="accent1"/>
+          </a:fillRef>
+          <a:effectRef idx="2">
+            <a:schemeClr val="accent1"/>
+          </a:effectRef>
+          <a:fontRef idx="minor">
+            <a:schemeClr val="lt1"/>
+          </a:fontRef>
+        </p:style>
+        <p:txBody>
+          <a:bodyPr rtlCol="0" anchor="ctr"/>
+          <a:lstStyle/>
+          <a:p>
+            <a:pPr algn="ctr"/>
+          </a:p>
+        </p:txBody>
+      </p:sp>
+      <p:pic>
+        <p:nvPicPr>
+          <p:cNvPr id="22" name="Picture 21" descr="icon-rubric-navy.png"/>
+          <p:cNvPicPr>
+            <a:picLocks noChangeAspect="1"/>
+          </p:cNvPicPr>
+          <p:nvPr/>
+        </p:nvPicPr>
+        <p:blipFill>
+          <a:blip r:embed="rId5"/>
+          <a:stretch>
+            <a:fillRect/>
+          </a:stretch>
+        </p:blipFill>
+        <p:spPr>
+          <a:xfrm>
+            <a:off x="6438900" y="4940300"/>
+            <a:ext cx="228600" cy="228600"/>
+          </a:xfrm>
+          <a:prstGeom prst="rect">
+            <a:avLst/>
+          </a:prstGeom>
+        </p:spPr>
+      </p:pic>
+      <p:sp>
+        <p:nvSpPr>
+          <p:cNvPr id="23" name="TextBox 22"/>
+          <p:cNvSpPr txBox="1"/>
+          <p:nvPr/>
+        </p:nvSpPr>
+        <p:spPr>
+          <a:xfrm>
+            <a:off x="6934200" y="4927600"/>
+            <a:ext cx="1714500" cy="254000"/>
+          </a:xfrm>
+          <a:prstGeom prst="rect">
+            <a:avLst/>
+          </a:prstGeom>
+          <a:noFill/>
+        </p:spPr>
+        <p:txBody>
+          <a:bodyPr wrap="square" lIns="0" rIns="0" tIns="0" bIns="0">
+            <a:spAutoFit/>
+          </a:bodyPr>
+          <a:lstStyle/>
+          <a:p>
+            <a:pPr algn="l">
+              <a:lnSpc>
+                <a:spcPct val="100000"/>
+              </a:lnSpc>
+            </a:pPr>
+            <a:r>
+              <a:rPr sz="1600" b="0">
+                <a:solidFill>
+                  <a:srgbClr val="002333"/>
+                </a:solidFill>
+                <a:latin typeface="Inter"/>
+              </a:rPr>
+              <a:t>Rubric-scoring</a:t>
+            </a:r>
+          </a:p>
+        </p:txBody>
+      </p:sp>
+      <p:sp>
+        <p:nvSpPr>
+          <p:cNvPr id="24" name="Rounded Rectangle 23"/>
+          <p:cNvSpPr/>
+          <p:nvPr/>
+        </p:nvSpPr>
+        <p:spPr>
+          <a:xfrm>
+            <a:off x="9105900" y="4826000"/>
+            <a:ext cx="457200" cy="457200"/>
+          </a:xfrm>
+          <a:prstGeom prst="roundRect">
+            <a:avLst>
+              <a:gd name="adj" fmla="val 25000"/>
+            </a:avLst>
+          </a:prstGeom>
+          <a:solidFill>
+            <a:srgbClr val="F3F7F8"/>
+          </a:solidFill>
+          <a:ln>
+            <a:noFill/>
+          </a:ln>
+          <a:effectLst/>
+        </p:spPr>
+        <p:style>
+          <a:lnRef idx="1">
+            <a:schemeClr val="accent1"/>
+          </a:lnRef>
+          <a:fillRef idx="3">
+            <a:schemeClr val="accent1"/>
+          </a:fillRef>
+          <a:effectRef idx="2">
+            <a:schemeClr val="accent1"/>
+          </a:effectRef>
+          <a:fontRef idx="minor">
+            <a:schemeClr val="lt1"/>
+          </a:fontRef>
+        </p:style>
+        <p:txBody>
+          <a:bodyPr rtlCol="0" anchor="ctr"/>
+          <a:lstStyle/>
+          <a:p>
+            <a:pPr algn="ctr"/>
+          </a:p>
+        </p:txBody>
+      </p:sp>
+      <p:pic>
+        <p:nvPicPr>
+          <p:cNvPr id="25" name="Picture 24" descr="icon-usercheck-navy.png"/>
+          <p:cNvPicPr>
+            <a:picLocks noChangeAspect="1"/>
+          </p:cNvPicPr>
+          <p:nvPr/>
+        </p:nvPicPr>
+        <p:blipFill>
+          <a:blip r:embed="rId6"/>
+          <a:stretch>
+            <a:fillRect/>
+          </a:stretch>
+        </p:blipFill>
+        <p:spPr>
+          <a:xfrm>
+            <a:off x="9220200" y="4940300"/>
+            <a:ext cx="228600" cy="228600"/>
+          </a:xfrm>
+          <a:prstGeom prst="rect">
+            <a:avLst/>
+          </a:prstGeom>
+        </p:spPr>
+      </p:pic>
+      <p:sp>
+        <p:nvSpPr>
+          <p:cNvPr id="26" name="TextBox 25"/>
+          <p:cNvSpPr txBox="1"/>
+          <p:nvPr/>
+        </p:nvSpPr>
+        <p:spPr>
+          <a:xfrm>
+            <a:off x="9715500" y="4927600"/>
+            <a:ext cx="1714500" cy="254000"/>
+          </a:xfrm>
+          <a:prstGeom prst="rect">
+            <a:avLst/>
+          </a:prstGeom>
+          <a:noFill/>
+        </p:spPr>
+        <p:txBody>
+          <a:bodyPr wrap="square" lIns="0" rIns="0" tIns="0" bIns="0">
+            <a:spAutoFit/>
+          </a:bodyPr>
+          <a:lstStyle/>
+          <a:p>
+            <a:pPr algn="l">
+              <a:lnSpc>
+                <a:spcPct val="100000"/>
+              </a:lnSpc>
+            </a:pPr>
+            <a:r>
+              <a:rPr sz="1600" b="0">
+                <a:solidFill>
+                  <a:srgbClr val="002333"/>
+                </a:solidFill>
+                <a:latin typeface="Inter"/>
+              </a:rPr>
+              <a:t>Docent beslist</a:t>
+            </a:r>
+          </a:p>
+        </p:txBody>
+      </p:sp>
+      <p:sp>
+        <p:nvSpPr>
+          <p:cNvPr id="27" name="Rectangle 26"/>
           <p:cNvSpPr/>
           <p:nvPr/>
         </p:nvSpPr>
@@ -9309,14 +10516,14 @@
       </p:sp>
       <p:pic>
         <p:nvPicPr>
-          <p:cNvPr id="11" name="Picture 10" descr="logo_navy.png"/>
+          <p:cNvPr id="28" name="Picture 27" descr="logo_navy.png"/>
           <p:cNvPicPr>
             <a:picLocks noChangeAspect="1"/>
           </p:cNvPicPr>
           <p:nvPr/>
         </p:nvPicPr>
         <p:blipFill>
-          <a:blip r:embed="rId2"/>
+          <a:blip r:embed="rId7"/>
           <a:stretch>
             <a:fillRect/>
           </a:stretch>
@@ -9333,7 +10540,7 @@
       </p:pic>
       <p:sp>
         <p:nvSpPr>
-          <p:cNvPr id="12" name="Rectangle 11"/>
+          <p:cNvPr id="29" name="Rectangle 28"/>
           <p:cNvSpPr/>
           <p:nvPr/>
         </p:nvSpPr>
@@ -9377,14 +10584,14 @@
       </p:sp>
       <p:pic>
         <p:nvPicPr>
-          <p:cNvPr id="13" name="Picture 12" descr="klant.png"/>
+          <p:cNvPr id="30" name="Picture 29" descr="klant.png"/>
           <p:cNvPicPr>
             <a:picLocks noChangeAspect="1"/>
           </p:cNvPicPr>
           <p:nvPr/>
         </p:nvPicPr>
         <p:blipFill>
-          <a:blip r:embed="rId3"/>
+          <a:blip r:embed="rId8"/>
           <a:stretch>
             <a:fillRect/>
           </a:stretch>
@@ -9401,7 +10608,7 @@
       </p:pic>
       <p:sp>
         <p:nvSpPr>
-          <p:cNvPr id="14" name="TextBox 13"/>
+          <p:cNvPr id="31" name="TextBox 30"/>
           <p:cNvSpPr txBox="1"/>
           <p:nvPr/>
         </p:nvSpPr>
@@ -9458,7 +10665,51 @@
       <p:grpSpPr/>
       <p:sp>
         <p:nvSpPr>
-          <p:cNvPr id="2" name="TextBox 1"/>
+          <p:cNvPr id="2" name="Rectangle 1"/>
+          <p:cNvSpPr/>
+          <p:nvPr/>
+        </p:nvSpPr>
+        <p:spPr>
+          <a:xfrm>
+            <a:off x="0" y="0"/>
+            <a:ext cx="12192000" cy="6858000"/>
+          </a:xfrm>
+          <a:prstGeom prst="rect">
+            <a:avLst/>
+          </a:prstGeom>
+          <a:solidFill>
+            <a:srgbClr val="002333"/>
+          </a:solidFill>
+          <a:ln>
+            <a:noFill/>
+          </a:ln>
+          <a:effectLst/>
+        </p:spPr>
+        <p:style>
+          <a:lnRef idx="1">
+            <a:schemeClr val="accent1"/>
+          </a:lnRef>
+          <a:fillRef idx="3">
+            <a:schemeClr val="accent1"/>
+          </a:fillRef>
+          <a:effectRef idx="2">
+            <a:schemeClr val="accent1"/>
+          </a:effectRef>
+          <a:fontRef idx="minor">
+            <a:schemeClr val="lt1"/>
+          </a:fontRef>
+        </p:style>
+        <p:txBody>
+          <a:bodyPr rtlCol="0" anchor="ctr"/>
+          <a:lstStyle/>
+          <a:p>
+            <a:pPr algn="ctr"/>
+          </a:p>
+        </p:txBody>
+      </p:sp>
+      <p:sp>
+        <p:nvSpPr>
+          <p:cNvPr id="3" name="TextBox 2"/>
           <p:cNvSpPr txBox="1"/>
           <p:nvPr/>
         </p:nvSpPr>
@@ -9486,7 +10737,7 @@
             <a:r>
               <a:rPr sz="4800" b="1">
                 <a:solidFill>
-                  <a:srgbClr val="002333"/>
+                  <a:srgbClr val="FFFFFF"/>
                 </a:solidFill>
                 <a:latin typeface="League Spartan"/>
               </a:rPr>
@@ -9497,7 +10748,7 @@
       </p:sp>
       <p:sp>
         <p:nvSpPr>
-          <p:cNvPr id="3" name="Rounded Rectangle 2"/>
+          <p:cNvPr id="4" name="Rounded Rectangle 3"/>
           <p:cNvSpPr/>
           <p:nvPr/>
         </p:nvSpPr>
@@ -9512,7 +10763,7 @@
             </a:avLst>
           </a:prstGeom>
           <a:solidFill>
-            <a:srgbClr val="F3F7F8"/>
+            <a:srgbClr val="0E3546"/>
           </a:solidFill>
           <a:ln>
             <a:noFill/>
@@ -9543,7 +10794,7 @@
       </p:sp>
       <p:sp>
         <p:nvSpPr>
-          <p:cNvPr id="4" name="TextBox 3"/>
+          <p:cNvPr id="5" name="TextBox 4"/>
           <p:cNvSpPr txBox="1"/>
           <p:nvPr/>
         </p:nvSpPr>
@@ -9571,7 +10822,7 @@
             <a:r>
               <a:rPr sz="1800" b="0">
                 <a:solidFill>
-                  <a:srgbClr val="002333"/>
+                  <a:srgbClr val="FFFFFF"/>
                 </a:solidFill>
                 <a:latin typeface="Inter"/>
               </a:rPr>
@@ -9582,7 +10833,7 @@
       </p:sp>
       <p:sp>
         <p:nvSpPr>
-          <p:cNvPr id="5" name="Rectangle 4"/>
+          <p:cNvPr id="6" name="Rectangle 5"/>
           <p:cNvSpPr/>
           <p:nvPr/>
         </p:nvSpPr>
@@ -9595,7 +10846,7 @@
             <a:avLst/>
           </a:prstGeom>
           <a:solidFill>
-            <a:srgbClr val="E7EEF0"/>
+            <a:srgbClr val="FFFFFF"/>
           </a:solidFill>
           <a:ln>
             <a:noFill/>
@@ -9624,9 +10875,55 @@
           </a:p>
         </p:txBody>
       </p:sp>
+      <p:sp>
+        <p:nvSpPr>
+          <p:cNvPr id="7" name="Rounded Rectangle 6"/>
+          <p:cNvSpPr/>
+          <p:nvPr/>
+        </p:nvSpPr>
+        <p:spPr>
+          <a:xfrm>
+            <a:off x="8890000" y="5626100"/>
+            <a:ext cx="2540000" cy="558800"/>
+          </a:xfrm>
+          <a:prstGeom prst="roundRect">
+            <a:avLst>
+              <a:gd name="adj" fmla="val 25000"/>
+            </a:avLst>
+          </a:prstGeom>
+          <a:solidFill>
+            <a:srgbClr val="FFFFFF"/>
+          </a:solidFill>
+          <a:ln>
+            <a:noFill/>
+          </a:ln>
+          <a:effectLst/>
+        </p:spPr>
+        <p:style>
+          <a:lnRef idx="1">
+            <a:schemeClr val="accent1"/>
+          </a:lnRef>
+          <a:fillRef idx="3">
+            <a:schemeClr val="accent1"/>
+          </a:fillRef>
+          <a:effectRef idx="2">
+            <a:schemeClr val="accent1"/>
+          </a:effectRef>
+          <a:fontRef idx="minor">
+            <a:schemeClr val="lt1"/>
+          </a:fontRef>
+        </p:style>
+        <p:txBody>
+          <a:bodyPr rtlCol="0" anchor="ctr"/>
+          <a:lstStyle/>
+          <a:p>
+            <a:pPr algn="ctr"/>
+          </a:p>
+        </p:txBody>
+      </p:sp>
       <p:pic>
         <p:nvPicPr>
-          <p:cNvPr id="6" name="Picture 5" descr="logo_navy.png"/>
+          <p:cNvPr id="8" name="Picture 7" descr="logo_navy.png"/>
           <p:cNvPicPr>
             <a:picLocks noChangeAspect="1"/>
           </p:cNvPicPr>
@@ -9640,7 +10937,7 @@
         </p:blipFill>
         <p:spPr>
           <a:xfrm>
-            <a:off x="9010650" y="5759450"/>
+            <a:off x="8947150" y="5759450"/>
             <a:ext cx="1079500" cy="292100"/>
           </a:xfrm>
           <a:prstGeom prst="rect">
@@ -9650,13 +10947,13 @@
       </p:pic>
       <p:sp>
         <p:nvSpPr>
-          <p:cNvPr id="7" name="Rectangle 6"/>
+          <p:cNvPr id="9" name="Rectangle 8"/>
           <p:cNvSpPr/>
           <p:nvPr/>
         </p:nvSpPr>
         <p:spPr>
           <a:xfrm>
-            <a:off x="10344150" y="5740400"/>
+            <a:off x="10280650" y="5740400"/>
             <a:ext cx="6350" cy="330200"/>
           </a:xfrm>
           <a:prstGeom prst="rect">
@@ -9694,7 +10991,7 @@
       </p:sp>
       <p:pic>
         <p:nvPicPr>
-          <p:cNvPr id="8" name="Picture 7" descr="klant.png"/>
+          <p:cNvPr id="10" name="Picture 9" descr="klant.png"/>
           <p:cNvPicPr>
             <a:picLocks noChangeAspect="1"/>
           </p:cNvPicPr>
@@ -9708,7 +11005,7 @@
         </p:blipFill>
         <p:spPr>
           <a:xfrm>
-            <a:off x="10604500" y="5702300"/>
+            <a:off x="10541000" y="5702300"/>
             <a:ext cx="406400" cy="406400"/>
           </a:xfrm>
           <a:prstGeom prst="rect">
@@ -9718,7 +11015,7 @@
       </p:pic>
       <p:sp>
         <p:nvSpPr>
-          <p:cNvPr id="9" name="TextBox 8"/>
+          <p:cNvPr id="11" name="TextBox 10"/>
           <p:cNvSpPr txBox="1"/>
           <p:nvPr/>
         </p:nvSpPr>
@@ -9746,7 +11043,7 @@
             <a:r>
               <a:rPr sz="1150" b="0">
                 <a:solidFill>
-                  <a:srgbClr val="9AAFB8"/>
+                  <a:srgbClr val="FFFFFF"/>
                 </a:solidFill>
                 <a:latin typeface="Inter"/>
               </a:rPr>
